--- a/lecons/F3/02_FORM4_FURTHER_STUDY1_Universe_and_Moon.pptx
+++ b/lecons/F3/02_FORM4_FURTHER_STUDY1_Universe_and_Moon.pptx
@@ -53,9 +53,19 @@
     <p:sldId id="301" r:id="rId47"/>
     <p:sldId id="302" r:id="rId48"/>
     <p:sldId id="303" r:id="rId49"/>
+    <p:sldId id="304" r:id="rId50"/>
+    <p:sldId id="305" r:id="rId51"/>
+    <p:sldId id="306" r:id="rId52"/>
+    <p:sldId id="307" r:id="rId53"/>
+    <p:sldId id="308" r:id="rId54"/>
+    <p:sldId id="309" r:id="rId55"/>
+    <p:sldId id="310" r:id="rId56"/>
+    <p:sldId id="311" r:id="rId57"/>
+    <p:sldId id="312" r:id="rId58"/>
+    <p:sldId id="313" r:id="rId59"/>
   </p:sldIdLst>
   <p:notesMasterIdLst>
-    <p:notesMasterId r:id="rId50"/>
+    <p:notesMasterId r:id="rId60"/>
   </p:notesMasterIdLst>
   <p:sldSz cx="12192000" cy="6858000"/>
   <p:notesSz cx="6858000" cy="12192000"/>
@@ -637,7 +647,7 @@
           <a:p>
             <a:r>
               <a:rPr lang="en-US" dirty="0"/>
-              <a:t>Listen carefully to this situation from real life. One evening, Hawaou sits outside with her grandmother. The full Moon lights up the compound. Grandmother says that people used to plant some crops according to the shape of the Moon. Hawaou wonders why the Moon changes its shape. Think about it, because I am going to ask you some questions.</a:t>
+              <a:t>Listen carefully to this situation from real life. One evening, Hawaou sits outside with her grandmother. The full Moon lights up the compound, and grandmother says that some crops are planted according to the shape of the Moon. Hawaou asks: "Why does the Moon change its shape, and how does it affect our lives?" Think about it, because I am going to ask you some questions.</a:t>
             </a:r>
             <a:endParaRPr lang="en-US" dirty="0"/>
           </a:p>
@@ -813,7 +823,7 @@
           <a:p>
             <a:r>
               <a:rPr lang="en-US" dirty="0"/>
-              <a:t>Good. Hawaou does not know why the Moon changes its shape.</a:t>
+              <a:t>Good. Hawaou does not know why the Moon changes its shape or how it affects people.</a:t>
             </a:r>
             <a:endParaRPr lang="en-US" dirty="0"/>
           </a:p>
@@ -1165,7 +1175,7 @@
           <a:p>
             <a:r>
               <a:rPr lang="en-US" dirty="0"/>
-              <a:t>Good. From the Sun. The Moon has no light of its own.</a:t>
+              <a:t>Good. From the Sun: the Moon has no light of its own.</a:t>
             </a:r>
             <a:endParaRPr lang="en-US" dirty="0"/>
           </a:p>
@@ -1957,7 +1967,7 @@
           <a:p>
             <a:r>
               <a:rPr lang="en-US" dirty="0"/>
-              <a:t>Let us check the answer together. The Sun lights half of the Moon. We see a different part of this lit half as the Moon moves.</a:t>
+              <a:t>Let us check the answer together. The Sun lights half of the Moon, and we see a different part of this lit half as the Moon moves around the Earth.</a:t>
             </a:r>
             <a:endParaRPr lang="en-US" dirty="0"/>
           </a:p>
@@ -2133,7 +2143,7 @@
           <a:p>
             <a:r>
               <a:rPr lang="en-US" dirty="0"/>
-              <a:t>Here is the question for Activity 3: The sea goes down and comes back twice a day. What causes this? Take one minute to think and write your answer in your rough notebook.</a:t>
+              <a:t>Here is the question for Activity 3: Why are these boats on the sand? Take one minute to think and write your answer in your rough notebook.</a:t>
             </a:r>
             <a:endParaRPr lang="en-US" dirty="0"/>
           </a:p>
@@ -2221,7 +2231,7 @@
           <a:p>
             <a:r>
               <a:rPr lang="en-US" dirty="0"/>
-              <a:t>Let us check the answer together. The pull (gravity) of the Moon. This is the tide.</a:t>
+              <a:t>Let us check the answer together. The sea has gone down: it is low tide.</a:t>
             </a:r>
             <a:endParaRPr lang="en-US" dirty="0"/>
           </a:p>
@@ -2309,7 +2319,7 @@
           <a:p>
             <a:r>
               <a:rPr lang="en-US" dirty="0"/>
-              <a:t>Now we are going to copy the board summary. Write the title and the headings neatly in your notebooks. I will give you enough time for each slide, so do not rush.</a:t>
+              <a:t>Here is the next question: What causes this movement of the sea? Take one minute to think and write your answer in your rough notebook.</a:t>
             </a:r>
             <a:endParaRPr lang="en-US" dirty="0"/>
           </a:p>
@@ -2397,7 +2407,7 @@
           <a:p>
             <a:r>
               <a:rPr lang="en-US" dirty="0"/>
-              <a:t>Let us copy Meaning. The universe can be defined as follows. On this slide we have Universe. Write each point on a new line, with the key term first, and explain it in your own words when we revise.</a:t>
+              <a:t>Let us check the answer together. The pull (gravity) of the Moon.</a:t>
             </a:r>
             <a:endParaRPr lang="en-US" dirty="0"/>
           </a:p>
@@ -2573,7 +2583,7 @@
           <a:p>
             <a:r>
               <a:rPr lang="en-US" dirty="0"/>
-              <a:t>Let us copy Composition. The universe is made up of the following elements. On this slide we have Galaxies and The Sun. Write each point on a new line, with the key term first, and explain it in your own words when we revise. When you finish, we go to the next slide.</a:t>
+              <a:t>Now we are going to copy the board summary. Write the title and the headings neatly in your notebooks. I will give you enough time for each slide, so do not rush.</a:t>
             </a:r>
             <a:endParaRPr lang="en-US" dirty="0"/>
           </a:p>
@@ -2661,7 +2671,7 @@
           <a:p>
             <a:r>
               <a:rPr lang="en-US" dirty="0"/>
-              <a:t>We continue with Composition. On this slide we have The Moon. Write each point on a new line, with the key term first, and explain it in your own words when we revise.</a:t>
+              <a:t>Let us copy the definitions. The key terms of this lesson are defined as follows. On this slide we have Universe and Galaxy. Write each point on a new line, with the key term first, and explain it in your own words when we revise. When you finish, we go to the next slide.</a:t>
             </a:r>
             <a:endParaRPr lang="en-US" dirty="0"/>
           </a:p>
@@ -2749,7 +2759,7 @@
           <a:p>
             <a:r>
               <a:rPr lang="en-US" dirty="0"/>
-              <a:t>Let us copy The Phases of the Moon. The Moon shows the following phases during a month. On this slide we have New Moon and First quarter. Write each point on a new line, with the key term first, and explain it in your own words when we revise. When you finish, we go to the next slide.</a:t>
+              <a:t>We continue with the definitions. On this slide we have Satellite and Phases of the Moon. Write each point on a new line, with the key term first, and explain it in your own words when we revise.</a:t>
             </a:r>
             <a:endParaRPr lang="en-US" dirty="0"/>
           </a:p>
@@ -2837,7 +2847,7 @@
           <a:p>
             <a:r>
               <a:rPr lang="en-US" dirty="0"/>
-              <a:t>We continue with The Phases of the Moon. On this slide we have Full Moon and Last quarter. Write each point on a new line, with the key term first, and explain it in your own words when we revise.</a:t>
+              <a:t>Let us copy Composition of the Universe. The universe is made up of the following elements. Copy the point on Galaxies on the left, then draw the diagram on the right: the Milky Way. Give it a title and label it clearly.</a:t>
             </a:r>
             <a:endParaRPr lang="en-US" dirty="0"/>
           </a:p>
@@ -2925,7 +2935,7 @@
           <a:p>
             <a:r>
               <a:rPr lang="en-US" dirty="0"/>
-              <a:t>Now draw this illustration in your notebook: the phases of the Moon. Give it a title and label it clearly.</a:t>
+              <a:t>We continue with Composition of the Universe. On this slide we have Stars. Write each point on a new line, with the key term first, and explain it in your own words when we revise.</a:t>
             </a:r>
             <a:endParaRPr lang="en-US" dirty="0"/>
           </a:p>
@@ -3013,7 +3023,7 @@
           <a:p>
             <a:r>
               <a:rPr lang="en-US" dirty="0"/>
-              <a:t>Let us copy Impacts of the Moon. The Moon affects the environment and human activities as follows. On this slide we have Tides and Fishing and navigation. Write each point on a new line, with the key term first, and explain it in your own words when we revise. When you finish, we go to the next slide.</a:t>
+              <a:t>Copy the point on The solar system on the left, then draw the diagram on the right: the solar system. Give it a title and label it clearly.</a:t>
             </a:r>
             <a:endParaRPr lang="en-US" dirty="0"/>
           </a:p>
@@ -3101,7 +3111,7 @@
           <a:p>
             <a:r>
               <a:rPr lang="en-US" dirty="0"/>
-              <a:t>We continue with Impacts of the Moon. On this slide we have Calendar and culture. Write each point on a new line, with the key term first, and explain it in your own words when we revise.</a:t>
+              <a:t>We continue with Composition of the Universe. On this slide we have Other bodies. Write each point on a new line, with the key term first, and explain it in your own words when we revise.</a:t>
             </a:r>
             <a:endParaRPr lang="en-US" dirty="0"/>
           </a:p>
@@ -3189,7 +3199,7 @@
           <a:p>
             <a:r>
               <a:rPr lang="en-US" dirty="0"/>
-              <a:t>Now let us check what you have understood. Question 1: What is a galaxy? Name our galaxy. Answer in your exercise book.</a:t>
+              <a:t>Let us copy Links with the Planet Earth. The Earth is linked to the rest of the universe as follows. On this slide we have Light and heat and Movements. Write each point on a new line, with the key term first, and explain it in your own words when we revise. When you finish, we go to the next slide.</a:t>
             </a:r>
             <a:endParaRPr lang="en-US" dirty="0"/>
           </a:p>
@@ -3277,7 +3287,7 @@
           <a:p>
             <a:r>
               <a:rPr lang="en-US" dirty="0"/>
-              <a:t>The expected answer is: a huge group of stars. Ours is the Milky Way. If you got it right, well done.</a:t>
+              <a:t>We continue with Links with the Planet Earth. On this slide we have Gravity and The place of the Earth. Write each point on a new line, with the key term first, and explain it in your own words when we revise.</a:t>
             </a:r>
             <a:endParaRPr lang="en-US" dirty="0"/>
           </a:p>
@@ -3365,7 +3375,7 @@
           <a:p>
             <a:r>
               <a:rPr lang="en-US" dirty="0"/>
-              <a:t>Now let us check what you have understood. Question 2: What causes the tides? Answer in your exercise book.</a:t>
+              <a:t>Let us copy The Phases of the Moon. The Moon shows the following phases during a month of about 29½ days. Copy the point on New Moon on the left, then draw the diagram on the right: the phases of the Moon. Give it a title and label it clearly.</a:t>
             </a:r>
             <a:endParaRPr lang="en-US" dirty="0"/>
           </a:p>
@@ -3541,7 +3551,7 @@
           <a:p>
             <a:r>
               <a:rPr lang="en-US" dirty="0"/>
-              <a:t>The expected answer is: the pull (gravity) of the Moon. If you got it right, well done.</a:t>
+              <a:t>We continue with The Phases of the Moon. On this slide we have First quarter, Full Moon and Last quarter. Write each point on a new line, with the key term first, and explain it in your own words when we revise.</a:t>
             </a:r>
             <a:endParaRPr lang="en-US" dirty="0"/>
           </a:p>
@@ -3629,7 +3639,7 @@
           <a:p>
             <a:r>
               <a:rPr lang="en-US" dirty="0"/>
-              <a:t>For those who need more practice, fill in the blanks in your exercise book. The answers are: number 1, Milky; number 2, Full; number 3, tides.</a:t>
+              <a:t>Let us copy Impacts on the Natural Environment. The Moon affects the natural environment as follows. Copy the point on Tides on the left, then draw the diagram on the right: how the Moon causes tides. Give it a title and label it clearly.</a:t>
             </a:r>
             <a:endParaRPr lang="en-US" dirty="0"/>
           </a:p>
@@ -3717,7 +3727,7 @@
           <a:p>
             <a:r>
               <a:rPr lang="en-US" dirty="0"/>
-              <a:t>For your homework: Look at a map of Cameroon in your atlas. Find the numbers written on the edges of the map and copy the numbers written near Garoua. We shall correct it at the beginning of our next lesson.</a:t>
+              <a:t>We continue with Impacts on the Natural Environment. On this slide we have Spring and neap tides. Write each point on a new line, with the key term first, and explain it in your own words when we revise. When you finish, we go to the next slide.</a:t>
             </a:r>
             <a:endParaRPr lang="en-US" dirty="0"/>
           </a:p>
@@ -3805,7 +3815,7 @@
           <a:p>
             <a:r>
               <a:rPr lang="en-US" dirty="0"/>
-              <a:t>Our next lesson will be on Lesson 2: Earth Divisions: Latitudes and Longitudes. Thank you for your attention, and see you next time.</a:t>
+              <a:t>We continue with Impacts on the Natural Environment. On this slide we have Light at night and Eclipses. Write each point on a new line, with the key term first, and explain it in your own words when we revise.</a:t>
             </a:r>
             <a:endParaRPr lang="en-US" dirty="0"/>
           </a:p>
@@ -3893,7 +3903,7 @@
           <a:p>
             <a:r>
               <a:rPr lang="en-US" dirty="0"/>
-              <a:t>Let us play the bilingual game. I say a word in English, and you give me the French word. Then we do the reverse.</a:t>
+              <a:t>Let us copy Impacts on Human Activities. The Moon affects human socio-economic activities as follows. Copy the point on Fishing on the left, then draw the diagram on the right: boats at low tide. Give it a title and label it clearly.</a:t>
             </a:r>
             <a:endParaRPr lang="en-US" dirty="0"/>
           </a:p>
@@ -3981,7 +3991,7 @@
           <a:p>
             <a:r>
               <a:rPr lang="en-US" dirty="0"/>
-              <a:t>I record this information in the official logbook of the class after the lesson.</a:t>
+              <a:t>We continue with Impacts on Human Activities. On this slide we have Navigation and ports and Calendars and feasts. Write each point on a new line, with the key term first, and explain it in your own words when we revise. When you finish, we go to the next slide.</a:t>
             </a:r>
             <a:endParaRPr lang="en-US" dirty="0"/>
           </a:p>
@@ -4069,7 +4079,7 @@
           <a:p>
             <a:r>
               <a:rPr lang="en-US" dirty="0"/>
-              <a:t>I complete the second page of the logbook: the matter taught, the evaluation, the homework and the attendance.</a:t>
+              <a:t>We continue with Impacts on Human Activities. On this slide we have Farming and tradition. Write each point on a new line, with the key term first, and explain it in your own words when we revise.</a:t>
             </a:r>
             <a:endParaRPr lang="en-US" dirty="0"/>
           </a:p>
@@ -4157,7 +4167,7 @@
           <a:p>
             <a:r>
               <a:rPr lang="en-US" dirty="0"/>
-              <a:t>This slide is for me, the teacher: it gives the timing of the lesson and what to do if the projector is not available.</a:t>
+              <a:t>Now let us check what you have understood. Question 1: What is a galaxy? Name our galaxy. Answer in your exercise book.</a:t>
             </a:r>
             <a:endParaRPr lang="en-US" dirty="0"/>
           </a:p>
@@ -4245,7 +4255,7 @@
           <a:p>
             <a:r>
               <a:rPr lang="en-US" dirty="0"/>
-              <a:t>These are the references and picture credits used to prepare this lesson.</a:t>
+              <a:t>The expected answer is: a huge group of stars. Ours is the Milky Way. If you got it right, well done.</a:t>
             </a:r>
             <a:endParaRPr lang="en-US" dirty="0"/>
           </a:p>
@@ -4269,6 +4279,94 @@
             <a:fld id="{F7021451-1387-4CA6-816F-3879F97B5CBC}" type="slidenum">
               <a:rPr lang="en-US"/>
               <a:t>48</a:t>
+            </a:fld>
+            <a:endParaRPr lang="en-US"/>
+          </a:p>
+        </p:txBody>
+      </p:sp>
+    </p:spTree>
+    <p:extLst>
+      <p:ext uri="{BB962C8B-B14F-4D97-AF65-F5344CB8AC3E}">
+        <p14:creationId xmlns:p14="http://schemas.microsoft.com/office/powerpoint/2010/main" val="1024086991"/>
+      </p:ext>
+    </p:extLst>
+  </p:cSld>
+  <p:clrMapOvr>
+    <a:masterClrMapping/>
+  </p:clrMapOvr>
+</p:notes>
+</file>
+
+<file path=ppt/notesSlides/notesSlide49.xml><?xml version="1.0" encoding="utf-8"?>
+<p:notes xmlns:a="http://schemas.openxmlformats.org/drawingml/2006/main" xmlns:r="http://schemas.openxmlformats.org/officeDocument/2006/relationships" xmlns:p="http://schemas.openxmlformats.org/presentationml/2006/main">
+  <p:cSld>
+    <p:spTree>
+      <p:nvGrpSpPr>
+        <p:cNvPr id="1" name=""/>
+        <p:cNvGrpSpPr/>
+        <p:nvPr/>
+      </p:nvGrpSpPr>
+      <p:grpSpPr>
+        <a:xfrm>
+          <a:off x="0" y="0"/>
+          <a:ext cx="0" cy="0"/>
+          <a:chOff x="0" y="0"/>
+          <a:chExt cx="0" cy="0"/>
+        </a:xfrm>
+      </p:grpSpPr>
+      <p:sp>
+        <p:nvSpPr>
+          <p:cNvPr id="2" name="Slide Image Placeholder 1"/>
+          <p:cNvSpPr>
+            <a:spLocks noGrp="1" noRot="1" noChangeAspect="1"/>
+          </p:cNvSpPr>
+          <p:nvPr>
+            <p:ph type="sldImg"/>
+          </p:nvPr>
+        </p:nvSpPr>
+        <p:spPr/>
+      </p:sp>
+      <p:sp>
+        <p:nvSpPr>
+          <p:cNvPr id="3" name="Notes Placeholder 2"/>
+          <p:cNvSpPr>
+            <a:spLocks noGrp="1"/>
+          </p:cNvSpPr>
+          <p:nvPr>
+            <p:ph type="body" idx="1"/>
+          </p:nvPr>
+        </p:nvSpPr>
+        <p:spPr/>
+        <p:txBody>
+          <a:bodyPr/>
+          <a:lstStyle/>
+          <a:p>
+            <a:r>
+              <a:rPr lang="en-US" dirty="0"/>
+              <a:t>Now let us check what you have understood. Question 2: What causes the tides? Answer in your exercise book.</a:t>
+            </a:r>
+            <a:endParaRPr lang="en-US" dirty="0"/>
+          </a:p>
+        </p:txBody>
+      </p:sp>
+      <p:sp>
+        <p:nvSpPr>
+          <p:cNvPr id="4" name="Slide Number Placeholder 3"/>
+          <p:cNvSpPr>
+            <a:spLocks noGrp="1"/>
+          </p:cNvSpPr>
+          <p:nvPr>
+            <p:ph type="sldNum" sz="quarter" idx="10"/>
+          </p:nvPr>
+        </p:nvSpPr>
+        <p:spPr/>
+        <p:txBody>
+          <a:bodyPr/>
+          <a:lstStyle/>
+          <a:p>
+            <a:fld id="{F7021451-1387-4CA6-816F-3879F97B5CBC}" type="slidenum">
+              <a:rPr lang="en-US"/>
+              <a:t>49</a:t>
             </a:fld>
             <a:endParaRPr lang="en-US"/>
           </a:p>
@@ -4357,6 +4455,798 @@
             <a:fld id="{F7021451-1387-4CA6-816F-3879F97B5CBC}" type="slidenum">
               <a:rPr lang="en-US"/>
               <a:t>5</a:t>
+            </a:fld>
+            <a:endParaRPr lang="en-US"/>
+          </a:p>
+        </p:txBody>
+      </p:sp>
+    </p:spTree>
+    <p:extLst>
+      <p:ext uri="{BB962C8B-B14F-4D97-AF65-F5344CB8AC3E}">
+        <p14:creationId xmlns:p14="http://schemas.microsoft.com/office/powerpoint/2010/main" val="1024086991"/>
+      </p:ext>
+    </p:extLst>
+  </p:cSld>
+  <p:clrMapOvr>
+    <a:masterClrMapping/>
+  </p:clrMapOvr>
+</p:notes>
+</file>
+
+<file path=ppt/notesSlides/notesSlide50.xml><?xml version="1.0" encoding="utf-8"?>
+<p:notes xmlns:a="http://schemas.openxmlformats.org/drawingml/2006/main" xmlns:r="http://schemas.openxmlformats.org/officeDocument/2006/relationships" xmlns:p="http://schemas.openxmlformats.org/presentationml/2006/main">
+  <p:cSld>
+    <p:spTree>
+      <p:nvGrpSpPr>
+        <p:cNvPr id="1" name=""/>
+        <p:cNvGrpSpPr/>
+        <p:nvPr/>
+      </p:nvGrpSpPr>
+      <p:grpSpPr>
+        <a:xfrm>
+          <a:off x="0" y="0"/>
+          <a:ext cx="0" cy="0"/>
+          <a:chOff x="0" y="0"/>
+          <a:chExt cx="0" cy="0"/>
+        </a:xfrm>
+      </p:grpSpPr>
+      <p:sp>
+        <p:nvSpPr>
+          <p:cNvPr id="2" name="Slide Image Placeholder 1"/>
+          <p:cNvSpPr>
+            <a:spLocks noGrp="1" noRot="1" noChangeAspect="1"/>
+          </p:cNvSpPr>
+          <p:nvPr>
+            <p:ph type="sldImg"/>
+          </p:nvPr>
+        </p:nvSpPr>
+        <p:spPr/>
+      </p:sp>
+      <p:sp>
+        <p:nvSpPr>
+          <p:cNvPr id="3" name="Notes Placeholder 2"/>
+          <p:cNvSpPr>
+            <a:spLocks noGrp="1"/>
+          </p:cNvSpPr>
+          <p:nvPr>
+            <p:ph type="body" idx="1"/>
+          </p:nvPr>
+        </p:nvSpPr>
+        <p:spPr/>
+        <p:txBody>
+          <a:bodyPr/>
+          <a:lstStyle/>
+          <a:p>
+            <a:r>
+              <a:rPr lang="en-US" dirty="0"/>
+              <a:t>The expected answer is: the pull (gravity) of the Moon. If you got it right, well done.</a:t>
+            </a:r>
+            <a:endParaRPr lang="en-US" dirty="0"/>
+          </a:p>
+        </p:txBody>
+      </p:sp>
+      <p:sp>
+        <p:nvSpPr>
+          <p:cNvPr id="4" name="Slide Number Placeholder 3"/>
+          <p:cNvSpPr>
+            <a:spLocks noGrp="1"/>
+          </p:cNvSpPr>
+          <p:nvPr>
+            <p:ph type="sldNum" sz="quarter" idx="10"/>
+          </p:nvPr>
+        </p:nvSpPr>
+        <p:spPr/>
+        <p:txBody>
+          <a:bodyPr/>
+          <a:lstStyle/>
+          <a:p>
+            <a:fld id="{F7021451-1387-4CA6-816F-3879F97B5CBC}" type="slidenum">
+              <a:rPr lang="en-US"/>
+              <a:t>50</a:t>
+            </a:fld>
+            <a:endParaRPr lang="en-US"/>
+          </a:p>
+        </p:txBody>
+      </p:sp>
+    </p:spTree>
+    <p:extLst>
+      <p:ext uri="{BB962C8B-B14F-4D97-AF65-F5344CB8AC3E}">
+        <p14:creationId xmlns:p14="http://schemas.microsoft.com/office/powerpoint/2010/main" val="1024086991"/>
+      </p:ext>
+    </p:extLst>
+  </p:cSld>
+  <p:clrMapOvr>
+    <a:masterClrMapping/>
+  </p:clrMapOvr>
+</p:notes>
+</file>
+
+<file path=ppt/notesSlides/notesSlide51.xml><?xml version="1.0" encoding="utf-8"?>
+<p:notes xmlns:a="http://schemas.openxmlformats.org/drawingml/2006/main" xmlns:r="http://schemas.openxmlformats.org/officeDocument/2006/relationships" xmlns:p="http://schemas.openxmlformats.org/presentationml/2006/main">
+  <p:cSld>
+    <p:spTree>
+      <p:nvGrpSpPr>
+        <p:cNvPr id="1" name=""/>
+        <p:cNvGrpSpPr/>
+        <p:nvPr/>
+      </p:nvGrpSpPr>
+      <p:grpSpPr>
+        <a:xfrm>
+          <a:off x="0" y="0"/>
+          <a:ext cx="0" cy="0"/>
+          <a:chOff x="0" y="0"/>
+          <a:chExt cx="0" cy="0"/>
+        </a:xfrm>
+      </p:grpSpPr>
+      <p:sp>
+        <p:nvSpPr>
+          <p:cNvPr id="2" name="Slide Image Placeholder 1"/>
+          <p:cNvSpPr>
+            <a:spLocks noGrp="1" noRot="1" noChangeAspect="1"/>
+          </p:cNvSpPr>
+          <p:nvPr>
+            <p:ph type="sldImg"/>
+          </p:nvPr>
+        </p:nvSpPr>
+        <p:spPr/>
+      </p:sp>
+      <p:sp>
+        <p:nvSpPr>
+          <p:cNvPr id="3" name="Notes Placeholder 2"/>
+          <p:cNvSpPr>
+            <a:spLocks noGrp="1"/>
+          </p:cNvSpPr>
+          <p:nvPr>
+            <p:ph type="body" idx="1"/>
+          </p:nvPr>
+        </p:nvSpPr>
+        <p:spPr/>
+        <p:txBody>
+          <a:bodyPr/>
+          <a:lstStyle/>
+          <a:p>
+            <a:r>
+              <a:rPr lang="en-US" dirty="0"/>
+              <a:t>For those who need more practice, fill in the blanks in your exercise book. The answers are: number 1, Milky; number 2, Full; number 3, tides.</a:t>
+            </a:r>
+            <a:endParaRPr lang="en-US" dirty="0"/>
+          </a:p>
+        </p:txBody>
+      </p:sp>
+      <p:sp>
+        <p:nvSpPr>
+          <p:cNvPr id="4" name="Slide Number Placeholder 3"/>
+          <p:cNvSpPr>
+            <a:spLocks noGrp="1"/>
+          </p:cNvSpPr>
+          <p:nvPr>
+            <p:ph type="sldNum" sz="quarter" idx="10"/>
+          </p:nvPr>
+        </p:nvSpPr>
+        <p:spPr/>
+        <p:txBody>
+          <a:bodyPr/>
+          <a:lstStyle/>
+          <a:p>
+            <a:fld id="{F7021451-1387-4CA6-816F-3879F97B5CBC}" type="slidenum">
+              <a:rPr lang="en-US"/>
+              <a:t>51</a:t>
+            </a:fld>
+            <a:endParaRPr lang="en-US"/>
+          </a:p>
+        </p:txBody>
+      </p:sp>
+    </p:spTree>
+    <p:extLst>
+      <p:ext uri="{BB962C8B-B14F-4D97-AF65-F5344CB8AC3E}">
+        <p14:creationId xmlns:p14="http://schemas.microsoft.com/office/powerpoint/2010/main" val="1024086991"/>
+      </p:ext>
+    </p:extLst>
+  </p:cSld>
+  <p:clrMapOvr>
+    <a:masterClrMapping/>
+  </p:clrMapOvr>
+</p:notes>
+</file>
+
+<file path=ppt/notesSlides/notesSlide52.xml><?xml version="1.0" encoding="utf-8"?>
+<p:notes xmlns:a="http://schemas.openxmlformats.org/drawingml/2006/main" xmlns:r="http://schemas.openxmlformats.org/officeDocument/2006/relationships" xmlns:p="http://schemas.openxmlformats.org/presentationml/2006/main">
+  <p:cSld>
+    <p:spTree>
+      <p:nvGrpSpPr>
+        <p:cNvPr id="1" name=""/>
+        <p:cNvGrpSpPr/>
+        <p:nvPr/>
+      </p:nvGrpSpPr>
+      <p:grpSpPr>
+        <a:xfrm>
+          <a:off x="0" y="0"/>
+          <a:ext cx="0" cy="0"/>
+          <a:chOff x="0" y="0"/>
+          <a:chExt cx="0" cy="0"/>
+        </a:xfrm>
+      </p:grpSpPr>
+      <p:sp>
+        <p:nvSpPr>
+          <p:cNvPr id="2" name="Slide Image Placeholder 1"/>
+          <p:cNvSpPr>
+            <a:spLocks noGrp="1" noRot="1" noChangeAspect="1"/>
+          </p:cNvSpPr>
+          <p:nvPr>
+            <p:ph type="sldImg"/>
+          </p:nvPr>
+        </p:nvSpPr>
+        <p:spPr/>
+      </p:sp>
+      <p:sp>
+        <p:nvSpPr>
+          <p:cNvPr id="3" name="Notes Placeholder 2"/>
+          <p:cNvSpPr>
+            <a:spLocks noGrp="1"/>
+          </p:cNvSpPr>
+          <p:nvPr>
+            <p:ph type="body" idx="1"/>
+          </p:nvPr>
+        </p:nvSpPr>
+        <p:spPr/>
+        <p:txBody>
+          <a:bodyPr/>
+          <a:lstStyle/>
+          <a:p>
+            <a:r>
+              <a:rPr lang="en-US" dirty="0"/>
+              <a:t>For your homework: Look at a map of Cameroon in your atlas. Find the numbers written on the edges of the map and copy the numbers written near Garoua. We shall correct it at the beginning of our next lesson.</a:t>
+            </a:r>
+            <a:endParaRPr lang="en-US" dirty="0"/>
+          </a:p>
+        </p:txBody>
+      </p:sp>
+      <p:sp>
+        <p:nvSpPr>
+          <p:cNvPr id="4" name="Slide Number Placeholder 3"/>
+          <p:cNvSpPr>
+            <a:spLocks noGrp="1"/>
+          </p:cNvSpPr>
+          <p:nvPr>
+            <p:ph type="sldNum" sz="quarter" idx="10"/>
+          </p:nvPr>
+        </p:nvSpPr>
+        <p:spPr/>
+        <p:txBody>
+          <a:bodyPr/>
+          <a:lstStyle/>
+          <a:p>
+            <a:fld id="{F7021451-1387-4CA6-816F-3879F97B5CBC}" type="slidenum">
+              <a:rPr lang="en-US"/>
+              <a:t>52</a:t>
+            </a:fld>
+            <a:endParaRPr lang="en-US"/>
+          </a:p>
+        </p:txBody>
+      </p:sp>
+    </p:spTree>
+    <p:extLst>
+      <p:ext uri="{BB962C8B-B14F-4D97-AF65-F5344CB8AC3E}">
+        <p14:creationId xmlns:p14="http://schemas.microsoft.com/office/powerpoint/2010/main" val="1024086991"/>
+      </p:ext>
+    </p:extLst>
+  </p:cSld>
+  <p:clrMapOvr>
+    <a:masterClrMapping/>
+  </p:clrMapOvr>
+</p:notes>
+</file>
+
+<file path=ppt/notesSlides/notesSlide53.xml><?xml version="1.0" encoding="utf-8"?>
+<p:notes xmlns:a="http://schemas.openxmlformats.org/drawingml/2006/main" xmlns:r="http://schemas.openxmlformats.org/officeDocument/2006/relationships" xmlns:p="http://schemas.openxmlformats.org/presentationml/2006/main">
+  <p:cSld>
+    <p:spTree>
+      <p:nvGrpSpPr>
+        <p:cNvPr id="1" name=""/>
+        <p:cNvGrpSpPr/>
+        <p:nvPr/>
+      </p:nvGrpSpPr>
+      <p:grpSpPr>
+        <a:xfrm>
+          <a:off x="0" y="0"/>
+          <a:ext cx="0" cy="0"/>
+          <a:chOff x="0" y="0"/>
+          <a:chExt cx="0" cy="0"/>
+        </a:xfrm>
+      </p:grpSpPr>
+      <p:sp>
+        <p:nvSpPr>
+          <p:cNvPr id="2" name="Slide Image Placeholder 1"/>
+          <p:cNvSpPr>
+            <a:spLocks noGrp="1" noRot="1" noChangeAspect="1"/>
+          </p:cNvSpPr>
+          <p:nvPr>
+            <p:ph type="sldImg"/>
+          </p:nvPr>
+        </p:nvSpPr>
+        <p:spPr/>
+      </p:sp>
+      <p:sp>
+        <p:nvSpPr>
+          <p:cNvPr id="3" name="Notes Placeholder 2"/>
+          <p:cNvSpPr>
+            <a:spLocks noGrp="1"/>
+          </p:cNvSpPr>
+          <p:nvPr>
+            <p:ph type="body" idx="1"/>
+          </p:nvPr>
+        </p:nvSpPr>
+        <p:spPr/>
+        <p:txBody>
+          <a:bodyPr/>
+          <a:lstStyle/>
+          <a:p>
+            <a:r>
+              <a:rPr lang="en-US" dirty="0"/>
+              <a:t>Our next lesson will be on Lesson 2: Earth Divisions: Latitudes and Longitudes. Thank you for your attention, and see you next time.</a:t>
+            </a:r>
+            <a:endParaRPr lang="en-US" dirty="0"/>
+          </a:p>
+        </p:txBody>
+      </p:sp>
+      <p:sp>
+        <p:nvSpPr>
+          <p:cNvPr id="4" name="Slide Number Placeholder 3"/>
+          <p:cNvSpPr>
+            <a:spLocks noGrp="1"/>
+          </p:cNvSpPr>
+          <p:nvPr>
+            <p:ph type="sldNum" sz="quarter" idx="10"/>
+          </p:nvPr>
+        </p:nvSpPr>
+        <p:spPr/>
+        <p:txBody>
+          <a:bodyPr/>
+          <a:lstStyle/>
+          <a:p>
+            <a:fld id="{F7021451-1387-4CA6-816F-3879F97B5CBC}" type="slidenum">
+              <a:rPr lang="en-US"/>
+              <a:t>53</a:t>
+            </a:fld>
+            <a:endParaRPr lang="en-US"/>
+          </a:p>
+        </p:txBody>
+      </p:sp>
+    </p:spTree>
+    <p:extLst>
+      <p:ext uri="{BB962C8B-B14F-4D97-AF65-F5344CB8AC3E}">
+        <p14:creationId xmlns:p14="http://schemas.microsoft.com/office/powerpoint/2010/main" val="1024086991"/>
+      </p:ext>
+    </p:extLst>
+  </p:cSld>
+  <p:clrMapOvr>
+    <a:masterClrMapping/>
+  </p:clrMapOvr>
+</p:notes>
+</file>
+
+<file path=ppt/notesSlides/notesSlide54.xml><?xml version="1.0" encoding="utf-8"?>
+<p:notes xmlns:a="http://schemas.openxmlformats.org/drawingml/2006/main" xmlns:r="http://schemas.openxmlformats.org/officeDocument/2006/relationships" xmlns:p="http://schemas.openxmlformats.org/presentationml/2006/main">
+  <p:cSld>
+    <p:spTree>
+      <p:nvGrpSpPr>
+        <p:cNvPr id="1" name=""/>
+        <p:cNvGrpSpPr/>
+        <p:nvPr/>
+      </p:nvGrpSpPr>
+      <p:grpSpPr>
+        <a:xfrm>
+          <a:off x="0" y="0"/>
+          <a:ext cx="0" cy="0"/>
+          <a:chOff x="0" y="0"/>
+          <a:chExt cx="0" cy="0"/>
+        </a:xfrm>
+      </p:grpSpPr>
+      <p:sp>
+        <p:nvSpPr>
+          <p:cNvPr id="2" name="Slide Image Placeholder 1"/>
+          <p:cNvSpPr>
+            <a:spLocks noGrp="1" noRot="1" noChangeAspect="1"/>
+          </p:cNvSpPr>
+          <p:nvPr>
+            <p:ph type="sldImg"/>
+          </p:nvPr>
+        </p:nvSpPr>
+        <p:spPr/>
+      </p:sp>
+      <p:sp>
+        <p:nvSpPr>
+          <p:cNvPr id="3" name="Notes Placeholder 2"/>
+          <p:cNvSpPr>
+            <a:spLocks noGrp="1"/>
+          </p:cNvSpPr>
+          <p:nvPr>
+            <p:ph type="body" idx="1"/>
+          </p:nvPr>
+        </p:nvSpPr>
+        <p:spPr/>
+        <p:txBody>
+          <a:bodyPr/>
+          <a:lstStyle/>
+          <a:p>
+            <a:r>
+              <a:rPr lang="en-US" dirty="0"/>
+              <a:t>Let us play the bilingual game. I say a word in English, and you give me the French word. Then we do the reverse.</a:t>
+            </a:r>
+            <a:endParaRPr lang="en-US" dirty="0"/>
+          </a:p>
+        </p:txBody>
+      </p:sp>
+      <p:sp>
+        <p:nvSpPr>
+          <p:cNvPr id="4" name="Slide Number Placeholder 3"/>
+          <p:cNvSpPr>
+            <a:spLocks noGrp="1"/>
+          </p:cNvSpPr>
+          <p:nvPr>
+            <p:ph type="sldNum" sz="quarter" idx="10"/>
+          </p:nvPr>
+        </p:nvSpPr>
+        <p:spPr/>
+        <p:txBody>
+          <a:bodyPr/>
+          <a:lstStyle/>
+          <a:p>
+            <a:fld id="{F7021451-1387-4CA6-816F-3879F97B5CBC}" type="slidenum">
+              <a:rPr lang="en-US"/>
+              <a:t>54</a:t>
+            </a:fld>
+            <a:endParaRPr lang="en-US"/>
+          </a:p>
+        </p:txBody>
+      </p:sp>
+    </p:spTree>
+    <p:extLst>
+      <p:ext uri="{BB962C8B-B14F-4D97-AF65-F5344CB8AC3E}">
+        <p14:creationId xmlns:p14="http://schemas.microsoft.com/office/powerpoint/2010/main" val="1024086991"/>
+      </p:ext>
+    </p:extLst>
+  </p:cSld>
+  <p:clrMapOvr>
+    <a:masterClrMapping/>
+  </p:clrMapOvr>
+</p:notes>
+</file>
+
+<file path=ppt/notesSlides/notesSlide55.xml><?xml version="1.0" encoding="utf-8"?>
+<p:notes xmlns:a="http://schemas.openxmlformats.org/drawingml/2006/main" xmlns:r="http://schemas.openxmlformats.org/officeDocument/2006/relationships" xmlns:p="http://schemas.openxmlformats.org/presentationml/2006/main">
+  <p:cSld>
+    <p:spTree>
+      <p:nvGrpSpPr>
+        <p:cNvPr id="1" name=""/>
+        <p:cNvGrpSpPr/>
+        <p:nvPr/>
+      </p:nvGrpSpPr>
+      <p:grpSpPr>
+        <a:xfrm>
+          <a:off x="0" y="0"/>
+          <a:ext cx="0" cy="0"/>
+          <a:chOff x="0" y="0"/>
+          <a:chExt cx="0" cy="0"/>
+        </a:xfrm>
+      </p:grpSpPr>
+      <p:sp>
+        <p:nvSpPr>
+          <p:cNvPr id="2" name="Slide Image Placeholder 1"/>
+          <p:cNvSpPr>
+            <a:spLocks noGrp="1" noRot="1" noChangeAspect="1"/>
+          </p:cNvSpPr>
+          <p:nvPr>
+            <p:ph type="sldImg"/>
+          </p:nvPr>
+        </p:nvSpPr>
+        <p:spPr/>
+      </p:sp>
+      <p:sp>
+        <p:nvSpPr>
+          <p:cNvPr id="3" name="Notes Placeholder 2"/>
+          <p:cNvSpPr>
+            <a:spLocks noGrp="1"/>
+          </p:cNvSpPr>
+          <p:nvPr>
+            <p:ph type="body" idx="1"/>
+          </p:nvPr>
+        </p:nvSpPr>
+        <p:spPr/>
+        <p:txBody>
+          <a:bodyPr/>
+          <a:lstStyle/>
+          <a:p>
+            <a:r>
+              <a:rPr lang="en-US" dirty="0"/>
+              <a:t>I record this information in the official logbook of the class after the lesson.</a:t>
+            </a:r>
+            <a:endParaRPr lang="en-US" dirty="0"/>
+          </a:p>
+        </p:txBody>
+      </p:sp>
+      <p:sp>
+        <p:nvSpPr>
+          <p:cNvPr id="4" name="Slide Number Placeholder 3"/>
+          <p:cNvSpPr>
+            <a:spLocks noGrp="1"/>
+          </p:cNvSpPr>
+          <p:nvPr>
+            <p:ph type="sldNum" sz="quarter" idx="10"/>
+          </p:nvPr>
+        </p:nvSpPr>
+        <p:spPr/>
+        <p:txBody>
+          <a:bodyPr/>
+          <a:lstStyle/>
+          <a:p>
+            <a:fld id="{F7021451-1387-4CA6-816F-3879F97B5CBC}" type="slidenum">
+              <a:rPr lang="en-US"/>
+              <a:t>55</a:t>
+            </a:fld>
+            <a:endParaRPr lang="en-US"/>
+          </a:p>
+        </p:txBody>
+      </p:sp>
+    </p:spTree>
+    <p:extLst>
+      <p:ext uri="{BB962C8B-B14F-4D97-AF65-F5344CB8AC3E}">
+        <p14:creationId xmlns:p14="http://schemas.microsoft.com/office/powerpoint/2010/main" val="1024086991"/>
+      </p:ext>
+    </p:extLst>
+  </p:cSld>
+  <p:clrMapOvr>
+    <a:masterClrMapping/>
+  </p:clrMapOvr>
+</p:notes>
+</file>
+
+<file path=ppt/notesSlides/notesSlide56.xml><?xml version="1.0" encoding="utf-8"?>
+<p:notes xmlns:a="http://schemas.openxmlformats.org/drawingml/2006/main" xmlns:r="http://schemas.openxmlformats.org/officeDocument/2006/relationships" xmlns:p="http://schemas.openxmlformats.org/presentationml/2006/main">
+  <p:cSld>
+    <p:spTree>
+      <p:nvGrpSpPr>
+        <p:cNvPr id="1" name=""/>
+        <p:cNvGrpSpPr/>
+        <p:nvPr/>
+      </p:nvGrpSpPr>
+      <p:grpSpPr>
+        <a:xfrm>
+          <a:off x="0" y="0"/>
+          <a:ext cx="0" cy="0"/>
+          <a:chOff x="0" y="0"/>
+          <a:chExt cx="0" cy="0"/>
+        </a:xfrm>
+      </p:grpSpPr>
+      <p:sp>
+        <p:nvSpPr>
+          <p:cNvPr id="2" name="Slide Image Placeholder 1"/>
+          <p:cNvSpPr>
+            <a:spLocks noGrp="1" noRot="1" noChangeAspect="1"/>
+          </p:cNvSpPr>
+          <p:nvPr>
+            <p:ph type="sldImg"/>
+          </p:nvPr>
+        </p:nvSpPr>
+        <p:spPr/>
+      </p:sp>
+      <p:sp>
+        <p:nvSpPr>
+          <p:cNvPr id="3" name="Notes Placeholder 2"/>
+          <p:cNvSpPr>
+            <a:spLocks noGrp="1"/>
+          </p:cNvSpPr>
+          <p:nvPr>
+            <p:ph type="body" idx="1"/>
+          </p:nvPr>
+        </p:nvSpPr>
+        <p:spPr/>
+        <p:txBody>
+          <a:bodyPr/>
+          <a:lstStyle/>
+          <a:p>
+            <a:r>
+              <a:rPr lang="en-US" dirty="0"/>
+              <a:t>I complete the second page of the logbook: the matter taught, the evaluation, the homework and the attendance.</a:t>
+            </a:r>
+            <a:endParaRPr lang="en-US" dirty="0"/>
+          </a:p>
+        </p:txBody>
+      </p:sp>
+      <p:sp>
+        <p:nvSpPr>
+          <p:cNvPr id="4" name="Slide Number Placeholder 3"/>
+          <p:cNvSpPr>
+            <a:spLocks noGrp="1"/>
+          </p:cNvSpPr>
+          <p:nvPr>
+            <p:ph type="sldNum" sz="quarter" idx="10"/>
+          </p:nvPr>
+        </p:nvSpPr>
+        <p:spPr/>
+        <p:txBody>
+          <a:bodyPr/>
+          <a:lstStyle/>
+          <a:p>
+            <a:fld id="{F7021451-1387-4CA6-816F-3879F97B5CBC}" type="slidenum">
+              <a:rPr lang="en-US"/>
+              <a:t>56</a:t>
+            </a:fld>
+            <a:endParaRPr lang="en-US"/>
+          </a:p>
+        </p:txBody>
+      </p:sp>
+    </p:spTree>
+    <p:extLst>
+      <p:ext uri="{BB962C8B-B14F-4D97-AF65-F5344CB8AC3E}">
+        <p14:creationId xmlns:p14="http://schemas.microsoft.com/office/powerpoint/2010/main" val="1024086991"/>
+      </p:ext>
+    </p:extLst>
+  </p:cSld>
+  <p:clrMapOvr>
+    <a:masterClrMapping/>
+  </p:clrMapOvr>
+</p:notes>
+</file>
+
+<file path=ppt/notesSlides/notesSlide57.xml><?xml version="1.0" encoding="utf-8"?>
+<p:notes xmlns:a="http://schemas.openxmlformats.org/drawingml/2006/main" xmlns:r="http://schemas.openxmlformats.org/officeDocument/2006/relationships" xmlns:p="http://schemas.openxmlformats.org/presentationml/2006/main">
+  <p:cSld>
+    <p:spTree>
+      <p:nvGrpSpPr>
+        <p:cNvPr id="1" name=""/>
+        <p:cNvGrpSpPr/>
+        <p:nvPr/>
+      </p:nvGrpSpPr>
+      <p:grpSpPr>
+        <a:xfrm>
+          <a:off x="0" y="0"/>
+          <a:ext cx="0" cy="0"/>
+          <a:chOff x="0" y="0"/>
+          <a:chExt cx="0" cy="0"/>
+        </a:xfrm>
+      </p:grpSpPr>
+      <p:sp>
+        <p:nvSpPr>
+          <p:cNvPr id="2" name="Slide Image Placeholder 1"/>
+          <p:cNvSpPr>
+            <a:spLocks noGrp="1" noRot="1" noChangeAspect="1"/>
+          </p:cNvSpPr>
+          <p:nvPr>
+            <p:ph type="sldImg"/>
+          </p:nvPr>
+        </p:nvSpPr>
+        <p:spPr/>
+      </p:sp>
+      <p:sp>
+        <p:nvSpPr>
+          <p:cNvPr id="3" name="Notes Placeholder 2"/>
+          <p:cNvSpPr>
+            <a:spLocks noGrp="1"/>
+          </p:cNvSpPr>
+          <p:nvPr>
+            <p:ph type="body" idx="1"/>
+          </p:nvPr>
+        </p:nvSpPr>
+        <p:spPr/>
+        <p:txBody>
+          <a:bodyPr/>
+          <a:lstStyle/>
+          <a:p>
+            <a:r>
+              <a:rPr lang="en-US" dirty="0"/>
+              <a:t>This slide is for me, the teacher: it gives the timing of the lesson and what to do if the projector is not available.</a:t>
+            </a:r>
+            <a:endParaRPr lang="en-US" dirty="0"/>
+          </a:p>
+        </p:txBody>
+      </p:sp>
+      <p:sp>
+        <p:nvSpPr>
+          <p:cNvPr id="4" name="Slide Number Placeholder 3"/>
+          <p:cNvSpPr>
+            <a:spLocks noGrp="1"/>
+          </p:cNvSpPr>
+          <p:nvPr>
+            <p:ph type="sldNum" sz="quarter" idx="10"/>
+          </p:nvPr>
+        </p:nvSpPr>
+        <p:spPr/>
+        <p:txBody>
+          <a:bodyPr/>
+          <a:lstStyle/>
+          <a:p>
+            <a:fld id="{F7021451-1387-4CA6-816F-3879F97B5CBC}" type="slidenum">
+              <a:rPr lang="en-US"/>
+              <a:t>57</a:t>
+            </a:fld>
+            <a:endParaRPr lang="en-US"/>
+          </a:p>
+        </p:txBody>
+      </p:sp>
+    </p:spTree>
+    <p:extLst>
+      <p:ext uri="{BB962C8B-B14F-4D97-AF65-F5344CB8AC3E}">
+        <p14:creationId xmlns:p14="http://schemas.microsoft.com/office/powerpoint/2010/main" val="1024086991"/>
+      </p:ext>
+    </p:extLst>
+  </p:cSld>
+  <p:clrMapOvr>
+    <a:masterClrMapping/>
+  </p:clrMapOvr>
+</p:notes>
+</file>
+
+<file path=ppt/notesSlides/notesSlide58.xml><?xml version="1.0" encoding="utf-8"?>
+<p:notes xmlns:a="http://schemas.openxmlformats.org/drawingml/2006/main" xmlns:r="http://schemas.openxmlformats.org/officeDocument/2006/relationships" xmlns:p="http://schemas.openxmlformats.org/presentationml/2006/main">
+  <p:cSld>
+    <p:spTree>
+      <p:nvGrpSpPr>
+        <p:cNvPr id="1" name=""/>
+        <p:cNvGrpSpPr/>
+        <p:nvPr/>
+      </p:nvGrpSpPr>
+      <p:grpSpPr>
+        <a:xfrm>
+          <a:off x="0" y="0"/>
+          <a:ext cx="0" cy="0"/>
+          <a:chOff x="0" y="0"/>
+          <a:chExt cx="0" cy="0"/>
+        </a:xfrm>
+      </p:grpSpPr>
+      <p:sp>
+        <p:nvSpPr>
+          <p:cNvPr id="2" name="Slide Image Placeholder 1"/>
+          <p:cNvSpPr>
+            <a:spLocks noGrp="1" noRot="1" noChangeAspect="1"/>
+          </p:cNvSpPr>
+          <p:nvPr>
+            <p:ph type="sldImg"/>
+          </p:nvPr>
+        </p:nvSpPr>
+        <p:spPr/>
+      </p:sp>
+      <p:sp>
+        <p:nvSpPr>
+          <p:cNvPr id="3" name="Notes Placeholder 2"/>
+          <p:cNvSpPr>
+            <a:spLocks noGrp="1"/>
+          </p:cNvSpPr>
+          <p:nvPr>
+            <p:ph type="body" idx="1"/>
+          </p:nvPr>
+        </p:nvSpPr>
+        <p:spPr/>
+        <p:txBody>
+          <a:bodyPr/>
+          <a:lstStyle/>
+          <a:p>
+            <a:r>
+              <a:rPr lang="en-US" dirty="0"/>
+              <a:t>These are the references and picture credits used to prepare this lesson.</a:t>
+            </a:r>
+            <a:endParaRPr lang="en-US" dirty="0"/>
+          </a:p>
+        </p:txBody>
+      </p:sp>
+      <p:sp>
+        <p:nvSpPr>
+          <p:cNvPr id="4" name="Slide Number Placeholder 3"/>
+          <p:cNvSpPr>
+            <a:spLocks noGrp="1"/>
+          </p:cNvSpPr>
+          <p:nvPr>
+            <p:ph type="sldNum" sz="quarter" idx="10"/>
+          </p:nvPr>
+        </p:nvSpPr>
+        <p:spPr/>
+        <p:txBody>
+          <a:bodyPr/>
+          <a:lstStyle/>
+          <a:p>
+            <a:fld id="{F7021451-1387-4CA6-816F-3879F97B5CBC}" type="slidenum">
+              <a:rPr lang="en-US"/>
+              <a:t>58</a:t>
             </a:fld>
             <a:endParaRPr lang="en-US"/>
           </a:p>
@@ -6149,7 +7039,7 @@
                 <a:ea typeface="Times New Roman" pitchFamily="34" charset="-122"/>
                 <a:cs typeface="Times New Roman" pitchFamily="34" charset="-120"/>
               </a:rPr>
-              <a:t>One evening, Hawaou sits outside with her grandmother. The full Moon lights up the compound. Grandmother says that people used to plant some crops according to the shape of the Moon. Hawaou wonders why the Moon changes its shape.</a:t>
+              <a:t>One evening, Hawaou sits outside with her grandmother. The full Moon lights up the compound, and grandmother says that some crops are planted according to the shape of the Moon. Hawaou asks: "Why does the Moon change its shape, and how does it affect our lives?"</a:t>
             </a:r>
             <a:endParaRPr lang="en-US" sz="4000" dirty="0"/>
           </a:p>
@@ -6587,7 +7477,7 @@
                 <a:ea typeface="Times New Roman" pitchFamily="34" charset="-122"/>
                 <a:cs typeface="Times New Roman" pitchFamily="34" charset="-120"/>
               </a:rPr>
-              <a:t>Hawaou does not know why the Moon changes its shape.</a:t>
+              <a:t>Hawaou does not know why the Moon changes its shape or how it affects people.</a:t>
             </a:r>
             <a:endParaRPr lang="en-US" sz="4000" dirty="0"/>
           </a:p>
@@ -7463,7 +8353,7 @@
                 <a:ea typeface="Times New Roman" pitchFamily="34" charset="-122"/>
                 <a:cs typeface="Times New Roman" pitchFamily="34" charset="-120"/>
               </a:rPr>
-              <a:t>From the Sun. The Moon has no light of its own.</a:t>
+              <a:t>From the Sun: the Moon has no light of its own.</a:t>
             </a:r>
             <a:endParaRPr lang="en-US" sz="4000" dirty="0"/>
           </a:p>
@@ -9800,7 +10690,7 @@
                 <a:ea typeface="Times New Roman" pitchFamily="34" charset="-122"/>
                 <a:cs typeface="Times New Roman" pitchFamily="34" charset="-120"/>
               </a:rPr>
-              <a:t>The Sun lights half of the Moon. We see a different part of this lit half as the Moon moves.</a:t>
+              <a:t>The Sun lights half of the Moon, and we see a different part of this lit half as the Moon moves around the Earth.</a:t>
             </a:r>
             <a:endParaRPr lang="en-US" sz="4000" dirty="0"/>
           </a:p>
@@ -10191,7 +11081,7 @@
                 <a:ea typeface="Times New Roman" pitchFamily="34" charset="-122"/>
                 <a:cs typeface="Times New Roman" pitchFamily="34" charset="-120"/>
               </a:rPr>
-              <a:t>Activity 3: Question</a:t>
+              <a:t>Activity 3: Question 1</a:t>
             </a:r>
             <a:endParaRPr lang="en-US" sz="3600" dirty="0"/>
           </a:p>
@@ -10233,7 +11123,7 @@
                 <a:ea typeface="Times New Roman" pitchFamily="34" charset="-122"/>
                 <a:cs typeface="Times New Roman" pitchFamily="34" charset="-120"/>
               </a:rPr>
-              <a:t>The sea goes down and comes back twice a day. What causes this?</a:t>
+              <a:t>Why are these boats on the sand?</a:t>
             </a:r>
             <a:endParaRPr lang="en-US" sz="4000" dirty="0"/>
           </a:p>
@@ -10410,7 +11300,7 @@
                 <a:ea typeface="Times New Roman" pitchFamily="34" charset="-122"/>
                 <a:cs typeface="Times New Roman" pitchFamily="34" charset="-120"/>
               </a:rPr>
-              <a:t>Activity 3: Answer</a:t>
+              <a:t>Activity 3: Answer 1</a:t>
             </a:r>
             <a:endParaRPr lang="en-US" sz="3600" dirty="0"/>
           </a:p>
@@ -10452,7 +11342,7 @@
                 <a:ea typeface="Times New Roman" pitchFamily="34" charset="-122"/>
                 <a:cs typeface="Times New Roman" pitchFamily="34" charset="-120"/>
               </a:rPr>
-              <a:t>The pull (gravity) of the Moon. This is the tide.</a:t>
+              <a:t>The sea has gone down: it is low tide.</a:t>
             </a:r>
             <a:endParaRPr lang="en-US" sz="4000" dirty="0"/>
           </a:p>
@@ -10564,7 +11454,7 @@
                 <a:ea typeface="Calibri" pitchFamily="34" charset="-122"/>
                 <a:cs typeface="Calibri" pitchFamily="34" charset="-120"/>
               </a:rPr>
-              <a:t>BOARD SUMMARY</a:t>
+              <a:t>3. IMPACTS OF THE MOON</a:t>
             </a:r>
             <a:endParaRPr lang="en-US" sz="1400" dirty="0"/>
           </a:p>
@@ -10629,7 +11519,7 @@
                 <a:ea typeface="Times New Roman" pitchFamily="34" charset="-122"/>
                 <a:cs typeface="Times New Roman" pitchFamily="34" charset="-120"/>
               </a:rPr>
-              <a:t>Board Summary</a:t>
+              <a:t>Activity 3: Question 2</a:t>
             </a:r>
             <a:endParaRPr lang="en-US" sz="3600" dirty="0"/>
           </a:p>
@@ -10663,7 +11553,7 @@
               <a:buNone/>
             </a:pPr>
             <a:r>
-              <a:rPr lang="en-US" sz="4000" b="1" dirty="0">
+              <a:rPr lang="en-US" sz="4000" dirty="0">
                 <a:solidFill>
                   <a:srgbClr val="111111"/>
                 </a:solidFill>
@@ -10671,47 +11561,7 @@
                 <a:ea typeface="Times New Roman" pitchFamily="34" charset="-122"/>
                 <a:cs typeface="Times New Roman" pitchFamily="34" charset="-120"/>
               </a:rPr>
-              <a:t>Topic: The Earth as a Planet in the Solar System</a:t>
-            </a:r>
-            <a:endParaRPr lang="en-US" sz="4000" dirty="0"/>
-          </a:p>
-          <a:p>
-            <a:pPr algn="l" indent="0" marL="0">
-              <a:spcAft>
-                <a:spcPts val="800"/>
-              </a:spcAft>
-              <a:buNone/>
-            </a:pPr>
-            <a:r>
-              <a:rPr lang="en-US" sz="4000" b="1" dirty="0">
-                <a:solidFill>
-                  <a:srgbClr val="111111"/>
-                </a:solidFill>
-                <a:latin typeface="Times New Roman" pitchFamily="34" charset="0"/>
-                <a:ea typeface="Times New Roman" pitchFamily="34" charset="-122"/>
-                <a:cs typeface="Times New Roman" pitchFamily="34" charset="-120"/>
-              </a:rPr>
-              <a:t>Sub-topic: The Earth as a Planet of the Solar System</a:t>
-            </a:r>
-            <a:endParaRPr lang="en-US" sz="4000" dirty="0"/>
-          </a:p>
-          <a:p>
-            <a:pPr algn="l" indent="0" marL="0">
-              <a:spcAft>
-                <a:spcPts val="800"/>
-              </a:spcAft>
-              <a:buNone/>
-            </a:pPr>
-            <a:r>
-              <a:rPr lang="en-US" sz="4000" b="1" dirty="0">
-                <a:solidFill>
-                  <a:srgbClr val="990011"/>
-                </a:solidFill>
-                <a:latin typeface="Times New Roman" pitchFamily="34" charset="0"/>
-                <a:ea typeface="Times New Roman" pitchFamily="34" charset="-122"/>
-                <a:cs typeface="Times New Roman" pitchFamily="34" charset="-120"/>
-              </a:rPr>
-              <a:t>Further Study 1: The Universe and the Moon</a:t>
+              <a:t>What causes this movement of the sea?</a:t>
             </a:r>
             <a:endParaRPr lang="en-US" sz="4000" dirty="0"/>
           </a:p>
@@ -10823,7 +11673,7 @@
                 <a:ea typeface="Calibri" pitchFamily="34" charset="-122"/>
                 <a:cs typeface="Calibri" pitchFamily="34" charset="-120"/>
               </a:rPr>
-              <a:t>BOARD SUMMARY</a:t>
+              <a:t>3. IMPACTS OF THE MOON</a:t>
             </a:r>
             <a:endParaRPr lang="en-US" sz="1400" dirty="0"/>
           </a:p>
@@ -10888,7 +11738,7 @@
                 <a:ea typeface="Times New Roman" pitchFamily="34" charset="-122"/>
                 <a:cs typeface="Times New Roman" pitchFamily="34" charset="-120"/>
               </a:rPr>
-              <a:t>1. The Universe</a:t>
+              <a:t>Activity 3: Answer 2</a:t>
             </a:r>
             <a:endParaRPr lang="en-US" sz="3600" dirty="0"/>
           </a:p>
@@ -10902,47 +11752,8 @@
         </p:nvSpPr>
         <p:spPr>
           <a:xfrm>
-            <a:off x="5349240" y="1737360"/>
-            <a:ext cx="6522415" cy="457200"/>
-          </a:xfrm>
-          <a:prstGeom prst="rect">
-            <a:avLst/>
-          </a:prstGeom>
-          <a:noFill/>
-          <a:ln/>
-        </p:spPr>
-        <p:txBody>
-          <a:bodyPr wrap="square" lIns="0" tIns="0" rIns="0" bIns="0" rtlCol="0" anchor="ctr"/>
-          <a:lstStyle/>
-          <a:p>
-            <a:pPr algn="l" indent="0" marL="0">
-              <a:buNone/>
-            </a:pPr>
-            <a:r>
-              <a:rPr lang="en-US" sz="3200" b="1" dirty="0">
-                <a:solidFill>
-                  <a:srgbClr val="990011"/>
-                </a:solidFill>
-                <a:latin typeface="Times New Roman" pitchFamily="34" charset="0"/>
-                <a:ea typeface="Times New Roman" pitchFamily="34" charset="-122"/>
-                <a:cs typeface="Times New Roman" pitchFamily="34" charset="-120"/>
-              </a:rPr>
-              <a:t>A) Meaning</a:t>
-            </a:r>
-            <a:endParaRPr lang="en-US" sz="3200" dirty="0"/>
-          </a:p>
-        </p:txBody>
-      </p:sp>
-      <p:sp>
-        <p:nvSpPr>
-          <p:cNvPr id="6" name="Text 3"/>
-          <p:cNvSpPr/>
-          <p:nvPr/>
-        </p:nvSpPr>
-        <p:spPr>
-          <a:xfrm>
-            <a:off x="5349240" y="2240280"/>
-            <a:ext cx="6522415" cy="4206240"/>
+            <a:off x="5349240" y="1783080"/>
+            <a:ext cx="6522415" cy="4663440"/>
           </a:xfrm>
           <a:prstGeom prst="rect">
             <a:avLst/>
@@ -10961,7 +11772,7 @@
               <a:buNone/>
             </a:pPr>
             <a:r>
-              <a:rPr lang="en-US" sz="4000" i="1" dirty="0">
+              <a:rPr lang="en-US" sz="4000" dirty="0">
                 <a:solidFill>
                   <a:srgbClr val="111111"/>
                 </a:solidFill>
@@ -10969,44 +11780,7 @@
                 <a:ea typeface="Times New Roman" pitchFamily="34" charset="-122"/>
                 <a:cs typeface="Times New Roman" pitchFamily="34" charset="-120"/>
               </a:rPr>
-              <a:t>The universe can be defined as follows:</a:t>
-            </a:r>
-            <a:endParaRPr lang="en-US" sz="4000" dirty="0"/>
-          </a:p>
-          <a:p>
-            <a:pPr algn="l" indent="0" marL="0">
-              <a:spcAft>
-                <a:spcPts val="800"/>
-              </a:spcAft>
-              <a:buNone/>
-            </a:pPr>
-            <a:r>
-              <a:rPr lang="en-US" sz="4000" b="1" dirty="0">
-                <a:solidFill>
-                  <a:srgbClr val="111111"/>
-                </a:solidFill>
-                <a:latin typeface="Times New Roman" pitchFamily="34" charset="0"/>
-                <a:ea typeface="Times New Roman" pitchFamily="34" charset="-122"/>
-                <a:cs typeface="Times New Roman" pitchFamily="34" charset="-120"/>
-              </a:rPr>
-              <a:t>Universe: </a:t>
-            </a:r>
-            <a:pPr algn="l" indent="0" marL="0">
-              <a:spcAft>
-                <a:spcPts val="800"/>
-              </a:spcAft>
-              <a:buNone/>
-            </a:pPr>
-            <a:r>
-              <a:rPr lang="en-US" sz="4000" dirty="0">
-                <a:solidFill>
-                  <a:srgbClr val="111111"/>
-                </a:solidFill>
-                <a:latin typeface="Times New Roman" pitchFamily="34" charset="0"/>
-                <a:ea typeface="Times New Roman" pitchFamily="34" charset="-122"/>
-                <a:cs typeface="Times New Roman" pitchFamily="34" charset="-120"/>
-              </a:rPr>
-              <a:t>It is all of space and everything in it: stars, planets, gases and dust.</a:t>
+              <a:t>The pull (gravity) of the Moon.</a:t>
             </a:r>
             <a:endParaRPr lang="en-US" sz="4000" dirty="0"/>
           </a:p>
@@ -12150,7 +12924,7 @@
         <p:spPr>
           <a:xfrm>
             <a:off x="0" y="658368"/>
-            <a:ext cx="1463040" cy="5833872"/>
+            <a:ext cx="5120640" cy="5833872"/>
           </a:xfrm>
           <a:prstGeom prst="rect">
             <a:avLst/>
@@ -12165,8 +12939,8 @@
         </p:nvSpPr>
         <p:spPr>
           <a:xfrm>
-            <a:off x="1691640" y="1005840"/>
-            <a:ext cx="10180015" cy="731520"/>
+            <a:off x="5349240" y="1005840"/>
+            <a:ext cx="6522415" cy="731520"/>
           </a:xfrm>
           <a:prstGeom prst="rect">
             <a:avLst/>
@@ -12192,7 +12966,7 @@
                 <a:ea typeface="Times New Roman" pitchFamily="34" charset="-122"/>
                 <a:cs typeface="Times New Roman" pitchFamily="34" charset="-120"/>
               </a:rPr>
-              <a:t>1. The Universe</a:t>
+              <a:t>Board Summary</a:t>
             </a:r>
             <a:endParaRPr lang="en-US" sz="3600" dirty="0"/>
           </a:p>
@@ -12206,47 +12980,8 @@
         </p:nvSpPr>
         <p:spPr>
           <a:xfrm>
-            <a:off x="1691640" y="1737360"/>
-            <a:ext cx="10180015" cy="457200"/>
-          </a:xfrm>
-          <a:prstGeom prst="rect">
-            <a:avLst/>
-          </a:prstGeom>
-          <a:noFill/>
-          <a:ln/>
-        </p:spPr>
-        <p:txBody>
-          <a:bodyPr wrap="square" lIns="0" tIns="0" rIns="0" bIns="0" rtlCol="0" anchor="ctr"/>
-          <a:lstStyle/>
-          <a:p>
-            <a:pPr algn="l" indent="0" marL="0">
-              <a:buNone/>
-            </a:pPr>
-            <a:r>
-              <a:rPr lang="en-US" sz="3200" b="1" dirty="0">
-                <a:solidFill>
-                  <a:srgbClr val="990011"/>
-                </a:solidFill>
-                <a:latin typeface="Times New Roman" pitchFamily="34" charset="0"/>
-                <a:ea typeface="Times New Roman" pitchFamily="34" charset="-122"/>
-                <a:cs typeface="Times New Roman" pitchFamily="34" charset="-120"/>
-              </a:rPr>
-              <a:t>B) Composition</a:t>
-            </a:r>
-            <a:endParaRPr lang="en-US" sz="3200" dirty="0"/>
-          </a:p>
-        </p:txBody>
-      </p:sp>
-      <p:sp>
-        <p:nvSpPr>
-          <p:cNvPr id="6" name="Text 3"/>
-          <p:cNvSpPr/>
-          <p:nvPr/>
-        </p:nvSpPr>
-        <p:spPr>
-          <a:xfrm>
-            <a:off x="1691640" y="2240280"/>
-            <a:ext cx="10180015" cy="4206240"/>
+            <a:off x="5349240" y="1783080"/>
+            <a:ext cx="6522415" cy="4663440"/>
           </a:xfrm>
           <a:prstGeom prst="rect">
             <a:avLst/>
@@ -12265,7 +13000,7 @@
               <a:buNone/>
             </a:pPr>
             <a:r>
-              <a:rPr lang="en-US" sz="4000" i="1" dirty="0">
+              <a:rPr lang="en-US" sz="4000" b="1" dirty="0">
                 <a:solidFill>
                   <a:srgbClr val="111111"/>
                 </a:solidFill>
@@ -12273,7 +13008,7 @@
                 <a:ea typeface="Times New Roman" pitchFamily="34" charset="-122"/>
                 <a:cs typeface="Times New Roman" pitchFamily="34" charset="-120"/>
               </a:rPr>
-              <a:t>The universe is made up of the following elements:</a:t>
+              <a:t>Topic: The Earth as a Planet in the Solar System</a:t>
             </a:r>
             <a:endParaRPr lang="en-US" sz="4000" dirty="0"/>
           </a:p>
@@ -12293,8 +13028,11 @@
                 <a:ea typeface="Times New Roman" pitchFamily="34" charset="-122"/>
                 <a:cs typeface="Times New Roman" pitchFamily="34" charset="-120"/>
               </a:rPr>
-              <a:t>Galaxies: </a:t>
-            </a:r>
+              <a:t>Sub-topic: The Earth as a Planet of the Solar System</a:t>
+            </a:r>
+            <a:endParaRPr lang="en-US" sz="4000" dirty="0"/>
+          </a:p>
+          <a:p>
             <a:pPr algn="l" indent="0" marL="0">
               <a:spcAft>
                 <a:spcPts val="800"/>
@@ -12302,52 +13040,15 @@
               <a:buNone/>
             </a:pPr>
             <a:r>
-              <a:rPr lang="en-US" sz="4000" dirty="0">
-                <a:solidFill>
-                  <a:srgbClr val="111111"/>
+              <a:rPr lang="en-US" sz="4000" b="1" dirty="0">
+                <a:solidFill>
+                  <a:srgbClr val="990011"/>
                 </a:solidFill>
                 <a:latin typeface="Times New Roman" pitchFamily="34" charset="0"/>
                 <a:ea typeface="Times New Roman" pitchFamily="34" charset="-122"/>
                 <a:cs typeface="Times New Roman" pitchFamily="34" charset="-120"/>
               </a:rPr>
-              <a:t>They are huge groups of stars, and our galaxy is called the Milky Way.</a:t>
-            </a:r>
-            <a:endParaRPr lang="en-US" sz="4000" dirty="0"/>
-          </a:p>
-          <a:p>
-            <a:pPr algn="l" indent="0" marL="0">
-              <a:spcAft>
-                <a:spcPts val="800"/>
-              </a:spcAft>
-              <a:buNone/>
-            </a:pPr>
-            <a:r>
-              <a:rPr lang="en-US" sz="4000" b="1" dirty="0">
-                <a:solidFill>
-                  <a:srgbClr val="111111"/>
-                </a:solidFill>
-                <a:latin typeface="Times New Roman" pitchFamily="34" charset="0"/>
-                <a:ea typeface="Times New Roman" pitchFamily="34" charset="-122"/>
-                <a:cs typeface="Times New Roman" pitchFamily="34" charset="-120"/>
-              </a:rPr>
-              <a:t>The Sun: </a:t>
-            </a:r>
-            <a:pPr algn="l" indent="0" marL="0">
-              <a:spcAft>
-                <a:spcPts val="800"/>
-              </a:spcAft>
-              <a:buNone/>
-            </a:pPr>
-            <a:r>
-              <a:rPr lang="en-US" sz="4000" dirty="0">
-                <a:solidFill>
-                  <a:srgbClr val="111111"/>
-                </a:solidFill>
-                <a:latin typeface="Times New Roman" pitchFamily="34" charset="0"/>
-                <a:ea typeface="Times New Roman" pitchFamily="34" charset="-122"/>
-                <a:cs typeface="Times New Roman" pitchFamily="34" charset="-120"/>
-              </a:rPr>
-              <a:t>It is the star of our solar system and it gives light and heat to the Earth.</a:t>
+              <a:t>Further Study 1: The Universe and the Moon</a:t>
             </a:r>
             <a:endParaRPr lang="en-US" sz="4000" dirty="0"/>
           </a:p>
@@ -12482,7 +13183,7 @@
         <p:spPr>
           <a:xfrm>
             <a:off x="0" y="658368"/>
-            <a:ext cx="5120640" cy="5833872"/>
+            <a:ext cx="2468880" cy="5833872"/>
           </a:xfrm>
           <a:prstGeom prst="rect">
             <a:avLst/>
@@ -12497,8 +13198,8 @@
         </p:nvSpPr>
         <p:spPr>
           <a:xfrm>
-            <a:off x="5349240" y="1005840"/>
-            <a:ext cx="6522415" cy="731520"/>
+            <a:off x="2697480" y="1005840"/>
+            <a:ext cx="9174175" cy="731520"/>
           </a:xfrm>
           <a:prstGeom prst="rect">
             <a:avLst/>
@@ -12524,7 +13225,7 @@
                 <a:ea typeface="Times New Roman" pitchFamily="34" charset="-122"/>
                 <a:cs typeface="Times New Roman" pitchFamily="34" charset="-120"/>
               </a:rPr>
-              <a:t>1. The Universe</a:t>
+              <a:t>DEFINITIONS</a:t>
             </a:r>
             <a:endParaRPr lang="en-US" sz="3600" dirty="0"/>
           </a:p>
@@ -12538,47 +13239,8 @@
         </p:nvSpPr>
         <p:spPr>
           <a:xfrm>
-            <a:off x="5349240" y="1737360"/>
-            <a:ext cx="6522415" cy="457200"/>
-          </a:xfrm>
-          <a:prstGeom prst="rect">
-            <a:avLst/>
-          </a:prstGeom>
-          <a:noFill/>
-          <a:ln/>
-        </p:spPr>
-        <p:txBody>
-          <a:bodyPr wrap="square" lIns="0" tIns="0" rIns="0" bIns="0" rtlCol="0" anchor="ctr"/>
-          <a:lstStyle/>
-          <a:p>
-            <a:pPr algn="l" indent="0" marL="0">
-              <a:buNone/>
-            </a:pPr>
-            <a:r>
-              <a:rPr lang="en-US" sz="3200" b="1" dirty="0">
-                <a:solidFill>
-                  <a:srgbClr val="990011"/>
-                </a:solidFill>
-                <a:latin typeface="Times New Roman" pitchFamily="34" charset="0"/>
-                <a:ea typeface="Times New Roman" pitchFamily="34" charset="-122"/>
-                <a:cs typeface="Times New Roman" pitchFamily="34" charset="-120"/>
-              </a:rPr>
-              <a:t>B) Composition (continued)</a:t>
-            </a:r>
-            <a:endParaRPr lang="en-US" sz="3200" dirty="0"/>
-          </a:p>
-        </p:txBody>
-      </p:sp>
-      <p:sp>
-        <p:nvSpPr>
-          <p:cNvPr id="6" name="Text 3"/>
-          <p:cNvSpPr/>
-          <p:nvPr/>
-        </p:nvSpPr>
-        <p:spPr>
-          <a:xfrm>
-            <a:off x="5349240" y="2240280"/>
-            <a:ext cx="6522415" cy="4206240"/>
+            <a:off x="2697480" y="1783080"/>
+            <a:ext cx="9174175" cy="4663440"/>
           </a:xfrm>
           <a:prstGeom prst="rect">
             <a:avLst/>
@@ -12597,7 +13259,7 @@
               <a:buNone/>
             </a:pPr>
             <a:r>
-              <a:rPr lang="en-US" sz="4000" b="1" dirty="0">
+              <a:rPr lang="en-US" sz="4000" i="1" dirty="0">
                 <a:solidFill>
                   <a:srgbClr val="111111"/>
                 </a:solidFill>
@@ -12605,8 +13267,11 @@
                 <a:ea typeface="Times New Roman" pitchFamily="34" charset="-122"/>
                 <a:cs typeface="Times New Roman" pitchFamily="34" charset="-120"/>
               </a:rPr>
-              <a:t>The Moon: </a:t>
-            </a:r>
+              <a:t>The key terms of this lesson are defined as follows:</a:t>
+            </a:r>
+            <a:endParaRPr lang="en-US" sz="4000" dirty="0"/>
+          </a:p>
+          <a:p>
             <a:pPr algn="l" indent="0" marL="0">
               <a:spcAft>
                 <a:spcPts val="800"/>
@@ -12614,7 +13279,7 @@
               <a:buNone/>
             </a:pPr>
             <a:r>
-              <a:rPr lang="en-US" sz="4000" dirty="0">
+              <a:rPr lang="en-US" sz="4000" b="1" dirty="0">
                 <a:solidFill>
                   <a:srgbClr val="111111"/>
                 </a:solidFill>
@@ -12622,7 +13287,61 @@
                 <a:ea typeface="Times New Roman" pitchFamily="34" charset="-122"/>
                 <a:cs typeface="Times New Roman" pitchFamily="34" charset="-120"/>
               </a:rPr>
-              <a:t>It is the natural satellite of the Earth, and it moves around the Earth in about 29½ days.</a:t>
+              <a:t>Universe: </a:t>
+            </a:r>
+            <a:pPr algn="l" indent="0" marL="0">
+              <a:spcAft>
+                <a:spcPts val="800"/>
+              </a:spcAft>
+              <a:buNone/>
+            </a:pPr>
+            <a:r>
+              <a:rPr lang="en-US" sz="4000" dirty="0">
+                <a:solidFill>
+                  <a:srgbClr val="111111"/>
+                </a:solidFill>
+                <a:latin typeface="Times New Roman" pitchFamily="34" charset="0"/>
+                <a:ea typeface="Times New Roman" pitchFamily="34" charset="-122"/>
+                <a:cs typeface="Times New Roman" pitchFamily="34" charset="-120"/>
+              </a:rPr>
+              <a:t>It is all of space and everything in it: stars, planets, gases and dust.</a:t>
+            </a:r>
+            <a:endParaRPr lang="en-US" sz="4000" dirty="0"/>
+          </a:p>
+          <a:p>
+            <a:pPr algn="l" indent="0" marL="0">
+              <a:spcAft>
+                <a:spcPts val="800"/>
+              </a:spcAft>
+              <a:buNone/>
+            </a:pPr>
+            <a:r>
+              <a:rPr lang="en-US" sz="4000" b="1" dirty="0">
+                <a:solidFill>
+                  <a:srgbClr val="111111"/>
+                </a:solidFill>
+                <a:latin typeface="Times New Roman" pitchFamily="34" charset="0"/>
+                <a:ea typeface="Times New Roman" pitchFamily="34" charset="-122"/>
+                <a:cs typeface="Times New Roman" pitchFamily="34" charset="-120"/>
+              </a:rPr>
+              <a:t>Galaxy: </a:t>
+            </a:r>
+            <a:pPr algn="l" indent="0" marL="0">
+              <a:spcAft>
+                <a:spcPts val="800"/>
+              </a:spcAft>
+              <a:buNone/>
+            </a:pPr>
+            <a:r>
+              <a:rPr lang="en-US" sz="4000" dirty="0">
+                <a:solidFill>
+                  <a:srgbClr val="111111"/>
+                </a:solidFill>
+                <a:latin typeface="Times New Roman" pitchFamily="34" charset="0"/>
+                <a:ea typeface="Times New Roman" pitchFamily="34" charset="-122"/>
+                <a:cs typeface="Times New Roman" pitchFamily="34" charset="-120"/>
+              </a:rPr>
+              <a:t>It is a huge group of stars, gas and dust held together by gravity.</a:t>
             </a:r>
             <a:endParaRPr lang="en-US" sz="4000" dirty="0"/>
           </a:p>
@@ -12757,7 +13476,7 @@
         <p:spPr>
           <a:xfrm>
             <a:off x="0" y="658368"/>
-            <a:ext cx="3840480" cy="5833872"/>
+            <a:ext cx="5120640" cy="5833872"/>
           </a:xfrm>
           <a:prstGeom prst="rect">
             <a:avLst/>
@@ -12772,8 +13491,8 @@
         </p:nvSpPr>
         <p:spPr>
           <a:xfrm>
-            <a:off x="4069080" y="1005840"/>
-            <a:ext cx="7802575" cy="731520"/>
+            <a:off x="5349240" y="1005840"/>
+            <a:ext cx="6522415" cy="731520"/>
           </a:xfrm>
           <a:prstGeom prst="rect">
             <a:avLst/>
@@ -12799,7 +13518,7 @@
                 <a:ea typeface="Times New Roman" pitchFamily="34" charset="-122"/>
                 <a:cs typeface="Times New Roman" pitchFamily="34" charset="-120"/>
               </a:rPr>
-              <a:t>2. The Phases of the Moon</a:t>
+              <a:t>DEFINITIONS (continued)</a:t>
             </a:r>
             <a:endParaRPr lang="en-US" sz="3600" dirty="0"/>
           </a:p>
@@ -12813,8 +13532,8 @@
         </p:nvSpPr>
         <p:spPr>
           <a:xfrm>
-            <a:off x="4069080" y="1783080"/>
-            <a:ext cx="7802575" cy="4663440"/>
+            <a:off x="5349240" y="1783080"/>
+            <a:ext cx="6522415" cy="4663440"/>
           </a:xfrm>
           <a:prstGeom prst="rect">
             <a:avLst/>
@@ -12833,7 +13552,7 @@
               <a:buNone/>
             </a:pPr>
             <a:r>
-              <a:rPr lang="en-US" sz="4000" i="1" dirty="0">
+              <a:rPr lang="en-US" sz="4000" b="1" dirty="0">
                 <a:solidFill>
                   <a:srgbClr val="111111"/>
                 </a:solidFill>
@@ -12841,11 +13560,8 @@
                 <a:ea typeface="Times New Roman" pitchFamily="34" charset="-122"/>
                 <a:cs typeface="Times New Roman" pitchFamily="34" charset="-120"/>
               </a:rPr>
-              <a:t>The Moon shows the following phases during a month:</a:t>
-            </a:r>
-            <a:endParaRPr lang="en-US" sz="4000" dirty="0"/>
-          </a:p>
-          <a:p>
+              <a:t>Satellite: </a:t>
+            </a:r>
             <a:pPr algn="l" indent="0" marL="0">
               <a:spcAft>
                 <a:spcPts val="800"/>
@@ -12853,7 +13569,7 @@
               <a:buNone/>
             </a:pPr>
             <a:r>
-              <a:rPr lang="en-US" sz="4000" b="1" dirty="0">
+              <a:rPr lang="en-US" sz="4000" dirty="0">
                 <a:solidFill>
                   <a:srgbClr val="111111"/>
                 </a:solidFill>
@@ -12861,8 +13577,11 @@
                 <a:ea typeface="Times New Roman" pitchFamily="34" charset="-122"/>
                 <a:cs typeface="Times New Roman" pitchFamily="34" charset="-120"/>
               </a:rPr>
-              <a:t>New Moon: </a:t>
-            </a:r>
+              <a:t>It is a body that moves around a planet.</a:t>
+            </a:r>
+            <a:endParaRPr lang="en-US" sz="4000" dirty="0"/>
+          </a:p>
+          <a:p>
             <a:pPr algn="l" indent="0" marL="0">
               <a:spcAft>
                 <a:spcPts val="800"/>
@@ -12870,7 +13589,7 @@
               <a:buNone/>
             </a:pPr>
             <a:r>
-              <a:rPr lang="en-US" sz="4000" dirty="0">
+              <a:rPr lang="en-US" sz="4000" b="1" dirty="0">
                 <a:solidFill>
                   <a:srgbClr val="111111"/>
                 </a:solidFill>
@@ -12878,11 +13597,8 @@
                 <a:ea typeface="Times New Roman" pitchFamily="34" charset="-122"/>
                 <a:cs typeface="Times New Roman" pitchFamily="34" charset="-120"/>
               </a:rPr>
-              <a:t>The lit side of the Moon faces away from the Earth, so we do not see it.</a:t>
-            </a:r>
-            <a:endParaRPr lang="en-US" sz="4000" dirty="0"/>
-          </a:p>
-          <a:p>
+              <a:t>Phases of the Moon: </a:t>
+            </a:r>
             <a:pPr algn="l" indent="0" marL="0">
               <a:spcAft>
                 <a:spcPts val="800"/>
@@ -12890,7 +13606,7 @@
               <a:buNone/>
             </a:pPr>
             <a:r>
-              <a:rPr lang="en-US" sz="4000" b="1" dirty="0">
+              <a:rPr lang="en-US" sz="4000" dirty="0">
                 <a:solidFill>
                   <a:srgbClr val="111111"/>
                 </a:solidFill>
@@ -12898,24 +13614,7 @@
                 <a:ea typeface="Times New Roman" pitchFamily="34" charset="-122"/>
                 <a:cs typeface="Times New Roman" pitchFamily="34" charset="-120"/>
               </a:rPr>
-              <a:t>First quarter: </a:t>
-            </a:r>
-            <a:pPr algn="l" indent="0" marL="0">
-              <a:spcAft>
-                <a:spcPts val="800"/>
-              </a:spcAft>
-              <a:buNone/>
-            </a:pPr>
-            <a:r>
-              <a:rPr lang="en-US" sz="4000" dirty="0">
-                <a:solidFill>
-                  <a:srgbClr val="111111"/>
-                </a:solidFill>
-                <a:latin typeface="Times New Roman" pitchFamily="34" charset="0"/>
-                <a:ea typeface="Times New Roman" pitchFamily="34" charset="-122"/>
-                <a:cs typeface="Times New Roman" pitchFamily="34" charset="-120"/>
-              </a:rPr>
-              <a:t>We see the right half of the Moon lit by the Sun.</a:t>
+              <a:t>They are the different shapes of the lit part of the Moon that we see during a month.</a:t>
             </a:r>
             <a:endParaRPr lang="en-US" sz="4000" dirty="0"/>
           </a:p>
@@ -13033,9 +13732,170 @@
           </a:p>
         </p:txBody>
       </p:sp>
+      <p:sp>
+        <p:nvSpPr>
+          <p:cNvPr id="3" name="Text 1"/>
+          <p:cNvSpPr/>
+          <p:nvPr/>
+        </p:nvSpPr>
+        <p:spPr>
+          <a:xfrm>
+            <a:off x="365760" y="1005840"/>
+            <a:ext cx="11460175" cy="731520"/>
+          </a:xfrm>
+          <a:prstGeom prst="rect">
+            <a:avLst/>
+          </a:prstGeom>
+          <a:noFill/>
+          <a:ln/>
+        </p:spPr>
+        <p:txBody>
+          <a:bodyPr wrap="square" lIns="0" tIns="0" rIns="0" bIns="0" rtlCol="0" anchor="ctr">
+            <a:normAutofit/>
+          </a:bodyPr>
+          <a:lstStyle/>
+          <a:p>
+            <a:pPr algn="ctr" indent="0" marL="0">
+              <a:buNone/>
+            </a:pPr>
+            <a:r>
+              <a:rPr lang="en-US" sz="3600" b="1" dirty="0">
+                <a:solidFill>
+                  <a:srgbClr val="990011"/>
+                </a:solidFill>
+                <a:latin typeface="Times New Roman" pitchFamily="34" charset="0"/>
+                <a:ea typeface="Times New Roman" pitchFamily="34" charset="-122"/>
+                <a:cs typeface="Times New Roman" pitchFamily="34" charset="-120"/>
+              </a:rPr>
+              <a:t>1. The Universe</a:t>
+            </a:r>
+            <a:endParaRPr lang="en-US" sz="3600" dirty="0"/>
+          </a:p>
+        </p:txBody>
+      </p:sp>
+      <p:sp>
+        <p:nvSpPr>
+          <p:cNvPr id="4" name="Text 2"/>
+          <p:cNvSpPr/>
+          <p:nvPr/>
+        </p:nvSpPr>
+        <p:spPr>
+          <a:xfrm>
+            <a:off x="365760" y="1737360"/>
+            <a:ext cx="5120640" cy="457200"/>
+          </a:xfrm>
+          <a:prstGeom prst="rect">
+            <a:avLst/>
+          </a:prstGeom>
+          <a:noFill/>
+          <a:ln/>
+        </p:spPr>
+        <p:txBody>
+          <a:bodyPr wrap="square" lIns="0" tIns="0" rIns="0" bIns="0" rtlCol="0" anchor="ctr">
+            <a:normAutofit/>
+          </a:bodyPr>
+          <a:lstStyle/>
+          <a:p>
+            <a:pPr algn="l" indent="0" marL="0">
+              <a:buNone/>
+            </a:pPr>
+            <a:r>
+              <a:rPr lang="en-US" sz="3000" b="1" dirty="0">
+                <a:solidFill>
+                  <a:srgbClr val="990011"/>
+                </a:solidFill>
+                <a:latin typeface="Times New Roman" pitchFamily="34" charset="0"/>
+                <a:ea typeface="Times New Roman" pitchFamily="34" charset="-122"/>
+                <a:cs typeface="Times New Roman" pitchFamily="34" charset="-120"/>
+              </a:rPr>
+              <a:t>A) Composition of the Universe</a:t>
+            </a:r>
+            <a:endParaRPr lang="en-US" sz="3000" dirty="0"/>
+          </a:p>
+        </p:txBody>
+      </p:sp>
+      <p:sp>
+        <p:nvSpPr>
+          <p:cNvPr id="5" name="Text 3"/>
+          <p:cNvSpPr/>
+          <p:nvPr/>
+        </p:nvSpPr>
+        <p:spPr>
+          <a:xfrm>
+            <a:off x="365760" y="2240280"/>
+            <a:ext cx="4846320" cy="4160520"/>
+          </a:xfrm>
+          <a:prstGeom prst="rect">
+            <a:avLst/>
+          </a:prstGeom>
+          <a:noFill/>
+          <a:ln/>
+        </p:spPr>
+        <p:txBody>
+          <a:bodyPr wrap="square" lIns="0" tIns="0" rIns="0" bIns="0" rtlCol="0" anchor="t"/>
+          <a:lstStyle/>
+          <a:p>
+            <a:pPr algn="l" indent="0" marL="0">
+              <a:spcAft>
+                <a:spcPts val="800"/>
+              </a:spcAft>
+              <a:buNone/>
+            </a:pPr>
+            <a:r>
+              <a:rPr lang="en-US" sz="3600" i="1" dirty="0">
+                <a:solidFill>
+                  <a:srgbClr val="111111"/>
+                </a:solidFill>
+                <a:latin typeface="Times New Roman" pitchFamily="34" charset="0"/>
+                <a:ea typeface="Times New Roman" pitchFamily="34" charset="-122"/>
+                <a:cs typeface="Times New Roman" pitchFamily="34" charset="-120"/>
+              </a:rPr>
+              <a:t>The universe is made up of the following elements:</a:t>
+            </a:r>
+            <a:endParaRPr lang="en-US" sz="3600" dirty="0"/>
+          </a:p>
+          <a:p>
+            <a:pPr algn="l" indent="0" marL="0">
+              <a:spcAft>
+                <a:spcPts val="800"/>
+              </a:spcAft>
+              <a:buNone/>
+            </a:pPr>
+            <a:r>
+              <a:rPr lang="en-US" sz="3600" b="1" dirty="0">
+                <a:solidFill>
+                  <a:srgbClr val="111111"/>
+                </a:solidFill>
+                <a:latin typeface="Times New Roman" pitchFamily="34" charset="0"/>
+                <a:ea typeface="Times New Roman" pitchFamily="34" charset="-122"/>
+                <a:cs typeface="Times New Roman" pitchFamily="34" charset="-120"/>
+              </a:rPr>
+              <a:t>Galaxies: </a:t>
+            </a:r>
+            <a:pPr algn="l" indent="0" marL="0">
+              <a:spcAft>
+                <a:spcPts val="800"/>
+              </a:spcAft>
+              <a:buNone/>
+            </a:pPr>
+            <a:r>
+              <a:rPr lang="en-US" sz="3600" dirty="0">
+                <a:solidFill>
+                  <a:srgbClr val="111111"/>
+                </a:solidFill>
+                <a:latin typeface="Times New Roman" pitchFamily="34" charset="0"/>
+                <a:ea typeface="Times New Roman" pitchFamily="34" charset="-122"/>
+                <a:cs typeface="Times New Roman" pitchFamily="34" charset="-120"/>
+              </a:rPr>
+              <a:t>There are billions of galaxies, and our galaxy is the Milky Way.</a:t>
+            </a:r>
+            <a:endParaRPr lang="en-US" sz="3600" dirty="0"/>
+          </a:p>
+        </p:txBody>
+      </p:sp>
       <p:pic>
         <p:nvPicPr>
-          <p:cNvPr id="3" name="Image 0" descr="/home/claude/f4/img/minesec_sheet.png">    </p:cNvPr>
+          <p:cNvPr id="6" name="Image 0" descr="/home/claude/f4/img/v2/f4_milkyway.jpg">    </p:cNvPr>
           <p:cNvPicPr>
             <a:picLocks noChangeAspect="1"/>
           </p:cNvPicPr>
@@ -13049,8 +13909,8 @@
         </p:blipFill>
         <p:spPr>
           <a:xfrm>
-            <a:off x="0" y="658368"/>
-            <a:ext cx="5120640" cy="5833872"/>
+            <a:off x="5349240" y="2071212"/>
+            <a:ext cx="6659575" cy="3693983"/>
           </a:xfrm>
           <a:prstGeom prst="rect">
             <a:avLst/>
@@ -13059,14 +13919,14 @@
       </p:pic>
       <p:sp>
         <p:nvSpPr>
-          <p:cNvPr id="4" name="Text 1"/>
+          <p:cNvPr id="7" name="Text 4"/>
           <p:cNvSpPr/>
           <p:nvPr/>
         </p:nvSpPr>
         <p:spPr>
           <a:xfrm>
-            <a:off x="5349240" y="1005840"/>
-            <a:ext cx="6522415" cy="731520"/>
+            <a:off x="5349240" y="6089904"/>
+            <a:ext cx="6659575" cy="347472"/>
           </a:xfrm>
           <a:prstGeom prst="rect">
             <a:avLst/>
@@ -13075,122 +13935,24 @@
           <a:ln/>
         </p:spPr>
         <p:txBody>
-          <a:bodyPr wrap="square" lIns="0" tIns="0" rIns="0" bIns="0" rtlCol="0" anchor="ctr">
-            <a:normAutofit/>
-          </a:bodyPr>
+          <a:bodyPr wrap="square" lIns="0" tIns="0" rIns="0" bIns="0" rtlCol="0" anchor="ctr"/>
           <a:lstStyle/>
           <a:p>
             <a:pPr algn="ctr" indent="0" marL="0">
               <a:buNone/>
             </a:pPr>
             <a:r>
-              <a:rPr lang="en-US" sz="3600" b="1" dirty="0">
-                <a:solidFill>
-                  <a:srgbClr val="990011"/>
+              <a:rPr lang="en-US" sz="1600" i="1" dirty="0">
+                <a:solidFill>
+                  <a:srgbClr val="555555"/>
                 </a:solidFill>
                 <a:latin typeface="Times New Roman" pitchFamily="34" charset="0"/>
                 <a:ea typeface="Times New Roman" pitchFamily="34" charset="-122"/>
                 <a:cs typeface="Times New Roman" pitchFamily="34" charset="-120"/>
               </a:rPr>
-              <a:t>2. The Phases of the Moon (continued)</a:t>
-            </a:r>
-            <a:endParaRPr lang="en-US" sz="3600" dirty="0"/>
-          </a:p>
-        </p:txBody>
-      </p:sp>
-      <p:sp>
-        <p:nvSpPr>
-          <p:cNvPr id="5" name="Text 2"/>
-          <p:cNvSpPr/>
-          <p:nvPr/>
-        </p:nvSpPr>
-        <p:spPr>
-          <a:xfrm>
-            <a:off x="5349240" y="1783080"/>
-            <a:ext cx="6522415" cy="4663440"/>
-          </a:xfrm>
-          <a:prstGeom prst="rect">
-            <a:avLst/>
-          </a:prstGeom>
-          <a:noFill/>
-          <a:ln/>
-        </p:spPr>
-        <p:txBody>
-          <a:bodyPr wrap="square" lIns="0" tIns="0" rIns="0" bIns="0" rtlCol="0" anchor="t"/>
-          <a:lstStyle/>
-          <a:p>
-            <a:pPr algn="l" indent="0" marL="0">
-              <a:spcAft>
-                <a:spcPts val="800"/>
-              </a:spcAft>
-              <a:buNone/>
-            </a:pPr>
-            <a:r>
-              <a:rPr lang="en-US" sz="4000" b="1" dirty="0">
-                <a:solidFill>
-                  <a:srgbClr val="111111"/>
-                </a:solidFill>
-                <a:latin typeface="Times New Roman" pitchFamily="34" charset="0"/>
-                <a:ea typeface="Times New Roman" pitchFamily="34" charset="-122"/>
-                <a:cs typeface="Times New Roman" pitchFamily="34" charset="-120"/>
-              </a:rPr>
-              <a:t>Full Moon: </a:t>
-            </a:r>
-            <a:pPr algn="l" indent="0" marL="0">
-              <a:spcAft>
-                <a:spcPts val="800"/>
-              </a:spcAft>
-              <a:buNone/>
-            </a:pPr>
-            <a:r>
-              <a:rPr lang="en-US" sz="4000" dirty="0">
-                <a:solidFill>
-                  <a:srgbClr val="111111"/>
-                </a:solidFill>
-                <a:latin typeface="Times New Roman" pitchFamily="34" charset="0"/>
-                <a:ea typeface="Times New Roman" pitchFamily="34" charset="-122"/>
-                <a:cs typeface="Times New Roman" pitchFamily="34" charset="-120"/>
-              </a:rPr>
-              <a:t>We see the whole lit face of the Moon.</a:t>
-            </a:r>
-            <a:endParaRPr lang="en-US" sz="4000" dirty="0"/>
-          </a:p>
-          <a:p>
-            <a:pPr algn="l" indent="0" marL="0">
-              <a:spcAft>
-                <a:spcPts val="800"/>
-              </a:spcAft>
-              <a:buNone/>
-            </a:pPr>
-            <a:r>
-              <a:rPr lang="en-US" sz="4000" b="1" dirty="0">
-                <a:solidFill>
-                  <a:srgbClr val="111111"/>
-                </a:solidFill>
-                <a:latin typeface="Times New Roman" pitchFamily="34" charset="0"/>
-                <a:ea typeface="Times New Roman" pitchFamily="34" charset="-122"/>
-                <a:cs typeface="Times New Roman" pitchFamily="34" charset="-120"/>
-              </a:rPr>
-              <a:t>Last quarter: </a:t>
-            </a:r>
-            <a:pPr algn="l" indent="0" marL="0">
-              <a:spcAft>
-                <a:spcPts val="800"/>
-              </a:spcAft>
-              <a:buNone/>
-            </a:pPr>
-            <a:r>
-              <a:rPr lang="en-US" sz="4000" dirty="0">
-                <a:solidFill>
-                  <a:srgbClr val="111111"/>
-                </a:solidFill>
-                <a:latin typeface="Times New Roman" pitchFamily="34" charset="0"/>
-                <a:ea typeface="Times New Roman" pitchFamily="34" charset="-122"/>
-                <a:cs typeface="Times New Roman" pitchFamily="34" charset="-120"/>
-              </a:rPr>
-              <a:t>We see the left half of the Moon lit by the Sun.</a:t>
-            </a:r>
-            <a:endParaRPr lang="en-US" sz="4000" dirty="0"/>
+              <a:t>Illustration: the Milky Way</a:t>
+            </a:r>
+            <a:endParaRPr lang="en-US" sz="1600" dirty="0"/>
           </a:p>
         </p:txBody>
       </p:sp>
@@ -13306,48 +14068,9 @@
           </a:p>
         </p:txBody>
       </p:sp>
-      <p:sp>
-        <p:nvSpPr>
-          <p:cNvPr id="3" name="Text 1"/>
-          <p:cNvSpPr/>
-          <p:nvPr/>
-        </p:nvSpPr>
-        <p:spPr>
-          <a:xfrm>
-            <a:off x="457200" y="1005840"/>
-            <a:ext cx="11277295" cy="731520"/>
-          </a:xfrm>
-          <a:prstGeom prst="rect">
-            <a:avLst/>
-          </a:prstGeom>
-          <a:noFill/>
-          <a:ln/>
-        </p:spPr>
-        <p:txBody>
-          <a:bodyPr wrap="square" lIns="0" tIns="0" rIns="0" bIns="0" rtlCol="0" anchor="ctr"/>
-          <a:lstStyle/>
-          <a:p>
-            <a:pPr algn="ctr" indent="0" marL="0">
-              <a:buNone/>
-            </a:pPr>
-            <a:r>
-              <a:rPr lang="en-US" sz="3600" b="1" dirty="0">
-                <a:solidFill>
-                  <a:srgbClr val="990011"/>
-                </a:solidFill>
-                <a:latin typeface="Times New Roman" pitchFamily="34" charset="0"/>
-                <a:ea typeface="Times New Roman" pitchFamily="34" charset="-122"/>
-                <a:cs typeface="Times New Roman" pitchFamily="34" charset="-120"/>
-              </a:rPr>
-              <a:t>2. The Phases of the Moon</a:t>
-            </a:r>
-            <a:endParaRPr lang="en-US" sz="3600" dirty="0"/>
-          </a:p>
-        </p:txBody>
-      </p:sp>
       <p:pic>
         <p:nvPicPr>
-          <p:cNvPr id="4" name="Image 0" descr="/home/claude/f4/img/v2/moon_phases_big.png">    </p:cNvPr>
+          <p:cNvPr id="3" name="Image 0" descr="/home/claude/f4/img/minesec_sheet.png">    </p:cNvPr>
           <p:cNvPicPr>
             <a:picLocks noChangeAspect="1"/>
           </p:cNvPicPr>
@@ -13361,8 +14084,8 @@
         </p:blipFill>
         <p:spPr>
           <a:xfrm>
-            <a:off x="629930" y="1783080"/>
-            <a:ext cx="10931835" cy="4270248"/>
+            <a:off x="0" y="658368"/>
+            <a:ext cx="5120640" cy="5833872"/>
           </a:xfrm>
           <a:prstGeom prst="rect">
             <a:avLst/>
@@ -13371,14 +14094,14 @@
       </p:pic>
       <p:sp>
         <p:nvSpPr>
-          <p:cNvPr id="5" name="Text 2"/>
+          <p:cNvPr id="4" name="Text 1"/>
           <p:cNvSpPr/>
           <p:nvPr/>
         </p:nvSpPr>
         <p:spPr>
           <a:xfrm>
-            <a:off x="457200" y="6089904"/>
-            <a:ext cx="11277295" cy="347472"/>
+            <a:off x="5349240" y="1005840"/>
+            <a:ext cx="6522415" cy="731520"/>
           </a:xfrm>
           <a:prstGeom prst="rect">
             <a:avLst/>
@@ -13387,24 +14110,124 @@
           <a:ln/>
         </p:spPr>
         <p:txBody>
-          <a:bodyPr wrap="square" lIns="0" tIns="0" rIns="0" bIns="0" rtlCol="0" anchor="ctr"/>
+          <a:bodyPr wrap="square" lIns="0" tIns="0" rIns="0" bIns="0" rtlCol="0" anchor="ctr">
+            <a:normAutofit/>
+          </a:bodyPr>
           <a:lstStyle/>
           <a:p>
             <a:pPr algn="ctr" indent="0" marL="0">
               <a:buNone/>
             </a:pPr>
             <a:r>
-              <a:rPr lang="en-US" sz="1800" i="1" dirty="0">
-                <a:solidFill>
-                  <a:srgbClr val="555555"/>
+              <a:rPr lang="en-US" sz="3600" b="1" dirty="0">
+                <a:solidFill>
+                  <a:srgbClr val="990011"/>
                 </a:solidFill>
                 <a:latin typeface="Times New Roman" pitchFamily="34" charset="0"/>
                 <a:ea typeface="Times New Roman" pitchFamily="34" charset="-122"/>
                 <a:cs typeface="Times New Roman" pitchFamily="34" charset="-120"/>
               </a:rPr>
-              <a:t>Illustration: the phases of the Moon</a:t>
-            </a:r>
-            <a:endParaRPr lang="en-US" sz="1800" dirty="0"/>
+              <a:t>1. The Universe</a:t>
+            </a:r>
+            <a:endParaRPr lang="en-US" sz="3600" dirty="0"/>
+          </a:p>
+        </p:txBody>
+      </p:sp>
+      <p:sp>
+        <p:nvSpPr>
+          <p:cNvPr id="5" name="Text 2"/>
+          <p:cNvSpPr/>
+          <p:nvPr/>
+        </p:nvSpPr>
+        <p:spPr>
+          <a:xfrm>
+            <a:off x="5349240" y="1737360"/>
+            <a:ext cx="6522415" cy="457200"/>
+          </a:xfrm>
+          <a:prstGeom prst="rect">
+            <a:avLst/>
+          </a:prstGeom>
+          <a:noFill/>
+          <a:ln/>
+        </p:spPr>
+        <p:txBody>
+          <a:bodyPr wrap="square" lIns="0" tIns="0" rIns="0" bIns="0" rtlCol="0" anchor="ctr"/>
+          <a:lstStyle/>
+          <a:p>
+            <a:pPr algn="l" indent="0" marL="0">
+              <a:buNone/>
+            </a:pPr>
+            <a:r>
+              <a:rPr lang="en-US" sz="3200" b="1" dirty="0">
+                <a:solidFill>
+                  <a:srgbClr val="990011"/>
+                </a:solidFill>
+                <a:latin typeface="Times New Roman" pitchFamily="34" charset="0"/>
+                <a:ea typeface="Times New Roman" pitchFamily="34" charset="-122"/>
+                <a:cs typeface="Times New Roman" pitchFamily="34" charset="-120"/>
+              </a:rPr>
+              <a:t>A) Composition of the Universe</a:t>
+            </a:r>
+            <a:endParaRPr lang="en-US" sz="3200" dirty="0"/>
+          </a:p>
+        </p:txBody>
+      </p:sp>
+      <p:sp>
+        <p:nvSpPr>
+          <p:cNvPr id="6" name="Text 3"/>
+          <p:cNvSpPr/>
+          <p:nvPr/>
+        </p:nvSpPr>
+        <p:spPr>
+          <a:xfrm>
+            <a:off x="5349240" y="2240280"/>
+            <a:ext cx="6522415" cy="4206240"/>
+          </a:xfrm>
+          <a:prstGeom prst="rect">
+            <a:avLst/>
+          </a:prstGeom>
+          <a:noFill/>
+          <a:ln/>
+        </p:spPr>
+        <p:txBody>
+          <a:bodyPr wrap="square" lIns="0" tIns="0" rIns="0" bIns="0" rtlCol="0" anchor="t"/>
+          <a:lstStyle/>
+          <a:p>
+            <a:pPr algn="l" indent="0" marL="0">
+              <a:spcAft>
+                <a:spcPts val="800"/>
+              </a:spcAft>
+              <a:buNone/>
+            </a:pPr>
+            <a:r>
+              <a:rPr lang="en-US" sz="4000" b="1" dirty="0">
+                <a:solidFill>
+                  <a:srgbClr val="111111"/>
+                </a:solidFill>
+                <a:latin typeface="Times New Roman" pitchFamily="34" charset="0"/>
+                <a:ea typeface="Times New Roman" pitchFamily="34" charset="-122"/>
+                <a:cs typeface="Times New Roman" pitchFamily="34" charset="-120"/>
+              </a:rPr>
+              <a:t>Stars: </a:t>
+            </a:r>
+            <a:pPr algn="l" indent="0" marL="0">
+              <a:spcAft>
+                <a:spcPts val="800"/>
+              </a:spcAft>
+              <a:buNone/>
+            </a:pPr>
+            <a:r>
+              <a:rPr lang="en-US" sz="4000" dirty="0">
+                <a:solidFill>
+                  <a:srgbClr val="111111"/>
+                </a:solidFill>
+                <a:latin typeface="Times New Roman" pitchFamily="34" charset="0"/>
+                <a:ea typeface="Times New Roman" pitchFamily="34" charset="-122"/>
+                <a:cs typeface="Times New Roman" pitchFamily="34" charset="-120"/>
+              </a:rPr>
+              <a:t>Stars are huge balls of burning gas, and the Sun is our nearest star.</a:t>
+            </a:r>
+            <a:endParaRPr lang="en-US" sz="4000" dirty="0"/>
           </a:p>
         </p:txBody>
       </p:sp>
@@ -13520,9 +14343,150 @@
           </a:p>
         </p:txBody>
       </p:sp>
+      <p:sp>
+        <p:nvSpPr>
+          <p:cNvPr id="3" name="Text 1"/>
+          <p:cNvSpPr/>
+          <p:nvPr/>
+        </p:nvSpPr>
+        <p:spPr>
+          <a:xfrm>
+            <a:off x="365760" y="1005840"/>
+            <a:ext cx="11460175" cy="731520"/>
+          </a:xfrm>
+          <a:prstGeom prst="rect">
+            <a:avLst/>
+          </a:prstGeom>
+          <a:noFill/>
+          <a:ln/>
+        </p:spPr>
+        <p:txBody>
+          <a:bodyPr wrap="square" lIns="0" tIns="0" rIns="0" bIns="0" rtlCol="0" anchor="ctr">
+            <a:normAutofit/>
+          </a:bodyPr>
+          <a:lstStyle/>
+          <a:p>
+            <a:pPr algn="ctr" indent="0" marL="0">
+              <a:buNone/>
+            </a:pPr>
+            <a:r>
+              <a:rPr lang="en-US" sz="3600" b="1" dirty="0">
+                <a:solidFill>
+                  <a:srgbClr val="990011"/>
+                </a:solidFill>
+                <a:latin typeface="Times New Roman" pitchFamily="34" charset="0"/>
+                <a:ea typeface="Times New Roman" pitchFamily="34" charset="-122"/>
+                <a:cs typeface="Times New Roman" pitchFamily="34" charset="-120"/>
+              </a:rPr>
+              <a:t>1. The Universe</a:t>
+            </a:r>
+            <a:endParaRPr lang="en-US" sz="3600" dirty="0"/>
+          </a:p>
+        </p:txBody>
+      </p:sp>
+      <p:sp>
+        <p:nvSpPr>
+          <p:cNvPr id="4" name="Text 2"/>
+          <p:cNvSpPr/>
+          <p:nvPr/>
+        </p:nvSpPr>
+        <p:spPr>
+          <a:xfrm>
+            <a:off x="365760" y="1737360"/>
+            <a:ext cx="5120640" cy="457200"/>
+          </a:xfrm>
+          <a:prstGeom prst="rect">
+            <a:avLst/>
+          </a:prstGeom>
+          <a:noFill/>
+          <a:ln/>
+        </p:spPr>
+        <p:txBody>
+          <a:bodyPr wrap="square" lIns="0" tIns="0" rIns="0" bIns="0" rtlCol="0" anchor="ctr">
+            <a:normAutofit/>
+          </a:bodyPr>
+          <a:lstStyle/>
+          <a:p>
+            <a:pPr algn="l" indent="0" marL="0">
+              <a:buNone/>
+            </a:pPr>
+            <a:r>
+              <a:rPr lang="en-US" sz="3000" b="1" dirty="0">
+                <a:solidFill>
+                  <a:srgbClr val="990011"/>
+                </a:solidFill>
+                <a:latin typeface="Times New Roman" pitchFamily="34" charset="0"/>
+                <a:ea typeface="Times New Roman" pitchFamily="34" charset="-122"/>
+                <a:cs typeface="Times New Roman" pitchFamily="34" charset="-120"/>
+              </a:rPr>
+              <a:t>A) Composition of the Universe</a:t>
+            </a:r>
+            <a:endParaRPr lang="en-US" sz="3000" dirty="0"/>
+          </a:p>
+        </p:txBody>
+      </p:sp>
+      <p:sp>
+        <p:nvSpPr>
+          <p:cNvPr id="5" name="Text 3"/>
+          <p:cNvSpPr/>
+          <p:nvPr/>
+        </p:nvSpPr>
+        <p:spPr>
+          <a:xfrm>
+            <a:off x="365760" y="2240280"/>
+            <a:ext cx="4846320" cy="4160520"/>
+          </a:xfrm>
+          <a:prstGeom prst="rect">
+            <a:avLst/>
+          </a:prstGeom>
+          <a:noFill/>
+          <a:ln/>
+        </p:spPr>
+        <p:txBody>
+          <a:bodyPr wrap="square" lIns="0" tIns="0" rIns="0" bIns="0" rtlCol="0" anchor="t"/>
+          <a:lstStyle/>
+          <a:p>
+            <a:pPr algn="l" indent="0" marL="0">
+              <a:spcAft>
+                <a:spcPts val="800"/>
+              </a:spcAft>
+              <a:buNone/>
+            </a:pPr>
+            <a:r>
+              <a:rPr lang="en-US" sz="3600" b="1" dirty="0">
+                <a:solidFill>
+                  <a:srgbClr val="111111"/>
+                </a:solidFill>
+                <a:latin typeface="Times New Roman" pitchFamily="34" charset="0"/>
+                <a:ea typeface="Times New Roman" pitchFamily="34" charset="-122"/>
+                <a:cs typeface="Times New Roman" pitchFamily="34" charset="-120"/>
+              </a:rPr>
+              <a:t>The solar system: </a:t>
+            </a:r>
+            <a:pPr algn="l" indent="0" marL="0">
+              <a:spcAft>
+                <a:spcPts val="800"/>
+              </a:spcAft>
+              <a:buNone/>
+            </a:pPr>
+            <a:r>
+              <a:rPr lang="en-US" sz="3600" dirty="0">
+                <a:solidFill>
+                  <a:srgbClr val="111111"/>
+                </a:solidFill>
+                <a:latin typeface="Times New Roman" pitchFamily="34" charset="0"/>
+                <a:ea typeface="Times New Roman" pitchFamily="34" charset="-122"/>
+                <a:cs typeface="Times New Roman" pitchFamily="34" charset="-120"/>
+              </a:rPr>
+              <a:t>It is the Sun with the eight planets and their satellites that move around it.</a:t>
+            </a:r>
+            <a:endParaRPr lang="en-US" sz="3600" dirty="0"/>
+          </a:p>
+        </p:txBody>
+      </p:sp>
       <p:pic>
         <p:nvPicPr>
-          <p:cNvPr id="3" name="Image 0" descr="/home/claude/f4/img/minesec_sheet.png">    </p:cNvPr>
+          <p:cNvPr id="6" name="Image 0" descr="/home/claude/f4/img/v2/solar_system_big.png">    </p:cNvPr>
           <p:cNvPicPr>
             <a:picLocks noChangeAspect="1"/>
           </p:cNvPicPr>
@@ -13536,8 +14500,8 @@
         </p:blipFill>
         <p:spPr>
           <a:xfrm>
-            <a:off x="0" y="658368"/>
-            <a:ext cx="3840480" cy="5833872"/>
+            <a:off x="5349240" y="2617506"/>
+            <a:ext cx="6659575" cy="2601397"/>
           </a:xfrm>
           <a:prstGeom prst="rect">
             <a:avLst/>
@@ -13546,14 +14510,14 @@
       </p:pic>
       <p:sp>
         <p:nvSpPr>
-          <p:cNvPr id="4" name="Text 1"/>
+          <p:cNvPr id="7" name="Text 4"/>
           <p:cNvSpPr/>
           <p:nvPr/>
         </p:nvSpPr>
         <p:spPr>
           <a:xfrm>
-            <a:off x="4069080" y="1005840"/>
-            <a:ext cx="7802575" cy="731520"/>
+            <a:off x="5349240" y="6089904"/>
+            <a:ext cx="6659575" cy="347472"/>
           </a:xfrm>
           <a:prstGeom prst="rect">
             <a:avLst/>
@@ -13562,142 +14526,24 @@
           <a:ln/>
         </p:spPr>
         <p:txBody>
-          <a:bodyPr wrap="square" lIns="0" tIns="0" rIns="0" bIns="0" rtlCol="0" anchor="ctr">
-            <a:normAutofit/>
-          </a:bodyPr>
+          <a:bodyPr wrap="square" lIns="0" tIns="0" rIns="0" bIns="0" rtlCol="0" anchor="ctr"/>
           <a:lstStyle/>
           <a:p>
             <a:pPr algn="ctr" indent="0" marL="0">
               <a:buNone/>
             </a:pPr>
             <a:r>
-              <a:rPr lang="en-US" sz="3600" b="1" dirty="0">
-                <a:solidFill>
-                  <a:srgbClr val="990011"/>
+              <a:rPr lang="en-US" sz="1600" i="1" dirty="0">
+                <a:solidFill>
+                  <a:srgbClr val="555555"/>
                 </a:solidFill>
                 <a:latin typeface="Times New Roman" pitchFamily="34" charset="0"/>
                 <a:ea typeface="Times New Roman" pitchFamily="34" charset="-122"/>
                 <a:cs typeface="Times New Roman" pitchFamily="34" charset="-120"/>
               </a:rPr>
-              <a:t>3. Impacts of the Moon</a:t>
-            </a:r>
-            <a:endParaRPr lang="en-US" sz="3600" dirty="0"/>
-          </a:p>
-        </p:txBody>
-      </p:sp>
-      <p:sp>
-        <p:nvSpPr>
-          <p:cNvPr id="5" name="Text 2"/>
-          <p:cNvSpPr/>
-          <p:nvPr/>
-        </p:nvSpPr>
-        <p:spPr>
-          <a:xfrm>
-            <a:off x="4069080" y="1783080"/>
-            <a:ext cx="7802575" cy="4663440"/>
-          </a:xfrm>
-          <a:prstGeom prst="rect">
-            <a:avLst/>
-          </a:prstGeom>
-          <a:noFill/>
-          <a:ln/>
-        </p:spPr>
-        <p:txBody>
-          <a:bodyPr wrap="square" lIns="0" tIns="0" rIns="0" bIns="0" rtlCol="0" anchor="t"/>
-          <a:lstStyle/>
-          <a:p>
-            <a:pPr algn="l" indent="0" marL="0">
-              <a:spcAft>
-                <a:spcPts val="800"/>
-              </a:spcAft>
-              <a:buNone/>
-            </a:pPr>
-            <a:r>
-              <a:rPr lang="en-US" sz="4000" i="1" dirty="0">
-                <a:solidFill>
-                  <a:srgbClr val="111111"/>
-                </a:solidFill>
-                <a:latin typeface="Times New Roman" pitchFamily="34" charset="0"/>
-                <a:ea typeface="Times New Roman" pitchFamily="34" charset="-122"/>
-                <a:cs typeface="Times New Roman" pitchFamily="34" charset="-120"/>
-              </a:rPr>
-              <a:t>The Moon affects the environment and human activities as follows:</a:t>
-            </a:r>
-            <a:endParaRPr lang="en-US" sz="4000" dirty="0"/>
-          </a:p>
-          <a:p>
-            <a:pPr algn="l" indent="0" marL="0">
-              <a:spcAft>
-                <a:spcPts val="800"/>
-              </a:spcAft>
-              <a:buNone/>
-            </a:pPr>
-            <a:r>
-              <a:rPr lang="en-US" sz="4000" b="1" dirty="0">
-                <a:solidFill>
-                  <a:srgbClr val="111111"/>
-                </a:solidFill>
-                <a:latin typeface="Times New Roman" pitchFamily="34" charset="0"/>
-                <a:ea typeface="Times New Roman" pitchFamily="34" charset="-122"/>
-                <a:cs typeface="Times New Roman" pitchFamily="34" charset="-120"/>
-              </a:rPr>
-              <a:t>Tides: </a:t>
-            </a:r>
-            <a:pPr algn="l" indent="0" marL="0">
-              <a:spcAft>
-                <a:spcPts val="800"/>
-              </a:spcAft>
-              <a:buNone/>
-            </a:pPr>
-            <a:r>
-              <a:rPr lang="en-US" sz="4000" dirty="0">
-                <a:solidFill>
-                  <a:srgbClr val="111111"/>
-                </a:solidFill>
-                <a:latin typeface="Times New Roman" pitchFamily="34" charset="0"/>
-                <a:ea typeface="Times New Roman" pitchFamily="34" charset="-122"/>
-                <a:cs typeface="Times New Roman" pitchFamily="34" charset="-120"/>
-              </a:rPr>
-              <a:t>The pull of the Moon makes the sea rise and fall twice a day.</a:t>
-            </a:r>
-            <a:endParaRPr lang="en-US" sz="4000" dirty="0"/>
-          </a:p>
-          <a:p>
-            <a:pPr algn="l" indent="0" marL="0">
-              <a:spcAft>
-                <a:spcPts val="800"/>
-              </a:spcAft>
-              <a:buNone/>
-            </a:pPr>
-            <a:r>
-              <a:rPr lang="en-US" sz="4000" b="1" dirty="0">
-                <a:solidFill>
-                  <a:srgbClr val="111111"/>
-                </a:solidFill>
-                <a:latin typeface="Times New Roman" pitchFamily="34" charset="0"/>
-                <a:ea typeface="Times New Roman" pitchFamily="34" charset="-122"/>
-                <a:cs typeface="Times New Roman" pitchFamily="34" charset="-120"/>
-              </a:rPr>
-              <a:t>Fishing and navigation: </a:t>
-            </a:r>
-            <a:pPr algn="l" indent="0" marL="0">
-              <a:spcAft>
-                <a:spcPts val="800"/>
-              </a:spcAft>
-              <a:buNone/>
-            </a:pPr>
-            <a:r>
-              <a:rPr lang="en-US" sz="4000" dirty="0">
-                <a:solidFill>
-                  <a:srgbClr val="111111"/>
-                </a:solidFill>
-                <a:latin typeface="Times New Roman" pitchFamily="34" charset="0"/>
-                <a:ea typeface="Times New Roman" pitchFamily="34" charset="-122"/>
-                <a:cs typeface="Times New Roman" pitchFamily="34" charset="-120"/>
-              </a:rPr>
-              <a:t>Fishermen and sailors use the times of the tides to go out and come back.</a:t>
-            </a:r>
-            <a:endParaRPr lang="en-US" sz="4000" dirty="0"/>
+              <a:t>Illustration: the solar system</a:t>
+            </a:r>
+            <a:endParaRPr lang="en-US" sz="1600" dirty="0"/>
           </a:p>
         </p:txBody>
       </p:sp>
@@ -13872,7 +14718,7 @@
                 <a:ea typeface="Times New Roman" pitchFamily="34" charset="-122"/>
                 <a:cs typeface="Times New Roman" pitchFamily="34" charset="-120"/>
               </a:rPr>
-              <a:t>3. Impacts of the Moon (continued)</a:t>
+              <a:t>1. The Universe</a:t>
             </a:r>
             <a:endParaRPr lang="en-US" sz="3600" dirty="0"/>
           </a:p>
@@ -13886,8 +14732,47 @@
         </p:nvSpPr>
         <p:spPr>
           <a:xfrm>
-            <a:off x="5349240" y="1783080"/>
-            <a:ext cx="6522415" cy="4663440"/>
+            <a:off x="5349240" y="1737360"/>
+            <a:ext cx="6522415" cy="457200"/>
+          </a:xfrm>
+          <a:prstGeom prst="rect">
+            <a:avLst/>
+          </a:prstGeom>
+          <a:noFill/>
+          <a:ln/>
+        </p:spPr>
+        <p:txBody>
+          <a:bodyPr wrap="square" lIns="0" tIns="0" rIns="0" bIns="0" rtlCol="0" anchor="ctr"/>
+          <a:lstStyle/>
+          <a:p>
+            <a:pPr algn="l" indent="0" marL="0">
+              <a:buNone/>
+            </a:pPr>
+            <a:r>
+              <a:rPr lang="en-US" sz="3200" b="1" dirty="0">
+                <a:solidFill>
+                  <a:srgbClr val="990011"/>
+                </a:solidFill>
+                <a:latin typeface="Times New Roman" pitchFamily="34" charset="0"/>
+                <a:ea typeface="Times New Roman" pitchFamily="34" charset="-122"/>
+                <a:cs typeface="Times New Roman" pitchFamily="34" charset="-120"/>
+              </a:rPr>
+              <a:t>A) Composition of the Universe</a:t>
+            </a:r>
+            <a:endParaRPr lang="en-US" sz="3200" dirty="0"/>
+          </a:p>
+        </p:txBody>
+      </p:sp>
+      <p:sp>
+        <p:nvSpPr>
+          <p:cNvPr id="6" name="Text 3"/>
+          <p:cNvSpPr/>
+          <p:nvPr/>
+        </p:nvSpPr>
+        <p:spPr>
+          <a:xfrm>
+            <a:off x="5349240" y="2240280"/>
+            <a:ext cx="6522415" cy="4206240"/>
           </a:xfrm>
           <a:prstGeom prst="rect">
             <a:avLst/>
@@ -13914,7 +14799,7 @@
                 <a:ea typeface="Times New Roman" pitchFamily="34" charset="-122"/>
                 <a:cs typeface="Times New Roman" pitchFamily="34" charset="-120"/>
               </a:rPr>
-              <a:t>Calendar and culture: </a:t>
+              <a:t>Other bodies: </a:t>
             </a:r>
             <a:pPr algn="l" indent="0" marL="0">
               <a:spcAft>
@@ -13931,7 +14816,7 @@
                 <a:ea typeface="Times New Roman" pitchFamily="34" charset="-122"/>
                 <a:cs typeface="Times New Roman" pitchFamily="34" charset="-120"/>
               </a:rPr>
-              <a:t>Some calendars and feasts, such as Ramadan, follow the phases of the Moon.</a:t>
+              <a:t>Asteroids, comets, gases and dust are also found in space.</a:t>
             </a:r>
             <a:endParaRPr lang="en-US" sz="4000" dirty="0"/>
           </a:p>
@@ -14043,7 +14928,7 @@
                 <a:ea typeface="Calibri" pitchFamily="34" charset="-122"/>
                 <a:cs typeface="Calibri" pitchFamily="34" charset="-120"/>
               </a:rPr>
-              <a:t>FORMATIVE EVALUATION</a:t>
+              <a:t>BOARD SUMMARY</a:t>
             </a:r>
             <a:endParaRPr lang="en-US" sz="1400" dirty="0"/>
           </a:p>
@@ -14066,7 +14951,7 @@
         <p:spPr>
           <a:xfrm>
             <a:off x="0" y="658368"/>
-            <a:ext cx="5120640" cy="5833872"/>
+            <a:ext cx="1463040" cy="5833872"/>
           </a:xfrm>
           <a:prstGeom prst="rect">
             <a:avLst/>
@@ -14081,8 +14966,8 @@
         </p:nvSpPr>
         <p:spPr>
           <a:xfrm>
-            <a:off x="5349240" y="1005840"/>
-            <a:ext cx="6522415" cy="731520"/>
+            <a:off x="1691640" y="1005840"/>
+            <a:ext cx="10180015" cy="731520"/>
           </a:xfrm>
           <a:prstGeom prst="rect">
             <a:avLst/>
@@ -14108,7 +14993,7 @@
                 <a:ea typeface="Times New Roman" pitchFamily="34" charset="-122"/>
                 <a:cs typeface="Times New Roman" pitchFamily="34" charset="-120"/>
               </a:rPr>
-              <a:t>Evaluation 1</a:t>
+              <a:t>1. The Universe</a:t>
             </a:r>
             <a:endParaRPr lang="en-US" sz="3600" dirty="0"/>
           </a:p>
@@ -14122,8 +15007,47 @@
         </p:nvSpPr>
         <p:spPr>
           <a:xfrm>
-            <a:off x="5349240" y="1783080"/>
-            <a:ext cx="6522415" cy="4663440"/>
+            <a:off x="1691640" y="1737360"/>
+            <a:ext cx="10180015" cy="457200"/>
+          </a:xfrm>
+          <a:prstGeom prst="rect">
+            <a:avLst/>
+          </a:prstGeom>
+          <a:noFill/>
+          <a:ln/>
+        </p:spPr>
+        <p:txBody>
+          <a:bodyPr wrap="square" lIns="0" tIns="0" rIns="0" bIns="0" rtlCol="0" anchor="ctr"/>
+          <a:lstStyle/>
+          <a:p>
+            <a:pPr algn="l" indent="0" marL="0">
+              <a:buNone/>
+            </a:pPr>
+            <a:r>
+              <a:rPr lang="en-US" sz="3200" b="1" dirty="0">
+                <a:solidFill>
+                  <a:srgbClr val="990011"/>
+                </a:solidFill>
+                <a:latin typeface="Times New Roman" pitchFamily="34" charset="0"/>
+                <a:ea typeface="Times New Roman" pitchFamily="34" charset="-122"/>
+                <a:cs typeface="Times New Roman" pitchFamily="34" charset="-120"/>
+              </a:rPr>
+              <a:t>B) Links with the Planet Earth</a:t>
+            </a:r>
+            <a:endParaRPr lang="en-US" sz="3200" dirty="0"/>
+          </a:p>
+        </p:txBody>
+      </p:sp>
+      <p:sp>
+        <p:nvSpPr>
+          <p:cNvPr id="6" name="Text 3"/>
+          <p:cNvSpPr/>
+          <p:nvPr/>
+        </p:nvSpPr>
+        <p:spPr>
+          <a:xfrm>
+            <a:off x="1691640" y="2240280"/>
+            <a:ext cx="10180015" cy="4206240"/>
           </a:xfrm>
           <a:prstGeom prst="rect">
             <a:avLst/>
@@ -14142,7 +15066,7 @@
               <a:buNone/>
             </a:pPr>
             <a:r>
-              <a:rPr lang="en-US" sz="4000" dirty="0">
+              <a:rPr lang="en-US" sz="4000" i="1" dirty="0">
                 <a:solidFill>
                   <a:srgbClr val="111111"/>
                 </a:solidFill>
@@ -14150,7 +15074,81 @@
                 <a:ea typeface="Times New Roman" pitchFamily="34" charset="-122"/>
                 <a:cs typeface="Times New Roman" pitchFamily="34" charset="-120"/>
               </a:rPr>
-              <a:t>What is a galaxy? Name our galaxy.</a:t>
+              <a:t>The Earth is linked to the rest of the universe as follows:</a:t>
+            </a:r>
+            <a:endParaRPr lang="en-US" sz="4000" dirty="0"/>
+          </a:p>
+          <a:p>
+            <a:pPr algn="l" indent="0" marL="0">
+              <a:spcAft>
+                <a:spcPts val="800"/>
+              </a:spcAft>
+              <a:buNone/>
+            </a:pPr>
+            <a:r>
+              <a:rPr lang="en-US" sz="4000" b="1" dirty="0">
+                <a:solidFill>
+                  <a:srgbClr val="111111"/>
+                </a:solidFill>
+                <a:latin typeface="Times New Roman" pitchFamily="34" charset="0"/>
+                <a:ea typeface="Times New Roman" pitchFamily="34" charset="-122"/>
+                <a:cs typeface="Times New Roman" pitchFamily="34" charset="-120"/>
+              </a:rPr>
+              <a:t>Light and heat: </a:t>
+            </a:r>
+            <a:pPr algn="l" indent="0" marL="0">
+              <a:spcAft>
+                <a:spcPts val="800"/>
+              </a:spcAft>
+              <a:buNone/>
+            </a:pPr>
+            <a:r>
+              <a:rPr lang="en-US" sz="4000" dirty="0">
+                <a:solidFill>
+                  <a:srgbClr val="111111"/>
+                </a:solidFill>
+                <a:latin typeface="Times New Roman" pitchFamily="34" charset="0"/>
+                <a:ea typeface="Times New Roman" pitchFamily="34" charset="-122"/>
+                <a:cs typeface="Times New Roman" pitchFamily="34" charset="-120"/>
+              </a:rPr>
+              <a:t>The Sun gives the Earth the light and heat that make life possible.</a:t>
+            </a:r>
+            <a:endParaRPr lang="en-US" sz="4000" dirty="0"/>
+          </a:p>
+          <a:p>
+            <a:pPr algn="l" indent="0" marL="0">
+              <a:spcAft>
+                <a:spcPts val="800"/>
+              </a:spcAft>
+              <a:buNone/>
+            </a:pPr>
+            <a:r>
+              <a:rPr lang="en-US" sz="4000" b="1" dirty="0">
+                <a:solidFill>
+                  <a:srgbClr val="111111"/>
+                </a:solidFill>
+                <a:latin typeface="Times New Roman" pitchFamily="34" charset="0"/>
+                <a:ea typeface="Times New Roman" pitchFamily="34" charset="-122"/>
+                <a:cs typeface="Times New Roman" pitchFamily="34" charset="-120"/>
+              </a:rPr>
+              <a:t>Movements: </a:t>
+            </a:r>
+            <a:pPr algn="l" indent="0" marL="0">
+              <a:spcAft>
+                <a:spcPts val="800"/>
+              </a:spcAft>
+              <a:buNone/>
+            </a:pPr>
+            <a:r>
+              <a:rPr lang="en-US" sz="4000" dirty="0">
+                <a:solidFill>
+                  <a:srgbClr val="111111"/>
+                </a:solidFill>
+                <a:latin typeface="Times New Roman" pitchFamily="34" charset="0"/>
+                <a:ea typeface="Times New Roman" pitchFamily="34" charset="-122"/>
+                <a:cs typeface="Times New Roman" pitchFamily="34" charset="-120"/>
+              </a:rPr>
+              <a:t>The Earth turns around the Sun, which gives the year and the seasons.</a:t>
             </a:r>
             <a:endParaRPr lang="en-US" sz="4000" dirty="0"/>
           </a:p>
@@ -14262,7 +15260,7 @@
                 <a:ea typeface="Calibri" pitchFamily="34" charset="-122"/>
                 <a:cs typeface="Calibri" pitchFamily="34" charset="-120"/>
               </a:rPr>
-              <a:t>FORMATIVE EVALUATION</a:t>
+              <a:t>BOARD SUMMARY</a:t>
             </a:r>
             <a:endParaRPr lang="en-US" sz="1400" dirty="0"/>
           </a:p>
@@ -14285,7 +15283,7 @@
         <p:spPr>
           <a:xfrm>
             <a:off x="0" y="658368"/>
-            <a:ext cx="5120640" cy="5833872"/>
+            <a:ext cx="2468880" cy="5833872"/>
           </a:xfrm>
           <a:prstGeom prst="rect">
             <a:avLst/>
@@ -14300,8 +15298,8 @@
         </p:nvSpPr>
         <p:spPr>
           <a:xfrm>
-            <a:off x="5349240" y="1005840"/>
-            <a:ext cx="6522415" cy="731520"/>
+            <a:off x="2697480" y="1005840"/>
+            <a:ext cx="9174175" cy="731520"/>
           </a:xfrm>
           <a:prstGeom prst="rect">
             <a:avLst/>
@@ -14327,7 +15325,7 @@
                 <a:ea typeface="Times New Roman" pitchFamily="34" charset="-122"/>
                 <a:cs typeface="Times New Roman" pitchFamily="34" charset="-120"/>
               </a:rPr>
-              <a:t>Expected Answer</a:t>
+              <a:t>1. The Universe</a:t>
             </a:r>
             <a:endParaRPr lang="en-US" sz="3600" dirty="0"/>
           </a:p>
@@ -14341,8 +15339,47 @@
         </p:nvSpPr>
         <p:spPr>
           <a:xfrm>
-            <a:off x="5349240" y="1783080"/>
-            <a:ext cx="6522415" cy="4663440"/>
+            <a:off x="2697480" y="1737360"/>
+            <a:ext cx="9174175" cy="457200"/>
+          </a:xfrm>
+          <a:prstGeom prst="rect">
+            <a:avLst/>
+          </a:prstGeom>
+          <a:noFill/>
+          <a:ln/>
+        </p:spPr>
+        <p:txBody>
+          <a:bodyPr wrap="square" lIns="0" tIns="0" rIns="0" bIns="0" rtlCol="0" anchor="ctr"/>
+          <a:lstStyle/>
+          <a:p>
+            <a:pPr algn="l" indent="0" marL="0">
+              <a:buNone/>
+            </a:pPr>
+            <a:r>
+              <a:rPr lang="en-US" sz="3200" b="1" dirty="0">
+                <a:solidFill>
+                  <a:srgbClr val="990011"/>
+                </a:solidFill>
+                <a:latin typeface="Times New Roman" pitchFamily="34" charset="0"/>
+                <a:ea typeface="Times New Roman" pitchFamily="34" charset="-122"/>
+                <a:cs typeface="Times New Roman" pitchFamily="34" charset="-120"/>
+              </a:rPr>
+              <a:t>B) Links with the Planet Earth (continued)</a:t>
+            </a:r>
+            <a:endParaRPr lang="en-US" sz="3200" dirty="0"/>
+          </a:p>
+        </p:txBody>
+      </p:sp>
+      <p:sp>
+        <p:nvSpPr>
+          <p:cNvPr id="6" name="Text 3"/>
+          <p:cNvSpPr/>
+          <p:nvPr/>
+        </p:nvSpPr>
+        <p:spPr>
+          <a:xfrm>
+            <a:off x="2697480" y="2240280"/>
+            <a:ext cx="9174175" cy="4206240"/>
           </a:xfrm>
           <a:prstGeom prst="rect">
             <a:avLst/>
@@ -14361,7 +15398,7 @@
               <a:buNone/>
             </a:pPr>
             <a:r>
-              <a:rPr lang="en-US" sz="4000" dirty="0">
+              <a:rPr lang="en-US" sz="4000" b="1" dirty="0">
                 <a:solidFill>
                   <a:srgbClr val="111111"/>
                 </a:solidFill>
@@ -14369,7 +15406,61 @@
                 <a:ea typeface="Times New Roman" pitchFamily="34" charset="-122"/>
                 <a:cs typeface="Times New Roman" pitchFamily="34" charset="-120"/>
               </a:rPr>
-              <a:t>A huge group of stars. Ours is the Milky Way.</a:t>
+              <a:t>Gravity: </a:t>
+            </a:r>
+            <a:pPr algn="l" indent="0" marL="0">
+              <a:spcAft>
+                <a:spcPts val="800"/>
+              </a:spcAft>
+              <a:buNone/>
+            </a:pPr>
+            <a:r>
+              <a:rPr lang="en-US" sz="4000" dirty="0">
+                <a:solidFill>
+                  <a:srgbClr val="111111"/>
+                </a:solidFill>
+                <a:latin typeface="Times New Roman" pitchFamily="34" charset="0"/>
+                <a:ea typeface="Times New Roman" pitchFamily="34" charset="-122"/>
+                <a:cs typeface="Times New Roman" pitchFamily="34" charset="-120"/>
+              </a:rPr>
+              <a:t>The Sun and the Moon pull the Earth, and this causes the tides.</a:t>
+            </a:r>
+            <a:endParaRPr lang="en-US" sz="4000" dirty="0"/>
+          </a:p>
+          <a:p>
+            <a:pPr algn="l" indent="0" marL="0">
+              <a:spcAft>
+                <a:spcPts val="800"/>
+              </a:spcAft>
+              <a:buNone/>
+            </a:pPr>
+            <a:r>
+              <a:rPr lang="en-US" sz="4000" b="1" dirty="0">
+                <a:solidFill>
+                  <a:srgbClr val="111111"/>
+                </a:solidFill>
+                <a:latin typeface="Times New Roman" pitchFamily="34" charset="0"/>
+                <a:ea typeface="Times New Roman" pitchFamily="34" charset="-122"/>
+                <a:cs typeface="Times New Roman" pitchFamily="34" charset="-120"/>
+              </a:rPr>
+              <a:t>The place of the Earth: </a:t>
+            </a:r>
+            <a:pPr algn="l" indent="0" marL="0">
+              <a:spcAft>
+                <a:spcPts val="800"/>
+              </a:spcAft>
+              <a:buNone/>
+            </a:pPr>
+            <a:r>
+              <a:rPr lang="en-US" sz="4000" dirty="0">
+                <a:solidFill>
+                  <a:srgbClr val="111111"/>
+                </a:solidFill>
+                <a:latin typeface="Times New Roman" pitchFamily="34" charset="0"/>
+                <a:ea typeface="Times New Roman" pitchFamily="34" charset="-122"/>
+                <a:cs typeface="Times New Roman" pitchFamily="34" charset="-120"/>
+              </a:rPr>
+              <a:t>The Earth is the third planet from the Sun and the only one known to have life.</a:t>
             </a:r>
             <a:endParaRPr lang="en-US" sz="4000" dirty="0"/>
           </a:p>
@@ -14481,15 +15572,176 @@
                 <a:ea typeface="Calibri" pitchFamily="34" charset="-122"/>
                 <a:cs typeface="Calibri" pitchFamily="34" charset="-120"/>
               </a:rPr>
-              <a:t>FORMATIVE EVALUATION</a:t>
+              <a:t>BOARD SUMMARY</a:t>
             </a:r>
             <a:endParaRPr lang="en-US" sz="1400" dirty="0"/>
+          </a:p>
+        </p:txBody>
+      </p:sp>
+      <p:sp>
+        <p:nvSpPr>
+          <p:cNvPr id="3" name="Text 1"/>
+          <p:cNvSpPr/>
+          <p:nvPr/>
+        </p:nvSpPr>
+        <p:spPr>
+          <a:xfrm>
+            <a:off x="365760" y="1005840"/>
+            <a:ext cx="11460175" cy="731520"/>
+          </a:xfrm>
+          <a:prstGeom prst="rect">
+            <a:avLst/>
+          </a:prstGeom>
+          <a:noFill/>
+          <a:ln/>
+        </p:spPr>
+        <p:txBody>
+          <a:bodyPr wrap="square" lIns="0" tIns="0" rIns="0" bIns="0" rtlCol="0" anchor="ctr">
+            <a:normAutofit/>
+          </a:bodyPr>
+          <a:lstStyle/>
+          <a:p>
+            <a:pPr algn="ctr" indent="0" marL="0">
+              <a:buNone/>
+            </a:pPr>
+            <a:r>
+              <a:rPr lang="en-US" sz="3600" b="1" dirty="0">
+                <a:solidFill>
+                  <a:srgbClr val="990011"/>
+                </a:solidFill>
+                <a:latin typeface="Times New Roman" pitchFamily="34" charset="0"/>
+                <a:ea typeface="Times New Roman" pitchFamily="34" charset="-122"/>
+                <a:cs typeface="Times New Roman" pitchFamily="34" charset="-120"/>
+              </a:rPr>
+              <a:t>2. The Moon, Satellite of the Earth</a:t>
+            </a:r>
+            <a:endParaRPr lang="en-US" sz="3600" dirty="0"/>
+          </a:p>
+        </p:txBody>
+      </p:sp>
+      <p:sp>
+        <p:nvSpPr>
+          <p:cNvPr id="4" name="Text 2"/>
+          <p:cNvSpPr/>
+          <p:nvPr/>
+        </p:nvSpPr>
+        <p:spPr>
+          <a:xfrm>
+            <a:off x="365760" y="1737360"/>
+            <a:ext cx="5120640" cy="457200"/>
+          </a:xfrm>
+          <a:prstGeom prst="rect">
+            <a:avLst/>
+          </a:prstGeom>
+          <a:noFill/>
+          <a:ln/>
+        </p:spPr>
+        <p:txBody>
+          <a:bodyPr wrap="square" lIns="0" tIns="0" rIns="0" bIns="0" rtlCol="0" anchor="ctr">
+            <a:normAutofit/>
+          </a:bodyPr>
+          <a:lstStyle/>
+          <a:p>
+            <a:pPr algn="l" indent="0" marL="0">
+              <a:buNone/>
+            </a:pPr>
+            <a:r>
+              <a:rPr lang="en-US" sz="3000" b="1" dirty="0">
+                <a:solidFill>
+                  <a:srgbClr val="990011"/>
+                </a:solidFill>
+                <a:latin typeface="Times New Roman" pitchFamily="34" charset="0"/>
+                <a:ea typeface="Times New Roman" pitchFamily="34" charset="-122"/>
+                <a:cs typeface="Times New Roman" pitchFamily="34" charset="-120"/>
+              </a:rPr>
+              <a:t>A) The Phases of the Moon</a:t>
+            </a:r>
+            <a:endParaRPr lang="en-US" sz="3000" dirty="0"/>
+          </a:p>
+        </p:txBody>
+      </p:sp>
+      <p:sp>
+        <p:nvSpPr>
+          <p:cNvPr id="5" name="Text 3"/>
+          <p:cNvSpPr/>
+          <p:nvPr/>
+        </p:nvSpPr>
+        <p:spPr>
+          <a:xfrm>
+            <a:off x="365760" y="2240280"/>
+            <a:ext cx="4846320" cy="4160520"/>
+          </a:xfrm>
+          <a:prstGeom prst="rect">
+            <a:avLst/>
+          </a:prstGeom>
+          <a:noFill/>
+          <a:ln/>
+        </p:spPr>
+        <p:txBody>
+          <a:bodyPr wrap="square" lIns="0" tIns="0" rIns="0" bIns="0" rtlCol="0" anchor="t"/>
+          <a:lstStyle/>
+          <a:p>
+            <a:pPr algn="l" indent="0" marL="0">
+              <a:spcAft>
+                <a:spcPts val="800"/>
+              </a:spcAft>
+              <a:buNone/>
+            </a:pPr>
+            <a:r>
+              <a:rPr lang="en-US" sz="3200" i="1" dirty="0">
+                <a:solidFill>
+                  <a:srgbClr val="111111"/>
+                </a:solidFill>
+                <a:latin typeface="Times New Roman" pitchFamily="34" charset="0"/>
+                <a:ea typeface="Times New Roman" pitchFamily="34" charset="-122"/>
+                <a:cs typeface="Times New Roman" pitchFamily="34" charset="-120"/>
+              </a:rPr>
+              <a:t>The Moon shows the following phases during a month of about 29½ days:</a:t>
+            </a:r>
+            <a:endParaRPr lang="en-US" sz="3200" dirty="0"/>
+          </a:p>
+          <a:p>
+            <a:pPr algn="l" indent="0" marL="0">
+              <a:spcAft>
+                <a:spcPts val="800"/>
+              </a:spcAft>
+              <a:buNone/>
+            </a:pPr>
+            <a:r>
+              <a:rPr lang="en-US" sz="3200" b="1" dirty="0">
+                <a:solidFill>
+                  <a:srgbClr val="111111"/>
+                </a:solidFill>
+                <a:latin typeface="Times New Roman" pitchFamily="34" charset="0"/>
+                <a:ea typeface="Times New Roman" pitchFamily="34" charset="-122"/>
+                <a:cs typeface="Times New Roman" pitchFamily="34" charset="-120"/>
+              </a:rPr>
+              <a:t>New Moon: </a:t>
+            </a:r>
+            <a:pPr algn="l" indent="0" marL="0">
+              <a:spcAft>
+                <a:spcPts val="800"/>
+              </a:spcAft>
+              <a:buNone/>
+            </a:pPr>
+            <a:r>
+              <a:rPr lang="en-US" sz="3200" dirty="0">
+                <a:solidFill>
+                  <a:srgbClr val="111111"/>
+                </a:solidFill>
+                <a:latin typeface="Times New Roman" pitchFamily="34" charset="0"/>
+                <a:ea typeface="Times New Roman" pitchFamily="34" charset="-122"/>
+                <a:cs typeface="Times New Roman" pitchFamily="34" charset="-120"/>
+              </a:rPr>
+              <a:t>The lit side of the Moon faces away from the Earth, so we do not see it.</a:t>
+            </a:r>
+            <a:endParaRPr lang="en-US" sz="3200" dirty="0"/>
           </a:p>
         </p:txBody>
       </p:sp>
       <p:pic>
         <p:nvPicPr>
-          <p:cNvPr id="3" name="Image 0" descr="/home/claude/f4/img/minesec_sheet.png">    </p:cNvPr>
+          <p:cNvPr id="6" name="Image 0" descr="/home/claude/f4/img/v2/moon_phases_big.png">    </p:cNvPr>
           <p:cNvPicPr>
             <a:picLocks noChangeAspect="1"/>
           </p:cNvPicPr>
@@ -14503,8 +15755,8 @@
         </p:blipFill>
         <p:spPr>
           <a:xfrm>
-            <a:off x="0" y="658368"/>
-            <a:ext cx="5120640" cy="5833872"/>
+            <a:off x="5349240" y="2617506"/>
+            <a:ext cx="6659575" cy="2601397"/>
           </a:xfrm>
           <a:prstGeom prst="rect">
             <a:avLst/>
@@ -14513,14 +15765,14 @@
       </p:pic>
       <p:sp>
         <p:nvSpPr>
-          <p:cNvPr id="4" name="Text 1"/>
+          <p:cNvPr id="7" name="Text 4"/>
           <p:cNvSpPr/>
           <p:nvPr/>
         </p:nvSpPr>
         <p:spPr>
           <a:xfrm>
-            <a:off x="5349240" y="1005840"/>
-            <a:ext cx="6522415" cy="731520"/>
+            <a:off x="5349240" y="6089904"/>
+            <a:ext cx="6659575" cy="347472"/>
           </a:xfrm>
           <a:prstGeom prst="rect">
             <a:avLst/>
@@ -14529,68 +15781,24 @@
           <a:ln/>
         </p:spPr>
         <p:txBody>
-          <a:bodyPr wrap="square" lIns="0" tIns="0" rIns="0" bIns="0" rtlCol="0" anchor="ctr">
-            <a:normAutofit/>
-          </a:bodyPr>
+          <a:bodyPr wrap="square" lIns="0" tIns="0" rIns="0" bIns="0" rtlCol="0" anchor="ctr"/>
           <a:lstStyle/>
           <a:p>
             <a:pPr algn="ctr" indent="0" marL="0">
               <a:buNone/>
             </a:pPr>
             <a:r>
-              <a:rPr lang="en-US" sz="3600" b="1" dirty="0">
-                <a:solidFill>
-                  <a:srgbClr val="990011"/>
+              <a:rPr lang="en-US" sz="1600" i="1" dirty="0">
+                <a:solidFill>
+                  <a:srgbClr val="555555"/>
                 </a:solidFill>
                 <a:latin typeface="Times New Roman" pitchFamily="34" charset="0"/>
                 <a:ea typeface="Times New Roman" pitchFamily="34" charset="-122"/>
                 <a:cs typeface="Times New Roman" pitchFamily="34" charset="-120"/>
               </a:rPr>
-              <a:t>Evaluation 2</a:t>
-            </a:r>
-            <a:endParaRPr lang="en-US" sz="3600" dirty="0"/>
-          </a:p>
-        </p:txBody>
-      </p:sp>
-      <p:sp>
-        <p:nvSpPr>
-          <p:cNvPr id="5" name="Text 2"/>
-          <p:cNvSpPr/>
-          <p:nvPr/>
-        </p:nvSpPr>
-        <p:spPr>
-          <a:xfrm>
-            <a:off x="5349240" y="1783080"/>
-            <a:ext cx="6522415" cy="4663440"/>
-          </a:xfrm>
-          <a:prstGeom prst="rect">
-            <a:avLst/>
-          </a:prstGeom>
-          <a:noFill/>
-          <a:ln/>
-        </p:spPr>
-        <p:txBody>
-          <a:bodyPr wrap="square" lIns="0" tIns="0" rIns="0" bIns="0" rtlCol="0" anchor="t"/>
-          <a:lstStyle/>
-          <a:p>
-            <a:pPr algn="l" indent="0" marL="0">
-              <a:spcAft>
-                <a:spcPts val="800"/>
-              </a:spcAft>
-              <a:buNone/>
-            </a:pPr>
-            <a:r>
-              <a:rPr lang="en-US" sz="4000" dirty="0">
-                <a:solidFill>
-                  <a:srgbClr val="111111"/>
-                </a:solidFill>
-                <a:latin typeface="Times New Roman" pitchFamily="34" charset="0"/>
-                <a:ea typeface="Times New Roman" pitchFamily="34" charset="-122"/>
-                <a:cs typeface="Times New Roman" pitchFamily="34" charset="-120"/>
-              </a:rPr>
-              <a:t>What causes the tides?</a:t>
-            </a:r>
-            <a:endParaRPr lang="en-US" sz="4000" dirty="0"/>
+              <a:t>Illustration: the phases of the Moon</a:t>
+            </a:r>
+            <a:endParaRPr lang="en-US" sz="1600" dirty="0"/>
           </a:p>
         </p:txBody>
       </p:sp>
@@ -14939,7 +16147,7 @@
                 <a:ea typeface="Calibri" pitchFamily="34" charset="-122"/>
                 <a:cs typeface="Calibri" pitchFamily="34" charset="-120"/>
               </a:rPr>
-              <a:t>FORMATIVE EVALUATION</a:t>
+              <a:t>BOARD SUMMARY</a:t>
             </a:r>
             <a:endParaRPr lang="en-US" sz="1400" dirty="0"/>
           </a:p>
@@ -14962,7 +16170,7 @@
         <p:spPr>
           <a:xfrm>
             <a:off x="0" y="658368"/>
-            <a:ext cx="5120640" cy="5833872"/>
+            <a:ext cx="1463040" cy="5833872"/>
           </a:xfrm>
           <a:prstGeom prst="rect">
             <a:avLst/>
@@ -14977,8 +16185,8 @@
         </p:nvSpPr>
         <p:spPr>
           <a:xfrm>
-            <a:off x="5349240" y="1005840"/>
-            <a:ext cx="6522415" cy="731520"/>
+            <a:off x="1691640" y="1005840"/>
+            <a:ext cx="10180015" cy="731520"/>
           </a:xfrm>
           <a:prstGeom prst="rect">
             <a:avLst/>
@@ -15004,7 +16212,7 @@
                 <a:ea typeface="Times New Roman" pitchFamily="34" charset="-122"/>
                 <a:cs typeface="Times New Roman" pitchFamily="34" charset="-120"/>
               </a:rPr>
-              <a:t>Expected Answer</a:t>
+              <a:t>2. The Moon, Satellite of the Earth</a:t>
             </a:r>
             <a:endParaRPr lang="en-US" sz="3600" dirty="0"/>
           </a:p>
@@ -15018,8 +16226,47 @@
         </p:nvSpPr>
         <p:spPr>
           <a:xfrm>
-            <a:off x="5349240" y="1783080"/>
-            <a:ext cx="6522415" cy="4663440"/>
+            <a:off x="1691640" y="1737360"/>
+            <a:ext cx="10180015" cy="457200"/>
+          </a:xfrm>
+          <a:prstGeom prst="rect">
+            <a:avLst/>
+          </a:prstGeom>
+          <a:noFill/>
+          <a:ln/>
+        </p:spPr>
+        <p:txBody>
+          <a:bodyPr wrap="square" lIns="0" tIns="0" rIns="0" bIns="0" rtlCol="0" anchor="ctr"/>
+          <a:lstStyle/>
+          <a:p>
+            <a:pPr algn="l" indent="0" marL="0">
+              <a:buNone/>
+            </a:pPr>
+            <a:r>
+              <a:rPr lang="en-US" sz="3200" b="1" dirty="0">
+                <a:solidFill>
+                  <a:srgbClr val="990011"/>
+                </a:solidFill>
+                <a:latin typeface="Times New Roman" pitchFamily="34" charset="0"/>
+                <a:ea typeface="Times New Roman" pitchFamily="34" charset="-122"/>
+                <a:cs typeface="Times New Roman" pitchFamily="34" charset="-120"/>
+              </a:rPr>
+              <a:t>A) The Phases of the Moon</a:t>
+            </a:r>
+            <a:endParaRPr lang="en-US" sz="3200" dirty="0"/>
+          </a:p>
+        </p:txBody>
+      </p:sp>
+      <p:sp>
+        <p:nvSpPr>
+          <p:cNvPr id="6" name="Text 3"/>
+          <p:cNvSpPr/>
+          <p:nvPr/>
+        </p:nvSpPr>
+        <p:spPr>
+          <a:xfrm>
+            <a:off x="1691640" y="2240280"/>
+            <a:ext cx="10180015" cy="4206240"/>
           </a:xfrm>
           <a:prstGeom prst="rect">
             <a:avLst/>
@@ -15038,7 +16285,7 @@
               <a:buNone/>
             </a:pPr>
             <a:r>
-              <a:rPr lang="en-US" sz="4000" dirty="0">
+              <a:rPr lang="en-US" sz="4000" b="1" dirty="0">
                 <a:solidFill>
                   <a:srgbClr val="111111"/>
                 </a:solidFill>
@@ -15046,7 +16293,98 @@
                 <a:ea typeface="Times New Roman" pitchFamily="34" charset="-122"/>
                 <a:cs typeface="Times New Roman" pitchFamily="34" charset="-120"/>
               </a:rPr>
-              <a:t>The pull (gravity) of the Moon.</a:t>
+              <a:t>First quarter: </a:t>
+            </a:r>
+            <a:pPr algn="l" indent="0" marL="0">
+              <a:spcAft>
+                <a:spcPts val="800"/>
+              </a:spcAft>
+              <a:buNone/>
+            </a:pPr>
+            <a:r>
+              <a:rPr lang="en-US" sz="4000" dirty="0">
+                <a:solidFill>
+                  <a:srgbClr val="111111"/>
+                </a:solidFill>
+                <a:latin typeface="Times New Roman" pitchFamily="34" charset="0"/>
+                <a:ea typeface="Times New Roman" pitchFamily="34" charset="-122"/>
+                <a:cs typeface="Times New Roman" pitchFamily="34" charset="-120"/>
+              </a:rPr>
+              <a:t>We see the right half of the Moon lit by the Sun.</a:t>
+            </a:r>
+            <a:endParaRPr lang="en-US" sz="4000" dirty="0"/>
+          </a:p>
+          <a:p>
+            <a:pPr algn="l" indent="0" marL="0">
+              <a:spcAft>
+                <a:spcPts val="800"/>
+              </a:spcAft>
+              <a:buNone/>
+            </a:pPr>
+            <a:r>
+              <a:rPr lang="en-US" sz="4000" b="1" dirty="0">
+                <a:solidFill>
+                  <a:srgbClr val="111111"/>
+                </a:solidFill>
+                <a:latin typeface="Times New Roman" pitchFamily="34" charset="0"/>
+                <a:ea typeface="Times New Roman" pitchFamily="34" charset="-122"/>
+                <a:cs typeface="Times New Roman" pitchFamily="34" charset="-120"/>
+              </a:rPr>
+              <a:t>Full Moon: </a:t>
+            </a:r>
+            <a:pPr algn="l" indent="0" marL="0">
+              <a:spcAft>
+                <a:spcPts val="800"/>
+              </a:spcAft>
+              <a:buNone/>
+            </a:pPr>
+            <a:r>
+              <a:rPr lang="en-US" sz="4000" dirty="0">
+                <a:solidFill>
+                  <a:srgbClr val="111111"/>
+                </a:solidFill>
+                <a:latin typeface="Times New Roman" pitchFamily="34" charset="0"/>
+                <a:ea typeface="Times New Roman" pitchFamily="34" charset="-122"/>
+                <a:cs typeface="Times New Roman" pitchFamily="34" charset="-120"/>
+              </a:rPr>
+              <a:t>The whole lit face of the Moon faces the Earth, so we see a full circle.</a:t>
+            </a:r>
+            <a:endParaRPr lang="en-US" sz="4000" dirty="0"/>
+          </a:p>
+          <a:p>
+            <a:pPr algn="l" indent="0" marL="0">
+              <a:spcAft>
+                <a:spcPts val="800"/>
+              </a:spcAft>
+              <a:buNone/>
+            </a:pPr>
+            <a:r>
+              <a:rPr lang="en-US" sz="4000" b="1" dirty="0">
+                <a:solidFill>
+                  <a:srgbClr val="111111"/>
+                </a:solidFill>
+                <a:latin typeface="Times New Roman" pitchFamily="34" charset="0"/>
+                <a:ea typeface="Times New Roman" pitchFamily="34" charset="-122"/>
+                <a:cs typeface="Times New Roman" pitchFamily="34" charset="-120"/>
+              </a:rPr>
+              <a:t>Last quarter: </a:t>
+            </a:r>
+            <a:pPr algn="l" indent="0" marL="0">
+              <a:spcAft>
+                <a:spcPts val="800"/>
+              </a:spcAft>
+              <a:buNone/>
+            </a:pPr>
+            <a:r>
+              <a:rPr lang="en-US" sz="4000" dirty="0">
+                <a:solidFill>
+                  <a:srgbClr val="111111"/>
+                </a:solidFill>
+                <a:latin typeface="Times New Roman" pitchFamily="34" charset="0"/>
+                <a:ea typeface="Times New Roman" pitchFamily="34" charset="-122"/>
+                <a:cs typeface="Times New Roman" pitchFamily="34" charset="-120"/>
+              </a:rPr>
+              <a:t>We see the left half of the Moon lit by the Sun.</a:t>
             </a:r>
             <a:endParaRPr lang="en-US" sz="4000" dirty="0"/>
           </a:p>
@@ -15158,15 +16496,176 @@
                 <a:ea typeface="Calibri" pitchFamily="34" charset="-122"/>
                 <a:cs typeface="Calibri" pitchFamily="34" charset="-120"/>
               </a:rPr>
-              <a:t>REMEDIATION</a:t>
+              <a:t>BOARD SUMMARY</a:t>
             </a:r>
             <a:endParaRPr lang="en-US" sz="1400" dirty="0"/>
+          </a:p>
+        </p:txBody>
+      </p:sp>
+      <p:sp>
+        <p:nvSpPr>
+          <p:cNvPr id="3" name="Text 1"/>
+          <p:cNvSpPr/>
+          <p:nvPr/>
+        </p:nvSpPr>
+        <p:spPr>
+          <a:xfrm>
+            <a:off x="365760" y="1005840"/>
+            <a:ext cx="11460175" cy="731520"/>
+          </a:xfrm>
+          <a:prstGeom prst="rect">
+            <a:avLst/>
+          </a:prstGeom>
+          <a:noFill/>
+          <a:ln/>
+        </p:spPr>
+        <p:txBody>
+          <a:bodyPr wrap="square" lIns="0" tIns="0" rIns="0" bIns="0" rtlCol="0" anchor="ctr">
+            <a:normAutofit/>
+          </a:bodyPr>
+          <a:lstStyle/>
+          <a:p>
+            <a:pPr algn="ctr" indent="0" marL="0">
+              <a:buNone/>
+            </a:pPr>
+            <a:r>
+              <a:rPr lang="en-US" sz="3600" b="1" dirty="0">
+                <a:solidFill>
+                  <a:srgbClr val="990011"/>
+                </a:solidFill>
+                <a:latin typeface="Times New Roman" pitchFamily="34" charset="0"/>
+                <a:ea typeface="Times New Roman" pitchFamily="34" charset="-122"/>
+                <a:cs typeface="Times New Roman" pitchFamily="34" charset="-120"/>
+              </a:rPr>
+              <a:t>2. The Moon, Satellite of the Earth</a:t>
+            </a:r>
+            <a:endParaRPr lang="en-US" sz="3600" dirty="0"/>
+          </a:p>
+        </p:txBody>
+      </p:sp>
+      <p:sp>
+        <p:nvSpPr>
+          <p:cNvPr id="4" name="Text 2"/>
+          <p:cNvSpPr/>
+          <p:nvPr/>
+        </p:nvSpPr>
+        <p:spPr>
+          <a:xfrm>
+            <a:off x="365760" y="1737360"/>
+            <a:ext cx="5120640" cy="457200"/>
+          </a:xfrm>
+          <a:prstGeom prst="rect">
+            <a:avLst/>
+          </a:prstGeom>
+          <a:noFill/>
+          <a:ln/>
+        </p:spPr>
+        <p:txBody>
+          <a:bodyPr wrap="square" lIns="0" tIns="0" rIns="0" bIns="0" rtlCol="0" anchor="ctr">
+            <a:normAutofit/>
+          </a:bodyPr>
+          <a:lstStyle/>
+          <a:p>
+            <a:pPr algn="l" indent="0" marL="0">
+              <a:buNone/>
+            </a:pPr>
+            <a:r>
+              <a:rPr lang="en-US" sz="3000" b="1" dirty="0">
+                <a:solidFill>
+                  <a:srgbClr val="990011"/>
+                </a:solidFill>
+                <a:latin typeface="Times New Roman" pitchFamily="34" charset="0"/>
+                <a:ea typeface="Times New Roman" pitchFamily="34" charset="-122"/>
+                <a:cs typeface="Times New Roman" pitchFamily="34" charset="-120"/>
+              </a:rPr>
+              <a:t>B) Impacts on the Natural Environment</a:t>
+            </a:r>
+            <a:endParaRPr lang="en-US" sz="3000" dirty="0"/>
+          </a:p>
+        </p:txBody>
+      </p:sp>
+      <p:sp>
+        <p:nvSpPr>
+          <p:cNvPr id="5" name="Text 3"/>
+          <p:cNvSpPr/>
+          <p:nvPr/>
+        </p:nvSpPr>
+        <p:spPr>
+          <a:xfrm>
+            <a:off x="365760" y="2240280"/>
+            <a:ext cx="4846320" cy="4160520"/>
+          </a:xfrm>
+          <a:prstGeom prst="rect">
+            <a:avLst/>
+          </a:prstGeom>
+          <a:noFill/>
+          <a:ln/>
+        </p:spPr>
+        <p:txBody>
+          <a:bodyPr wrap="square" lIns="0" tIns="0" rIns="0" bIns="0" rtlCol="0" anchor="t"/>
+          <a:lstStyle/>
+          <a:p>
+            <a:pPr algn="l" indent="0" marL="0">
+              <a:spcAft>
+                <a:spcPts val="800"/>
+              </a:spcAft>
+              <a:buNone/>
+            </a:pPr>
+            <a:r>
+              <a:rPr lang="en-US" sz="3600" i="1" dirty="0">
+                <a:solidFill>
+                  <a:srgbClr val="111111"/>
+                </a:solidFill>
+                <a:latin typeface="Times New Roman" pitchFamily="34" charset="0"/>
+                <a:ea typeface="Times New Roman" pitchFamily="34" charset="-122"/>
+                <a:cs typeface="Times New Roman" pitchFamily="34" charset="-120"/>
+              </a:rPr>
+              <a:t>The Moon affects the natural environment as follows:</a:t>
+            </a:r>
+            <a:endParaRPr lang="en-US" sz="3600" dirty="0"/>
+          </a:p>
+          <a:p>
+            <a:pPr algn="l" indent="0" marL="0">
+              <a:spcAft>
+                <a:spcPts val="800"/>
+              </a:spcAft>
+              <a:buNone/>
+            </a:pPr>
+            <a:r>
+              <a:rPr lang="en-US" sz="3600" b="1" dirty="0">
+                <a:solidFill>
+                  <a:srgbClr val="111111"/>
+                </a:solidFill>
+                <a:latin typeface="Times New Roman" pitchFamily="34" charset="0"/>
+                <a:ea typeface="Times New Roman" pitchFamily="34" charset="-122"/>
+                <a:cs typeface="Times New Roman" pitchFamily="34" charset="-120"/>
+              </a:rPr>
+              <a:t>Tides: </a:t>
+            </a:r>
+            <a:pPr algn="l" indent="0" marL="0">
+              <a:spcAft>
+                <a:spcPts val="800"/>
+              </a:spcAft>
+              <a:buNone/>
+            </a:pPr>
+            <a:r>
+              <a:rPr lang="en-US" sz="3600" dirty="0">
+                <a:solidFill>
+                  <a:srgbClr val="111111"/>
+                </a:solidFill>
+                <a:latin typeface="Times New Roman" pitchFamily="34" charset="0"/>
+                <a:ea typeface="Times New Roman" pitchFamily="34" charset="-122"/>
+                <a:cs typeface="Times New Roman" pitchFamily="34" charset="-120"/>
+              </a:rPr>
+              <a:t>The pull of the Moon makes the sea rise and fall twice a day.</a:t>
+            </a:r>
+            <a:endParaRPr lang="en-US" sz="3600" dirty="0"/>
           </a:p>
         </p:txBody>
       </p:sp>
       <p:pic>
         <p:nvPicPr>
-          <p:cNvPr id="3" name="Image 0" descr="/home/claude/f4/img/minesec_sheet.png">    </p:cNvPr>
+          <p:cNvPr id="6" name="Image 0" descr="/home/claude/f4/img/tides.png">    </p:cNvPr>
           <p:cNvPicPr>
             <a:picLocks noChangeAspect="1"/>
           </p:cNvPicPr>
@@ -15180,8 +16679,8 @@
         </p:blipFill>
         <p:spPr>
           <a:xfrm>
-            <a:off x="0" y="658368"/>
-            <a:ext cx="2468880" cy="5833872"/>
+            <a:off x="5349240" y="2342247"/>
+            <a:ext cx="6659575" cy="3151914"/>
           </a:xfrm>
           <a:prstGeom prst="rect">
             <a:avLst/>
@@ -15190,14 +16689,14 @@
       </p:pic>
       <p:sp>
         <p:nvSpPr>
-          <p:cNvPr id="4" name="Text 1"/>
+          <p:cNvPr id="7" name="Text 4"/>
           <p:cNvSpPr/>
           <p:nvPr/>
         </p:nvSpPr>
         <p:spPr>
           <a:xfrm>
-            <a:off x="2697480" y="1005840"/>
-            <a:ext cx="9174175" cy="731520"/>
+            <a:off x="5349240" y="6089904"/>
+            <a:ext cx="6659575" cy="347472"/>
           </a:xfrm>
           <a:prstGeom prst="rect">
             <a:avLst/>
@@ -15206,134 +16705,24 @@
           <a:ln/>
         </p:spPr>
         <p:txBody>
-          <a:bodyPr wrap="square" lIns="0" tIns="0" rIns="0" bIns="0" rtlCol="0" anchor="ctr">
-            <a:normAutofit/>
-          </a:bodyPr>
+          <a:bodyPr wrap="square" lIns="0" tIns="0" rIns="0" bIns="0" rtlCol="0" anchor="ctr"/>
           <a:lstStyle/>
           <a:p>
             <a:pPr algn="ctr" indent="0" marL="0">
               <a:buNone/>
             </a:pPr>
             <a:r>
-              <a:rPr lang="en-US" sz="3600" b="1" dirty="0">
-                <a:solidFill>
-                  <a:srgbClr val="990011"/>
+              <a:rPr lang="en-US" sz="1600" i="1" dirty="0">
+                <a:solidFill>
+                  <a:srgbClr val="555555"/>
                 </a:solidFill>
                 <a:latin typeface="Times New Roman" pitchFamily="34" charset="0"/>
                 <a:ea typeface="Times New Roman" pitchFamily="34" charset="-122"/>
                 <a:cs typeface="Times New Roman" pitchFamily="34" charset="-120"/>
               </a:rPr>
-              <a:t>Remediation</a:t>
-            </a:r>
-            <a:endParaRPr lang="en-US" sz="3600" dirty="0"/>
-          </a:p>
-        </p:txBody>
-      </p:sp>
-      <p:sp>
-        <p:nvSpPr>
-          <p:cNvPr id="5" name="Text 2"/>
-          <p:cNvSpPr/>
-          <p:nvPr/>
-        </p:nvSpPr>
-        <p:spPr>
-          <a:xfrm>
-            <a:off x="2697480" y="1783080"/>
-            <a:ext cx="9174175" cy="4663440"/>
-          </a:xfrm>
-          <a:prstGeom prst="rect">
-            <a:avLst/>
-          </a:prstGeom>
-          <a:noFill/>
-          <a:ln/>
-        </p:spPr>
-        <p:txBody>
-          <a:bodyPr wrap="square" lIns="0" tIns="0" rIns="0" bIns="0" rtlCol="0" anchor="t"/>
-          <a:lstStyle/>
-          <a:p>
-            <a:pPr algn="l" indent="0" marL="0">
-              <a:spcAft>
-                <a:spcPts val="800"/>
-              </a:spcAft>
-              <a:buNone/>
-            </a:pPr>
-            <a:r>
-              <a:rPr lang="en-US" sz="4000" b="1" dirty="0">
-                <a:solidFill>
-                  <a:srgbClr val="111111"/>
-                </a:solidFill>
-                <a:latin typeface="Times New Roman" pitchFamily="34" charset="0"/>
-                <a:ea typeface="Times New Roman" pitchFamily="34" charset="-122"/>
-                <a:cs typeface="Times New Roman" pitchFamily="34" charset="-120"/>
-              </a:rPr>
-              <a:t>Fill in the blanks:</a:t>
-            </a:r>
-            <a:endParaRPr lang="en-US" sz="4000" dirty="0"/>
-          </a:p>
-          <a:p>
-            <a:pPr algn="l" marL="342900" indent="-342900">
-              <a:spcAft>
-                <a:spcPts val="800"/>
-              </a:spcAft>
-              <a:buSzPct val="100000"/>
-              <a:buFont typeface="+mj-lt"/>
-              <a:buAutoNum type="arabicPeriod" startAt="1"/>
-            </a:pPr>
-            <a:r>
-              <a:rPr lang="en-US" sz="4000" dirty="0">
-                <a:solidFill>
-                  <a:srgbClr val="111111"/>
-                </a:solidFill>
-                <a:latin typeface="Times New Roman" pitchFamily="34" charset="0"/>
-                <a:ea typeface="Times New Roman" pitchFamily="34" charset="-122"/>
-                <a:cs typeface="Times New Roman" pitchFamily="34" charset="-120"/>
-              </a:rPr>
-              <a:t>Our galaxy is called the ______ Way.</a:t>
-            </a:r>
-            <a:endParaRPr lang="en-US" sz="4000" dirty="0"/>
-          </a:p>
-          <a:p>
-            <a:pPr algn="l" marL="342900" indent="-342900">
-              <a:spcAft>
-                <a:spcPts val="800"/>
-              </a:spcAft>
-              <a:buSzPct val="100000"/>
-              <a:buFont typeface="+mj-lt"/>
-              <a:buAutoNum type="arabicPeriod" startAt="1"/>
-            </a:pPr>
-            <a:r>
-              <a:rPr lang="en-US" sz="4000" dirty="0">
-                <a:solidFill>
-                  <a:srgbClr val="111111"/>
-                </a:solidFill>
-                <a:latin typeface="Times New Roman" pitchFamily="34" charset="0"/>
-                <a:ea typeface="Times New Roman" pitchFamily="34" charset="-122"/>
-                <a:cs typeface="Times New Roman" pitchFamily="34" charset="-120"/>
-              </a:rPr>
-              <a:t>When we see the whole Moon, it is the ______ Moon.</a:t>
-            </a:r>
-            <a:endParaRPr lang="en-US" sz="4000" dirty="0"/>
-          </a:p>
-          <a:p>
-            <a:pPr algn="l" marL="342900" indent="-342900">
-              <a:spcAft>
-                <a:spcPts val="800"/>
-              </a:spcAft>
-              <a:buSzPct val="100000"/>
-              <a:buFont typeface="+mj-lt"/>
-              <a:buAutoNum type="arabicPeriod" startAt="1"/>
-            </a:pPr>
-            <a:r>
-              <a:rPr lang="en-US" sz="4000" dirty="0">
-                <a:solidFill>
-                  <a:srgbClr val="111111"/>
-                </a:solidFill>
-                <a:latin typeface="Times New Roman" pitchFamily="34" charset="0"/>
-                <a:ea typeface="Times New Roman" pitchFamily="34" charset="-122"/>
-                <a:cs typeface="Times New Roman" pitchFamily="34" charset="-120"/>
-              </a:rPr>
-              <a:t>The rise and fall of the sea are called ______.</a:t>
-            </a:r>
-            <a:endParaRPr lang="en-US" sz="4000" dirty="0"/>
+              <a:t>Illustration: how the Moon causes tides</a:t>
+            </a:r>
+            <a:endParaRPr lang="en-US" sz="1600" dirty="0"/>
           </a:p>
         </p:txBody>
       </p:sp>
@@ -15443,7 +16832,7 @@
                 <a:ea typeface="Calibri" pitchFamily="34" charset="-122"/>
                 <a:cs typeface="Calibri" pitchFamily="34" charset="-120"/>
               </a:rPr>
-              <a:t>HOMEWORK</a:t>
+              <a:t>BOARD SUMMARY</a:t>
             </a:r>
             <a:endParaRPr lang="en-US" sz="1400" dirty="0"/>
           </a:p>
@@ -15508,7 +16897,7 @@
                 <a:ea typeface="Times New Roman" pitchFamily="34" charset="-122"/>
                 <a:cs typeface="Times New Roman" pitchFamily="34" charset="-120"/>
               </a:rPr>
-              <a:t>Homework</a:t>
+              <a:t>2. The Moon, Satellite of the Earth</a:t>
             </a:r>
             <a:endParaRPr lang="en-US" sz="3600" dirty="0"/>
           </a:p>
@@ -15522,8 +16911,47 @@
         </p:nvSpPr>
         <p:spPr>
           <a:xfrm>
-            <a:off x="5349240" y="1783080"/>
-            <a:ext cx="6522415" cy="4663440"/>
+            <a:off x="5349240" y="1737360"/>
+            <a:ext cx="6522415" cy="457200"/>
+          </a:xfrm>
+          <a:prstGeom prst="rect">
+            <a:avLst/>
+          </a:prstGeom>
+          <a:noFill/>
+          <a:ln/>
+        </p:spPr>
+        <p:txBody>
+          <a:bodyPr wrap="square" lIns="0" tIns="0" rIns="0" bIns="0" rtlCol="0" anchor="ctr"/>
+          <a:lstStyle/>
+          <a:p>
+            <a:pPr algn="l" indent="0" marL="0">
+              <a:buNone/>
+            </a:pPr>
+            <a:r>
+              <a:rPr lang="en-US" sz="2700" b="1" dirty="0">
+                <a:solidFill>
+                  <a:srgbClr val="990011"/>
+                </a:solidFill>
+                <a:latin typeface="Times New Roman" pitchFamily="34" charset="0"/>
+                <a:ea typeface="Times New Roman" pitchFamily="34" charset="-122"/>
+                <a:cs typeface="Times New Roman" pitchFamily="34" charset="-120"/>
+              </a:rPr>
+              <a:t>B) Impacts on the Natural Environment</a:t>
+            </a:r>
+            <a:endParaRPr lang="en-US" sz="2700" dirty="0"/>
+          </a:p>
+        </p:txBody>
+      </p:sp>
+      <p:sp>
+        <p:nvSpPr>
+          <p:cNvPr id="6" name="Text 3"/>
+          <p:cNvSpPr/>
+          <p:nvPr/>
+        </p:nvSpPr>
+        <p:spPr>
+          <a:xfrm>
+            <a:off x="5349240" y="2240280"/>
+            <a:ext cx="6522415" cy="4206240"/>
           </a:xfrm>
           <a:prstGeom prst="rect">
             <a:avLst/>
@@ -15542,7 +16970,7 @@
               <a:buNone/>
             </a:pPr>
             <a:r>
-              <a:rPr lang="en-US" sz="4000" dirty="0">
+              <a:rPr lang="en-US" sz="4000" b="1" dirty="0">
                 <a:solidFill>
                   <a:srgbClr val="111111"/>
                 </a:solidFill>
@@ -15550,7 +16978,24 @@
                 <a:ea typeface="Times New Roman" pitchFamily="34" charset="-122"/>
                 <a:cs typeface="Times New Roman" pitchFamily="34" charset="-120"/>
               </a:rPr>
-              <a:t>Look at a map of Cameroon in your atlas. Find the numbers written on the edges of the map and copy the numbers written near Garoua.</a:t>
+              <a:t>Spring and neap tides: </a:t>
+            </a:r>
+            <a:pPr algn="l" indent="0" marL="0">
+              <a:spcAft>
+                <a:spcPts val="800"/>
+              </a:spcAft>
+              <a:buNone/>
+            </a:pPr>
+            <a:r>
+              <a:rPr lang="en-US" sz="4000" dirty="0">
+                <a:solidFill>
+                  <a:srgbClr val="111111"/>
+                </a:solidFill>
+                <a:latin typeface="Times New Roman" pitchFamily="34" charset="0"/>
+                <a:ea typeface="Times New Roman" pitchFamily="34" charset="-122"/>
+                <a:cs typeface="Times New Roman" pitchFamily="34" charset="-120"/>
+              </a:rPr>
+              <a:t>At new Moon and full Moon, tides are very high (spring tides), and at the quarters they are low (neap tides).</a:t>
             </a:r>
             <a:endParaRPr lang="en-US" sz="4000" dirty="0"/>
           </a:p>
@@ -15662,7 +17107,7 @@
                 <a:ea typeface="Calibri" pitchFamily="34" charset="-122"/>
                 <a:cs typeface="Calibri" pitchFamily="34" charset="-120"/>
               </a:rPr>
-              <a:t>NEXT LESSON</a:t>
+              <a:t>BOARD SUMMARY</a:t>
             </a:r>
             <a:endParaRPr lang="en-US" sz="1400" dirty="0"/>
           </a:p>
@@ -15685,7 +17130,7 @@
         <p:spPr>
           <a:xfrm>
             <a:off x="0" y="658368"/>
-            <a:ext cx="5120640" cy="5833872"/>
+            <a:ext cx="2468880" cy="5833872"/>
           </a:xfrm>
           <a:prstGeom prst="rect">
             <a:avLst/>
@@ -15700,8 +17145,8 @@
         </p:nvSpPr>
         <p:spPr>
           <a:xfrm>
-            <a:off x="5349240" y="1005840"/>
-            <a:ext cx="6522415" cy="731520"/>
+            <a:off x="2697480" y="1005840"/>
+            <a:ext cx="9174175" cy="731520"/>
           </a:xfrm>
           <a:prstGeom prst="rect">
             <a:avLst/>
@@ -15727,7 +17172,7 @@
                 <a:ea typeface="Times New Roman" pitchFamily="34" charset="-122"/>
                 <a:cs typeface="Times New Roman" pitchFamily="34" charset="-120"/>
               </a:rPr>
-              <a:t>Next Lesson</a:t>
+              <a:t>2. The Moon, Satellite of the Earth</a:t>
             </a:r>
             <a:endParaRPr lang="en-US" sz="3600" dirty="0"/>
           </a:p>
@@ -15741,8 +17186,8 @@
         </p:nvSpPr>
         <p:spPr>
           <a:xfrm>
-            <a:off x="5349240" y="1783080"/>
-            <a:ext cx="6522415" cy="4663440"/>
+            <a:off x="2697480" y="1737360"/>
+            <a:ext cx="9174175" cy="457200"/>
           </a:xfrm>
           <a:prstGeom prst="rect">
             <a:avLst/>
@@ -15754,7 +17199,46 @@
           <a:bodyPr wrap="square" lIns="0" tIns="0" rIns="0" bIns="0" rtlCol="0" anchor="ctr"/>
           <a:lstStyle/>
           <a:p>
-            <a:pPr algn="ctr" indent="0" marL="0">
+            <a:pPr algn="l" indent="0" marL="0">
+              <a:buNone/>
+            </a:pPr>
+            <a:r>
+              <a:rPr lang="en-US" sz="2900" b="1" dirty="0">
+                <a:solidFill>
+                  <a:srgbClr val="990011"/>
+                </a:solidFill>
+                <a:latin typeface="Times New Roman" pitchFamily="34" charset="0"/>
+                <a:ea typeface="Times New Roman" pitchFamily="34" charset="-122"/>
+                <a:cs typeface="Times New Roman" pitchFamily="34" charset="-120"/>
+              </a:rPr>
+              <a:t>B) Impacts on the Natural Environment (continued)</a:t>
+            </a:r>
+            <a:endParaRPr lang="en-US" sz="2900" dirty="0"/>
+          </a:p>
+        </p:txBody>
+      </p:sp>
+      <p:sp>
+        <p:nvSpPr>
+          <p:cNvPr id="6" name="Text 3"/>
+          <p:cNvSpPr/>
+          <p:nvPr/>
+        </p:nvSpPr>
+        <p:spPr>
+          <a:xfrm>
+            <a:off x="2697480" y="2240280"/>
+            <a:ext cx="9174175" cy="4206240"/>
+          </a:xfrm>
+          <a:prstGeom prst="rect">
+            <a:avLst/>
+          </a:prstGeom>
+          <a:noFill/>
+          <a:ln/>
+        </p:spPr>
+        <p:txBody>
+          <a:bodyPr wrap="square" lIns="0" tIns="0" rIns="0" bIns="0" rtlCol="0" anchor="t"/>
+          <a:lstStyle/>
+          <a:p>
+            <a:pPr algn="l" indent="0" marL="0">
               <a:spcAft>
                 <a:spcPts val="800"/>
               </a:spcAft>
@@ -15769,27 +17253,61 @@
                 <a:ea typeface="Times New Roman" pitchFamily="34" charset="-122"/>
                 <a:cs typeface="Times New Roman" pitchFamily="34" charset="-120"/>
               </a:rPr>
-              <a:t>Our next lesson will be on:</a:t>
-            </a:r>
-            <a:endParaRPr lang="en-US" sz="4000" dirty="0"/>
-          </a:p>
-          <a:p>
-            <a:pPr algn="ctr" indent="0" marL="0">
+              <a:t>Light at night: </a:t>
+            </a:r>
+            <a:pPr algn="l" indent="0" marL="0">
               <a:spcAft>
                 <a:spcPts val="800"/>
               </a:spcAft>
               <a:buNone/>
             </a:pPr>
             <a:r>
-              <a:rPr lang="en-US" sz="4000" b="1" dirty="0">
-                <a:solidFill>
-                  <a:srgbClr val="990011"/>
+              <a:rPr lang="en-US" sz="4000" dirty="0">
+                <a:solidFill>
+                  <a:srgbClr val="111111"/>
                 </a:solidFill>
                 <a:latin typeface="Times New Roman" pitchFamily="34" charset="0"/>
                 <a:ea typeface="Times New Roman" pitchFamily="34" charset="-122"/>
                 <a:cs typeface="Times New Roman" pitchFamily="34" charset="-120"/>
               </a:rPr>
-              <a:t>Lesson 2: Earth Divisions: Latitudes and Longitudes</a:t>
+              <a:t>The full Moon lights the night, and many animals hunt or move by moonlight.</a:t>
+            </a:r>
+            <a:endParaRPr lang="en-US" sz="4000" dirty="0"/>
+          </a:p>
+          <a:p>
+            <a:pPr algn="l" indent="0" marL="0">
+              <a:spcAft>
+                <a:spcPts val="800"/>
+              </a:spcAft>
+              <a:buNone/>
+            </a:pPr>
+            <a:r>
+              <a:rPr lang="en-US" sz="4000" b="1" dirty="0">
+                <a:solidFill>
+                  <a:srgbClr val="111111"/>
+                </a:solidFill>
+                <a:latin typeface="Times New Roman" pitchFamily="34" charset="0"/>
+                <a:ea typeface="Times New Roman" pitchFamily="34" charset="-122"/>
+                <a:cs typeface="Times New Roman" pitchFamily="34" charset="-120"/>
+              </a:rPr>
+              <a:t>Eclipses: </a:t>
+            </a:r>
+            <a:pPr algn="l" indent="0" marL="0">
+              <a:spcAft>
+                <a:spcPts val="800"/>
+              </a:spcAft>
+              <a:buNone/>
+            </a:pPr>
+            <a:r>
+              <a:rPr lang="en-US" sz="4000" dirty="0">
+                <a:solidFill>
+                  <a:srgbClr val="111111"/>
+                </a:solidFill>
+                <a:latin typeface="Times New Roman" pitchFamily="34" charset="0"/>
+                <a:ea typeface="Times New Roman" pitchFamily="34" charset="-122"/>
+                <a:cs typeface="Times New Roman" pitchFamily="34" charset="-120"/>
+              </a:rPr>
+              <a:t>The Moon can hide the Sun (solar eclipse) or enter the shadow of the Earth (lunar eclipse).</a:t>
             </a:r>
             <a:endParaRPr lang="en-US" sz="4000" dirty="0"/>
           </a:p>
@@ -15901,7 +17419,7 @@
                 <a:ea typeface="Calibri" pitchFamily="34" charset="-122"/>
                 <a:cs typeface="Calibri" pitchFamily="34" charset="-120"/>
               </a:rPr>
-              <a:t>BILINGUAL GAME</a:t>
+              <a:t>BOARD SUMMARY</a:t>
             </a:r>
             <a:endParaRPr lang="en-US" sz="1400" dirty="0"/>
           </a:p>
@@ -15915,8 +17433,8 @@
         </p:nvSpPr>
         <p:spPr>
           <a:xfrm>
-            <a:off x="457200" y="1005840"/>
-            <a:ext cx="11277295" cy="731520"/>
+            <a:off x="365760" y="1005840"/>
+            <a:ext cx="11460175" cy="731520"/>
           </a:xfrm>
           <a:prstGeom prst="rect">
             <a:avLst/>
@@ -15925,7 +17443,9 @@
           <a:ln/>
         </p:spPr>
         <p:txBody>
-          <a:bodyPr wrap="square" lIns="0" tIns="0" rIns="0" bIns="0" rtlCol="0" anchor="ctr"/>
+          <a:bodyPr wrap="square" lIns="0" tIns="0" rIns="0" bIns="0" rtlCol="0" anchor="ctr">
+            <a:normAutofit/>
+          </a:bodyPr>
           <a:lstStyle/>
           <a:p>
             <a:pPr algn="ctr" indent="0" marL="0">
@@ -15940,6 +17460,2765 @@
                 <a:ea typeface="Times New Roman" pitchFamily="34" charset="-122"/>
                 <a:cs typeface="Times New Roman" pitchFamily="34" charset="-120"/>
               </a:rPr>
+              <a:t>2. The Moon, Satellite of the Earth</a:t>
+            </a:r>
+            <a:endParaRPr lang="en-US" sz="3600" dirty="0"/>
+          </a:p>
+        </p:txBody>
+      </p:sp>
+      <p:sp>
+        <p:nvSpPr>
+          <p:cNvPr id="4" name="Text 2"/>
+          <p:cNvSpPr/>
+          <p:nvPr/>
+        </p:nvSpPr>
+        <p:spPr>
+          <a:xfrm>
+            <a:off x="365760" y="1737360"/>
+            <a:ext cx="5120640" cy="457200"/>
+          </a:xfrm>
+          <a:prstGeom prst="rect">
+            <a:avLst/>
+          </a:prstGeom>
+          <a:noFill/>
+          <a:ln/>
+        </p:spPr>
+        <p:txBody>
+          <a:bodyPr wrap="square" lIns="0" tIns="0" rIns="0" bIns="0" rtlCol="0" anchor="ctr">
+            <a:normAutofit/>
+          </a:bodyPr>
+          <a:lstStyle/>
+          <a:p>
+            <a:pPr algn="l" indent="0" marL="0">
+              <a:buNone/>
+            </a:pPr>
+            <a:r>
+              <a:rPr lang="en-US" sz="3000" b="1" dirty="0">
+                <a:solidFill>
+                  <a:srgbClr val="990011"/>
+                </a:solidFill>
+                <a:latin typeface="Times New Roman" pitchFamily="34" charset="0"/>
+                <a:ea typeface="Times New Roman" pitchFamily="34" charset="-122"/>
+                <a:cs typeface="Times New Roman" pitchFamily="34" charset="-120"/>
+              </a:rPr>
+              <a:t>C) Impacts on Human Activities</a:t>
+            </a:r>
+            <a:endParaRPr lang="en-US" sz="3000" dirty="0"/>
+          </a:p>
+        </p:txBody>
+      </p:sp>
+      <p:sp>
+        <p:nvSpPr>
+          <p:cNvPr id="5" name="Text 3"/>
+          <p:cNvSpPr/>
+          <p:nvPr/>
+        </p:nvSpPr>
+        <p:spPr>
+          <a:xfrm>
+            <a:off x="365760" y="2240280"/>
+            <a:ext cx="4846320" cy="4160520"/>
+          </a:xfrm>
+          <a:prstGeom prst="rect">
+            <a:avLst/>
+          </a:prstGeom>
+          <a:noFill/>
+          <a:ln/>
+        </p:spPr>
+        <p:txBody>
+          <a:bodyPr wrap="square" lIns="0" tIns="0" rIns="0" bIns="0" rtlCol="0" anchor="t"/>
+          <a:lstStyle/>
+          <a:p>
+            <a:pPr algn="l" indent="0" marL="0">
+              <a:spcAft>
+                <a:spcPts val="800"/>
+              </a:spcAft>
+              <a:buNone/>
+            </a:pPr>
+            <a:r>
+              <a:rPr lang="en-US" sz="3200" i="1" dirty="0">
+                <a:solidFill>
+                  <a:srgbClr val="111111"/>
+                </a:solidFill>
+                <a:latin typeface="Times New Roman" pitchFamily="34" charset="0"/>
+                <a:ea typeface="Times New Roman" pitchFamily="34" charset="-122"/>
+                <a:cs typeface="Times New Roman" pitchFamily="34" charset="-120"/>
+              </a:rPr>
+              <a:t>The Moon affects human socio-economic activities as follows:</a:t>
+            </a:r>
+            <a:endParaRPr lang="en-US" sz="3200" dirty="0"/>
+          </a:p>
+          <a:p>
+            <a:pPr algn="l" indent="0" marL="0">
+              <a:spcAft>
+                <a:spcPts val="800"/>
+              </a:spcAft>
+              <a:buNone/>
+            </a:pPr>
+            <a:r>
+              <a:rPr lang="en-US" sz="3200" b="1" dirty="0">
+                <a:solidFill>
+                  <a:srgbClr val="111111"/>
+                </a:solidFill>
+                <a:latin typeface="Times New Roman" pitchFamily="34" charset="0"/>
+                <a:ea typeface="Times New Roman" pitchFamily="34" charset="-122"/>
+                <a:cs typeface="Times New Roman" pitchFamily="34" charset="-120"/>
+              </a:rPr>
+              <a:t>Fishing: </a:t>
+            </a:r>
+            <a:pPr algn="l" indent="0" marL="0">
+              <a:spcAft>
+                <a:spcPts val="800"/>
+              </a:spcAft>
+              <a:buNone/>
+            </a:pPr>
+            <a:r>
+              <a:rPr lang="en-US" sz="3200" dirty="0">
+                <a:solidFill>
+                  <a:srgbClr val="111111"/>
+                </a:solidFill>
+                <a:latin typeface="Times New Roman" pitchFamily="34" charset="0"/>
+                <a:ea typeface="Times New Roman" pitchFamily="34" charset="-122"/>
+                <a:cs typeface="Times New Roman" pitchFamily="34" charset="-120"/>
+              </a:rPr>
+              <a:t>Fishermen go out and come back with the tides, and some fish at night with the full Moon.</a:t>
+            </a:r>
+            <a:endParaRPr lang="en-US" sz="3200" dirty="0"/>
+          </a:p>
+        </p:txBody>
+      </p:sp>
+      <p:pic>
+        <p:nvPicPr>
+          <p:cNvPr id="6" name="Image 0" descr="/home/claude/f4/img/v2/f4_lowtide.jpg">    </p:cNvPr>
+          <p:cNvPicPr>
+            <a:picLocks noChangeAspect="1"/>
+          </p:cNvPicPr>
+          <p:nvPr/>
+        </p:nvPicPr>
+        <p:blipFill>
+          <a:blip r:embed="rId1"/>
+          <a:stretch>
+            <a:fillRect/>
+          </a:stretch>
+        </p:blipFill>
+        <p:spPr>
+          <a:xfrm>
+            <a:off x="5349240" y="2071212"/>
+            <a:ext cx="6659575" cy="3693983"/>
+          </a:xfrm>
+          <a:prstGeom prst="rect">
+            <a:avLst/>
+          </a:prstGeom>
+        </p:spPr>
+      </p:pic>
+      <p:sp>
+        <p:nvSpPr>
+          <p:cNvPr id="7" name="Text 4"/>
+          <p:cNvSpPr/>
+          <p:nvPr/>
+        </p:nvSpPr>
+        <p:spPr>
+          <a:xfrm>
+            <a:off x="5349240" y="6089904"/>
+            <a:ext cx="6659575" cy="347472"/>
+          </a:xfrm>
+          <a:prstGeom prst="rect">
+            <a:avLst/>
+          </a:prstGeom>
+          <a:noFill/>
+          <a:ln/>
+        </p:spPr>
+        <p:txBody>
+          <a:bodyPr wrap="square" lIns="0" tIns="0" rIns="0" bIns="0" rtlCol="0" anchor="ctr"/>
+          <a:lstStyle/>
+          <a:p>
+            <a:pPr algn="ctr" indent="0" marL="0">
+              <a:buNone/>
+            </a:pPr>
+            <a:r>
+              <a:rPr lang="en-US" sz="1600" i="1" dirty="0">
+                <a:solidFill>
+                  <a:srgbClr val="555555"/>
+                </a:solidFill>
+                <a:latin typeface="Times New Roman" pitchFamily="34" charset="0"/>
+                <a:ea typeface="Times New Roman" pitchFamily="34" charset="-122"/>
+                <a:cs typeface="Times New Roman" pitchFamily="34" charset="-120"/>
+              </a:rPr>
+              <a:t>Illustration: boats at low tide</a:t>
+            </a:r>
+            <a:endParaRPr lang="en-US" sz="1600" dirty="0"/>
+          </a:p>
+        </p:txBody>
+      </p:sp>
+      <p:sp>
+        <p:nvSpPr>
+          <p:cNvPr id="25" name="Slide Number Placeholder 0"/>
+          <p:cNvSpPr>
+            <a:spLocks noGrp="1"/>
+          </p:cNvSpPr>
+          <p:nvPr>
+            <p:ph type="sldNum" sz="quarter" idx="4294967295"/>
+          </p:nvPr>
+        </p:nvSpPr>
+        <p:spPr>
+          <a:xfrm>
+            <a:off x="27432" y="91440"/>
+            <a:ext cx="585216" cy="475488"/>
+          </a:xfrm>
+          <a:prstGeom prst="rect">
+            <a:avLst/>
+          </a:prstGeom>
+          <a:extLst>
+            <a:ext uri="{C572A759-6A51-4108-AA02-DFA0A04FC94B}">
+              <ma14:wrappingTextBoxFlag xmlns:ma14="http://schemas.microsoft.com/office/mac/drawingml/2011/main" val="0"/>
+            </a:ext>
+          </a:extLst>
+        </p:spPr>
+        <p:txBody>
+          <a:bodyPr/>
+          <a:lstStyle>
+            <a:lvl1pPr>
+              <a:defRPr sz="2000">
+                <a:solidFill>
+                  <a:srgbClr val="FFFFFF"/>
+                </a:solidFill>
+                <a:latin typeface="Calibri"/>
+                <a:ea typeface="Calibri"/>
+                <a:cs typeface="Calibri"/>
+              </a:defRPr>
+            </a:lvl1pPr>
+          </a:lstStyle>
+          <a:p>
+            <a:pPr algn="ctr"/>
+            <a:fld id="{F7021451-1387-4CA6-816F-3879F97B5CBC}" type="slidenum">
+              <a:rPr b="1" lang="en-US"/>
+              <a:t>44</a:t>
+            </a:fld>
+            <a:endParaRPr lang="en-US"/>
+          </a:p>
+        </p:txBody>
+      </p:sp>
+    </p:spTree>
+  </p:cSld>
+  <p:clrMapOvr>
+    <a:masterClrMapping/>
+  </p:clrMapOvr>
+</p:sld>
+</file>
+
+<file path=ppt/slides/slide45.xml><?xml version="1.0" encoding="utf-8"?>
+<p:sld xmlns:a="http://schemas.openxmlformats.org/drawingml/2006/main" xmlns:r="http://schemas.openxmlformats.org/officeDocument/2006/relationships" xmlns:p="http://schemas.openxmlformats.org/presentationml/2006/main">
+  <p:cSld name="Slide 45">
+    <p:spTree>
+      <p:nvGrpSpPr>
+        <p:cNvPr id="1" name=""/>
+        <p:cNvGrpSpPr/>
+        <p:nvPr/>
+      </p:nvGrpSpPr>
+      <p:grpSpPr>
+        <a:xfrm>
+          <a:off x="0" y="0"/>
+          <a:ext cx="0" cy="0"/>
+          <a:chOff x="0" y="0"/>
+          <a:chExt cx="0" cy="0"/>
+        </a:xfrm>
+      </p:grpSpPr>
+      <p:sp>
+        <p:nvSpPr>
+          <p:cNvPr id="2" name="Text 0"/>
+          <p:cNvSpPr/>
+          <p:nvPr/>
+        </p:nvSpPr>
+        <p:spPr>
+          <a:xfrm>
+            <a:off x="457200" y="713232"/>
+            <a:ext cx="11368735" cy="274320"/>
+          </a:xfrm>
+          <a:prstGeom prst="rect">
+            <a:avLst/>
+          </a:prstGeom>
+          <a:noFill/>
+          <a:ln/>
+        </p:spPr>
+        <p:txBody>
+          <a:bodyPr wrap="square" lIns="0" tIns="0" rIns="0" bIns="0" rtlCol="0" anchor="ctr"/>
+          <a:lstStyle/>
+          <a:p>
+            <a:pPr algn="r" indent="0" marL="0">
+              <a:buNone/>
+            </a:pPr>
+            <a:r>
+              <a:rPr lang="en-US" sz="1400" b="1" dirty="0">
+                <a:solidFill>
+                  <a:srgbClr val="1C3F6E"/>
+                </a:solidFill>
+                <a:latin typeface="Calibri" pitchFamily="34" charset="0"/>
+                <a:ea typeface="Calibri" pitchFamily="34" charset="-122"/>
+                <a:cs typeface="Calibri" pitchFamily="34" charset="-120"/>
+              </a:rPr>
+              <a:t>BOARD SUMMARY</a:t>
+            </a:r>
+            <a:endParaRPr lang="en-US" sz="1400" dirty="0"/>
+          </a:p>
+        </p:txBody>
+      </p:sp>
+      <p:pic>
+        <p:nvPicPr>
+          <p:cNvPr id="3" name="Image 0" descr="/home/claude/f4/img/minesec_sheet.png">    </p:cNvPr>
+          <p:cNvPicPr>
+            <a:picLocks noChangeAspect="1"/>
+          </p:cNvPicPr>
+          <p:nvPr/>
+        </p:nvPicPr>
+        <p:blipFill>
+          <a:blip r:embed="rId1"/>
+          <a:stretch>
+            <a:fillRect/>
+          </a:stretch>
+        </p:blipFill>
+        <p:spPr>
+          <a:xfrm>
+            <a:off x="0" y="658368"/>
+            <a:ext cx="2468880" cy="5833872"/>
+          </a:xfrm>
+          <a:prstGeom prst="rect">
+            <a:avLst/>
+          </a:prstGeom>
+        </p:spPr>
+      </p:pic>
+      <p:sp>
+        <p:nvSpPr>
+          <p:cNvPr id="4" name="Text 1"/>
+          <p:cNvSpPr/>
+          <p:nvPr/>
+        </p:nvSpPr>
+        <p:spPr>
+          <a:xfrm>
+            <a:off x="2697480" y="1005840"/>
+            <a:ext cx="9174175" cy="731520"/>
+          </a:xfrm>
+          <a:prstGeom prst="rect">
+            <a:avLst/>
+          </a:prstGeom>
+          <a:noFill/>
+          <a:ln/>
+        </p:spPr>
+        <p:txBody>
+          <a:bodyPr wrap="square" lIns="0" tIns="0" rIns="0" bIns="0" rtlCol="0" anchor="ctr">
+            <a:normAutofit/>
+          </a:bodyPr>
+          <a:lstStyle/>
+          <a:p>
+            <a:pPr algn="ctr" indent="0" marL="0">
+              <a:buNone/>
+            </a:pPr>
+            <a:r>
+              <a:rPr lang="en-US" sz="3600" b="1" dirty="0">
+                <a:solidFill>
+                  <a:srgbClr val="990011"/>
+                </a:solidFill>
+                <a:latin typeface="Times New Roman" pitchFamily="34" charset="0"/>
+                <a:ea typeface="Times New Roman" pitchFamily="34" charset="-122"/>
+                <a:cs typeface="Times New Roman" pitchFamily="34" charset="-120"/>
+              </a:rPr>
+              <a:t>2. The Moon, Satellite of the Earth</a:t>
+            </a:r>
+            <a:endParaRPr lang="en-US" sz="3600" dirty="0"/>
+          </a:p>
+        </p:txBody>
+      </p:sp>
+      <p:sp>
+        <p:nvSpPr>
+          <p:cNvPr id="5" name="Text 2"/>
+          <p:cNvSpPr/>
+          <p:nvPr/>
+        </p:nvSpPr>
+        <p:spPr>
+          <a:xfrm>
+            <a:off x="2697480" y="1737360"/>
+            <a:ext cx="9174175" cy="457200"/>
+          </a:xfrm>
+          <a:prstGeom prst="rect">
+            <a:avLst/>
+          </a:prstGeom>
+          <a:noFill/>
+          <a:ln/>
+        </p:spPr>
+        <p:txBody>
+          <a:bodyPr wrap="square" lIns="0" tIns="0" rIns="0" bIns="0" rtlCol="0" anchor="ctr"/>
+          <a:lstStyle/>
+          <a:p>
+            <a:pPr algn="l" indent="0" marL="0">
+              <a:buNone/>
+            </a:pPr>
+            <a:r>
+              <a:rPr lang="en-US" sz="3200" b="1" dirty="0">
+                <a:solidFill>
+                  <a:srgbClr val="990011"/>
+                </a:solidFill>
+                <a:latin typeface="Times New Roman" pitchFamily="34" charset="0"/>
+                <a:ea typeface="Times New Roman" pitchFamily="34" charset="-122"/>
+                <a:cs typeface="Times New Roman" pitchFamily="34" charset="-120"/>
+              </a:rPr>
+              <a:t>C) Impacts on Human Activities</a:t>
+            </a:r>
+            <a:endParaRPr lang="en-US" sz="3200" dirty="0"/>
+          </a:p>
+        </p:txBody>
+      </p:sp>
+      <p:sp>
+        <p:nvSpPr>
+          <p:cNvPr id="6" name="Text 3"/>
+          <p:cNvSpPr/>
+          <p:nvPr/>
+        </p:nvSpPr>
+        <p:spPr>
+          <a:xfrm>
+            <a:off x="2697480" y="2240280"/>
+            <a:ext cx="9174175" cy="4206240"/>
+          </a:xfrm>
+          <a:prstGeom prst="rect">
+            <a:avLst/>
+          </a:prstGeom>
+          <a:noFill/>
+          <a:ln/>
+        </p:spPr>
+        <p:txBody>
+          <a:bodyPr wrap="square" lIns="0" tIns="0" rIns="0" bIns="0" rtlCol="0" anchor="t"/>
+          <a:lstStyle/>
+          <a:p>
+            <a:pPr algn="l" indent="0" marL="0">
+              <a:spcAft>
+                <a:spcPts val="800"/>
+              </a:spcAft>
+              <a:buNone/>
+            </a:pPr>
+            <a:r>
+              <a:rPr lang="en-US" sz="4000" b="1" dirty="0">
+                <a:solidFill>
+                  <a:srgbClr val="111111"/>
+                </a:solidFill>
+                <a:latin typeface="Times New Roman" pitchFamily="34" charset="0"/>
+                <a:ea typeface="Times New Roman" pitchFamily="34" charset="-122"/>
+                <a:cs typeface="Times New Roman" pitchFamily="34" charset="-120"/>
+              </a:rPr>
+              <a:t>Navigation and ports: </a:t>
+            </a:r>
+            <a:pPr algn="l" indent="0" marL="0">
+              <a:spcAft>
+                <a:spcPts val="800"/>
+              </a:spcAft>
+              <a:buNone/>
+            </a:pPr>
+            <a:r>
+              <a:rPr lang="en-US" sz="4000" dirty="0">
+                <a:solidFill>
+                  <a:srgbClr val="111111"/>
+                </a:solidFill>
+                <a:latin typeface="Times New Roman" pitchFamily="34" charset="0"/>
+                <a:ea typeface="Times New Roman" pitchFamily="34" charset="-122"/>
+                <a:cs typeface="Times New Roman" pitchFamily="34" charset="-120"/>
+              </a:rPr>
+              <a:t>Big ships enter shallow ports such as Douala at high tide.</a:t>
+            </a:r>
+            <a:endParaRPr lang="en-US" sz="4000" dirty="0"/>
+          </a:p>
+          <a:p>
+            <a:pPr algn="l" indent="0" marL="0">
+              <a:spcAft>
+                <a:spcPts val="800"/>
+              </a:spcAft>
+              <a:buNone/>
+            </a:pPr>
+            <a:r>
+              <a:rPr lang="en-US" sz="4000" b="1" dirty="0">
+                <a:solidFill>
+                  <a:srgbClr val="111111"/>
+                </a:solidFill>
+                <a:latin typeface="Times New Roman" pitchFamily="34" charset="0"/>
+                <a:ea typeface="Times New Roman" pitchFamily="34" charset="-122"/>
+                <a:cs typeface="Times New Roman" pitchFamily="34" charset="-120"/>
+              </a:rPr>
+              <a:t>Calendars and feasts: </a:t>
+            </a:r>
+            <a:pPr algn="l" indent="0" marL="0">
+              <a:spcAft>
+                <a:spcPts val="800"/>
+              </a:spcAft>
+              <a:buNone/>
+            </a:pPr>
+            <a:r>
+              <a:rPr lang="en-US" sz="4000" dirty="0">
+                <a:solidFill>
+                  <a:srgbClr val="111111"/>
+                </a:solidFill>
+                <a:latin typeface="Times New Roman" pitchFamily="34" charset="0"/>
+                <a:ea typeface="Times New Roman" pitchFamily="34" charset="-122"/>
+                <a:cs typeface="Times New Roman" pitchFamily="34" charset="-120"/>
+              </a:rPr>
+              <a:t>Some calendars and feasts, such as Ramadan, follow the phases of the Moon.</a:t>
+            </a:r>
+            <a:endParaRPr lang="en-US" sz="4000" dirty="0"/>
+          </a:p>
+        </p:txBody>
+      </p:sp>
+      <p:sp>
+        <p:nvSpPr>
+          <p:cNvPr id="25" name="Slide Number Placeholder 0"/>
+          <p:cNvSpPr>
+            <a:spLocks noGrp="1"/>
+          </p:cNvSpPr>
+          <p:nvPr>
+            <p:ph type="sldNum" sz="quarter" idx="4294967295"/>
+          </p:nvPr>
+        </p:nvSpPr>
+        <p:spPr>
+          <a:xfrm>
+            <a:off x="27432" y="91440"/>
+            <a:ext cx="585216" cy="475488"/>
+          </a:xfrm>
+          <a:prstGeom prst="rect">
+            <a:avLst/>
+          </a:prstGeom>
+          <a:extLst>
+            <a:ext uri="{C572A759-6A51-4108-AA02-DFA0A04FC94B}">
+              <ma14:wrappingTextBoxFlag xmlns:ma14="http://schemas.microsoft.com/office/mac/drawingml/2011/main" val="0"/>
+            </a:ext>
+          </a:extLst>
+        </p:spPr>
+        <p:txBody>
+          <a:bodyPr/>
+          <a:lstStyle>
+            <a:lvl1pPr>
+              <a:defRPr sz="2000">
+                <a:solidFill>
+                  <a:srgbClr val="FFFFFF"/>
+                </a:solidFill>
+                <a:latin typeface="Calibri"/>
+                <a:ea typeface="Calibri"/>
+                <a:cs typeface="Calibri"/>
+              </a:defRPr>
+            </a:lvl1pPr>
+          </a:lstStyle>
+          <a:p>
+            <a:pPr algn="ctr"/>
+            <a:fld id="{F7021451-1387-4CA6-816F-3879F97B5CBC}" type="slidenum">
+              <a:rPr b="1" lang="en-US"/>
+              <a:t>45</a:t>
+            </a:fld>
+            <a:endParaRPr lang="en-US"/>
+          </a:p>
+        </p:txBody>
+      </p:sp>
+    </p:spTree>
+  </p:cSld>
+  <p:clrMapOvr>
+    <a:masterClrMapping/>
+  </p:clrMapOvr>
+</p:sld>
+</file>
+
+<file path=ppt/slides/slide46.xml><?xml version="1.0" encoding="utf-8"?>
+<p:sld xmlns:a="http://schemas.openxmlformats.org/drawingml/2006/main" xmlns:r="http://schemas.openxmlformats.org/officeDocument/2006/relationships" xmlns:p="http://schemas.openxmlformats.org/presentationml/2006/main">
+  <p:cSld name="Slide 46">
+    <p:spTree>
+      <p:nvGrpSpPr>
+        <p:cNvPr id="1" name=""/>
+        <p:cNvGrpSpPr/>
+        <p:nvPr/>
+      </p:nvGrpSpPr>
+      <p:grpSpPr>
+        <a:xfrm>
+          <a:off x="0" y="0"/>
+          <a:ext cx="0" cy="0"/>
+          <a:chOff x="0" y="0"/>
+          <a:chExt cx="0" cy="0"/>
+        </a:xfrm>
+      </p:grpSpPr>
+      <p:sp>
+        <p:nvSpPr>
+          <p:cNvPr id="2" name="Text 0"/>
+          <p:cNvSpPr/>
+          <p:nvPr/>
+        </p:nvSpPr>
+        <p:spPr>
+          <a:xfrm>
+            <a:off x="457200" y="713232"/>
+            <a:ext cx="11368735" cy="274320"/>
+          </a:xfrm>
+          <a:prstGeom prst="rect">
+            <a:avLst/>
+          </a:prstGeom>
+          <a:noFill/>
+          <a:ln/>
+        </p:spPr>
+        <p:txBody>
+          <a:bodyPr wrap="square" lIns="0" tIns="0" rIns="0" bIns="0" rtlCol="0" anchor="ctr"/>
+          <a:lstStyle/>
+          <a:p>
+            <a:pPr algn="r" indent="0" marL="0">
+              <a:buNone/>
+            </a:pPr>
+            <a:r>
+              <a:rPr lang="en-US" sz="1400" b="1" dirty="0">
+                <a:solidFill>
+                  <a:srgbClr val="1C3F6E"/>
+                </a:solidFill>
+                <a:latin typeface="Calibri" pitchFamily="34" charset="0"/>
+                <a:ea typeface="Calibri" pitchFamily="34" charset="-122"/>
+                <a:cs typeface="Calibri" pitchFamily="34" charset="-120"/>
+              </a:rPr>
+              <a:t>BOARD SUMMARY</a:t>
+            </a:r>
+            <a:endParaRPr lang="en-US" sz="1400" dirty="0"/>
+          </a:p>
+        </p:txBody>
+      </p:sp>
+      <p:pic>
+        <p:nvPicPr>
+          <p:cNvPr id="3" name="Image 0" descr="/home/claude/f4/img/minesec_sheet.png">    </p:cNvPr>
+          <p:cNvPicPr>
+            <a:picLocks noChangeAspect="1"/>
+          </p:cNvPicPr>
+          <p:nvPr/>
+        </p:nvPicPr>
+        <p:blipFill>
+          <a:blip r:embed="rId1"/>
+          <a:stretch>
+            <a:fillRect/>
+          </a:stretch>
+        </p:blipFill>
+        <p:spPr>
+          <a:xfrm>
+            <a:off x="0" y="658368"/>
+            <a:ext cx="5120640" cy="5833872"/>
+          </a:xfrm>
+          <a:prstGeom prst="rect">
+            <a:avLst/>
+          </a:prstGeom>
+        </p:spPr>
+      </p:pic>
+      <p:sp>
+        <p:nvSpPr>
+          <p:cNvPr id="4" name="Text 1"/>
+          <p:cNvSpPr/>
+          <p:nvPr/>
+        </p:nvSpPr>
+        <p:spPr>
+          <a:xfrm>
+            <a:off x="5349240" y="1005840"/>
+            <a:ext cx="6522415" cy="731520"/>
+          </a:xfrm>
+          <a:prstGeom prst="rect">
+            <a:avLst/>
+          </a:prstGeom>
+          <a:noFill/>
+          <a:ln/>
+        </p:spPr>
+        <p:txBody>
+          <a:bodyPr wrap="square" lIns="0" tIns="0" rIns="0" bIns="0" rtlCol="0" anchor="ctr">
+            <a:normAutofit/>
+          </a:bodyPr>
+          <a:lstStyle/>
+          <a:p>
+            <a:pPr algn="ctr" indent="0" marL="0">
+              <a:buNone/>
+            </a:pPr>
+            <a:r>
+              <a:rPr lang="en-US" sz="3600" b="1" dirty="0">
+                <a:solidFill>
+                  <a:srgbClr val="990011"/>
+                </a:solidFill>
+                <a:latin typeface="Times New Roman" pitchFamily="34" charset="0"/>
+                <a:ea typeface="Times New Roman" pitchFamily="34" charset="-122"/>
+                <a:cs typeface="Times New Roman" pitchFamily="34" charset="-120"/>
+              </a:rPr>
+              <a:t>2. The Moon, Satellite of the Earth</a:t>
+            </a:r>
+            <a:endParaRPr lang="en-US" sz="3600" dirty="0"/>
+          </a:p>
+        </p:txBody>
+      </p:sp>
+      <p:sp>
+        <p:nvSpPr>
+          <p:cNvPr id="5" name="Text 2"/>
+          <p:cNvSpPr/>
+          <p:nvPr/>
+        </p:nvSpPr>
+        <p:spPr>
+          <a:xfrm>
+            <a:off x="5349240" y="1737360"/>
+            <a:ext cx="6522415" cy="457200"/>
+          </a:xfrm>
+          <a:prstGeom prst="rect">
+            <a:avLst/>
+          </a:prstGeom>
+          <a:noFill/>
+          <a:ln/>
+        </p:spPr>
+        <p:txBody>
+          <a:bodyPr wrap="square" lIns="0" tIns="0" rIns="0" bIns="0" rtlCol="0" anchor="ctr"/>
+          <a:lstStyle/>
+          <a:p>
+            <a:pPr algn="l" indent="0" marL="0">
+              <a:buNone/>
+            </a:pPr>
+            <a:r>
+              <a:rPr lang="en-US" sz="2400" b="1" dirty="0">
+                <a:solidFill>
+                  <a:srgbClr val="990011"/>
+                </a:solidFill>
+                <a:latin typeface="Times New Roman" pitchFamily="34" charset="0"/>
+                <a:ea typeface="Times New Roman" pitchFamily="34" charset="-122"/>
+                <a:cs typeface="Times New Roman" pitchFamily="34" charset="-120"/>
+              </a:rPr>
+              <a:t>C) Impacts on Human Activities (continued)</a:t>
+            </a:r>
+            <a:endParaRPr lang="en-US" sz="2400" dirty="0"/>
+          </a:p>
+        </p:txBody>
+      </p:sp>
+      <p:sp>
+        <p:nvSpPr>
+          <p:cNvPr id="6" name="Text 3"/>
+          <p:cNvSpPr/>
+          <p:nvPr/>
+        </p:nvSpPr>
+        <p:spPr>
+          <a:xfrm>
+            <a:off x="5349240" y="2240280"/>
+            <a:ext cx="6522415" cy="4206240"/>
+          </a:xfrm>
+          <a:prstGeom prst="rect">
+            <a:avLst/>
+          </a:prstGeom>
+          <a:noFill/>
+          <a:ln/>
+        </p:spPr>
+        <p:txBody>
+          <a:bodyPr wrap="square" lIns="0" tIns="0" rIns="0" bIns="0" rtlCol="0" anchor="t"/>
+          <a:lstStyle/>
+          <a:p>
+            <a:pPr algn="l" indent="0" marL="0">
+              <a:spcAft>
+                <a:spcPts val="800"/>
+              </a:spcAft>
+              <a:buNone/>
+            </a:pPr>
+            <a:r>
+              <a:rPr lang="en-US" sz="4000" b="1" dirty="0">
+                <a:solidFill>
+                  <a:srgbClr val="111111"/>
+                </a:solidFill>
+                <a:latin typeface="Times New Roman" pitchFamily="34" charset="0"/>
+                <a:ea typeface="Times New Roman" pitchFamily="34" charset="-122"/>
+                <a:cs typeface="Times New Roman" pitchFamily="34" charset="-120"/>
+              </a:rPr>
+              <a:t>Farming and tradition: </a:t>
+            </a:r>
+            <a:pPr algn="l" indent="0" marL="0">
+              <a:spcAft>
+                <a:spcPts val="800"/>
+              </a:spcAft>
+              <a:buNone/>
+            </a:pPr>
+            <a:r>
+              <a:rPr lang="en-US" sz="4000" dirty="0">
+                <a:solidFill>
+                  <a:srgbClr val="111111"/>
+                </a:solidFill>
+                <a:latin typeface="Times New Roman" pitchFamily="34" charset="0"/>
+                <a:ea typeface="Times New Roman" pitchFamily="34" charset="-122"/>
+                <a:cs typeface="Times New Roman" pitchFamily="34" charset="-120"/>
+              </a:rPr>
+              <a:t>In some villages, people plant or harvest according to the phases of the Moon.</a:t>
+            </a:r>
+            <a:endParaRPr lang="en-US" sz="4000" dirty="0"/>
+          </a:p>
+        </p:txBody>
+      </p:sp>
+      <p:sp>
+        <p:nvSpPr>
+          <p:cNvPr id="25" name="Slide Number Placeholder 0"/>
+          <p:cNvSpPr>
+            <a:spLocks noGrp="1"/>
+          </p:cNvSpPr>
+          <p:nvPr>
+            <p:ph type="sldNum" sz="quarter" idx="4294967295"/>
+          </p:nvPr>
+        </p:nvSpPr>
+        <p:spPr>
+          <a:xfrm>
+            <a:off x="27432" y="91440"/>
+            <a:ext cx="585216" cy="475488"/>
+          </a:xfrm>
+          <a:prstGeom prst="rect">
+            <a:avLst/>
+          </a:prstGeom>
+          <a:extLst>
+            <a:ext uri="{C572A759-6A51-4108-AA02-DFA0A04FC94B}">
+              <ma14:wrappingTextBoxFlag xmlns:ma14="http://schemas.microsoft.com/office/mac/drawingml/2011/main" val="0"/>
+            </a:ext>
+          </a:extLst>
+        </p:spPr>
+        <p:txBody>
+          <a:bodyPr/>
+          <a:lstStyle>
+            <a:lvl1pPr>
+              <a:defRPr sz="2000">
+                <a:solidFill>
+                  <a:srgbClr val="FFFFFF"/>
+                </a:solidFill>
+                <a:latin typeface="Calibri"/>
+                <a:ea typeface="Calibri"/>
+                <a:cs typeface="Calibri"/>
+              </a:defRPr>
+            </a:lvl1pPr>
+          </a:lstStyle>
+          <a:p>
+            <a:pPr algn="ctr"/>
+            <a:fld id="{F7021451-1387-4CA6-816F-3879F97B5CBC}" type="slidenum">
+              <a:rPr b="1" lang="en-US"/>
+              <a:t>46</a:t>
+            </a:fld>
+            <a:endParaRPr lang="en-US"/>
+          </a:p>
+        </p:txBody>
+      </p:sp>
+    </p:spTree>
+  </p:cSld>
+  <p:clrMapOvr>
+    <a:masterClrMapping/>
+  </p:clrMapOvr>
+</p:sld>
+</file>
+
+<file path=ppt/slides/slide47.xml><?xml version="1.0" encoding="utf-8"?>
+<p:sld xmlns:a="http://schemas.openxmlformats.org/drawingml/2006/main" xmlns:r="http://schemas.openxmlformats.org/officeDocument/2006/relationships" xmlns:p="http://schemas.openxmlformats.org/presentationml/2006/main">
+  <p:cSld name="Slide 47">
+    <p:spTree>
+      <p:nvGrpSpPr>
+        <p:cNvPr id="1" name=""/>
+        <p:cNvGrpSpPr/>
+        <p:nvPr/>
+      </p:nvGrpSpPr>
+      <p:grpSpPr>
+        <a:xfrm>
+          <a:off x="0" y="0"/>
+          <a:ext cx="0" cy="0"/>
+          <a:chOff x="0" y="0"/>
+          <a:chExt cx="0" cy="0"/>
+        </a:xfrm>
+      </p:grpSpPr>
+      <p:sp>
+        <p:nvSpPr>
+          <p:cNvPr id="2" name="Text 0"/>
+          <p:cNvSpPr/>
+          <p:nvPr/>
+        </p:nvSpPr>
+        <p:spPr>
+          <a:xfrm>
+            <a:off x="457200" y="713232"/>
+            <a:ext cx="11368735" cy="274320"/>
+          </a:xfrm>
+          <a:prstGeom prst="rect">
+            <a:avLst/>
+          </a:prstGeom>
+          <a:noFill/>
+          <a:ln/>
+        </p:spPr>
+        <p:txBody>
+          <a:bodyPr wrap="square" lIns="0" tIns="0" rIns="0" bIns="0" rtlCol="0" anchor="ctr"/>
+          <a:lstStyle/>
+          <a:p>
+            <a:pPr algn="r" indent="0" marL="0">
+              <a:buNone/>
+            </a:pPr>
+            <a:r>
+              <a:rPr lang="en-US" sz="1400" b="1" dirty="0">
+                <a:solidFill>
+                  <a:srgbClr val="1C3F6E"/>
+                </a:solidFill>
+                <a:latin typeface="Calibri" pitchFamily="34" charset="0"/>
+                <a:ea typeface="Calibri" pitchFamily="34" charset="-122"/>
+                <a:cs typeface="Calibri" pitchFamily="34" charset="-120"/>
+              </a:rPr>
+              <a:t>FORMATIVE EVALUATION</a:t>
+            </a:r>
+            <a:endParaRPr lang="en-US" sz="1400" dirty="0"/>
+          </a:p>
+        </p:txBody>
+      </p:sp>
+      <p:pic>
+        <p:nvPicPr>
+          <p:cNvPr id="3" name="Image 0" descr="/home/claude/f4/img/minesec_sheet.png">    </p:cNvPr>
+          <p:cNvPicPr>
+            <a:picLocks noChangeAspect="1"/>
+          </p:cNvPicPr>
+          <p:nvPr/>
+        </p:nvPicPr>
+        <p:blipFill>
+          <a:blip r:embed="rId1"/>
+          <a:stretch>
+            <a:fillRect/>
+          </a:stretch>
+        </p:blipFill>
+        <p:spPr>
+          <a:xfrm>
+            <a:off x="0" y="658368"/>
+            <a:ext cx="5120640" cy="5833872"/>
+          </a:xfrm>
+          <a:prstGeom prst="rect">
+            <a:avLst/>
+          </a:prstGeom>
+        </p:spPr>
+      </p:pic>
+      <p:sp>
+        <p:nvSpPr>
+          <p:cNvPr id="4" name="Text 1"/>
+          <p:cNvSpPr/>
+          <p:nvPr/>
+        </p:nvSpPr>
+        <p:spPr>
+          <a:xfrm>
+            <a:off x="5349240" y="1005840"/>
+            <a:ext cx="6522415" cy="731520"/>
+          </a:xfrm>
+          <a:prstGeom prst="rect">
+            <a:avLst/>
+          </a:prstGeom>
+          <a:noFill/>
+          <a:ln/>
+        </p:spPr>
+        <p:txBody>
+          <a:bodyPr wrap="square" lIns="0" tIns="0" rIns="0" bIns="0" rtlCol="0" anchor="ctr">
+            <a:normAutofit/>
+          </a:bodyPr>
+          <a:lstStyle/>
+          <a:p>
+            <a:pPr algn="ctr" indent="0" marL="0">
+              <a:buNone/>
+            </a:pPr>
+            <a:r>
+              <a:rPr lang="en-US" sz="3600" b="1" dirty="0">
+                <a:solidFill>
+                  <a:srgbClr val="990011"/>
+                </a:solidFill>
+                <a:latin typeface="Times New Roman" pitchFamily="34" charset="0"/>
+                <a:ea typeface="Times New Roman" pitchFamily="34" charset="-122"/>
+                <a:cs typeface="Times New Roman" pitchFamily="34" charset="-120"/>
+              </a:rPr>
+              <a:t>Evaluation 1</a:t>
+            </a:r>
+            <a:endParaRPr lang="en-US" sz="3600" dirty="0"/>
+          </a:p>
+        </p:txBody>
+      </p:sp>
+      <p:sp>
+        <p:nvSpPr>
+          <p:cNvPr id="5" name="Text 2"/>
+          <p:cNvSpPr/>
+          <p:nvPr/>
+        </p:nvSpPr>
+        <p:spPr>
+          <a:xfrm>
+            <a:off x="5349240" y="1783080"/>
+            <a:ext cx="6522415" cy="4663440"/>
+          </a:xfrm>
+          <a:prstGeom prst="rect">
+            <a:avLst/>
+          </a:prstGeom>
+          <a:noFill/>
+          <a:ln/>
+        </p:spPr>
+        <p:txBody>
+          <a:bodyPr wrap="square" lIns="0" tIns="0" rIns="0" bIns="0" rtlCol="0" anchor="t"/>
+          <a:lstStyle/>
+          <a:p>
+            <a:pPr algn="l" indent="0" marL="0">
+              <a:spcAft>
+                <a:spcPts val="800"/>
+              </a:spcAft>
+              <a:buNone/>
+            </a:pPr>
+            <a:r>
+              <a:rPr lang="en-US" sz="4000" dirty="0">
+                <a:solidFill>
+                  <a:srgbClr val="111111"/>
+                </a:solidFill>
+                <a:latin typeface="Times New Roman" pitchFamily="34" charset="0"/>
+                <a:ea typeface="Times New Roman" pitchFamily="34" charset="-122"/>
+                <a:cs typeface="Times New Roman" pitchFamily="34" charset="-120"/>
+              </a:rPr>
+              <a:t>What is a galaxy? Name our galaxy.</a:t>
+            </a:r>
+            <a:endParaRPr lang="en-US" sz="4000" dirty="0"/>
+          </a:p>
+        </p:txBody>
+      </p:sp>
+      <p:sp>
+        <p:nvSpPr>
+          <p:cNvPr id="25" name="Slide Number Placeholder 0"/>
+          <p:cNvSpPr>
+            <a:spLocks noGrp="1"/>
+          </p:cNvSpPr>
+          <p:nvPr>
+            <p:ph type="sldNum" sz="quarter" idx="4294967295"/>
+          </p:nvPr>
+        </p:nvSpPr>
+        <p:spPr>
+          <a:xfrm>
+            <a:off x="27432" y="91440"/>
+            <a:ext cx="585216" cy="475488"/>
+          </a:xfrm>
+          <a:prstGeom prst="rect">
+            <a:avLst/>
+          </a:prstGeom>
+          <a:extLst>
+            <a:ext uri="{C572A759-6A51-4108-AA02-DFA0A04FC94B}">
+              <ma14:wrappingTextBoxFlag xmlns:ma14="http://schemas.microsoft.com/office/mac/drawingml/2011/main" val="0"/>
+            </a:ext>
+          </a:extLst>
+        </p:spPr>
+        <p:txBody>
+          <a:bodyPr/>
+          <a:lstStyle>
+            <a:lvl1pPr>
+              <a:defRPr sz="2000">
+                <a:solidFill>
+                  <a:srgbClr val="FFFFFF"/>
+                </a:solidFill>
+                <a:latin typeface="Calibri"/>
+                <a:ea typeface="Calibri"/>
+                <a:cs typeface="Calibri"/>
+              </a:defRPr>
+            </a:lvl1pPr>
+          </a:lstStyle>
+          <a:p>
+            <a:pPr algn="ctr"/>
+            <a:fld id="{F7021451-1387-4CA6-816F-3879F97B5CBC}" type="slidenum">
+              <a:rPr b="1" lang="en-US"/>
+              <a:t>47</a:t>
+            </a:fld>
+            <a:endParaRPr lang="en-US"/>
+          </a:p>
+        </p:txBody>
+      </p:sp>
+    </p:spTree>
+  </p:cSld>
+  <p:clrMapOvr>
+    <a:masterClrMapping/>
+  </p:clrMapOvr>
+</p:sld>
+</file>
+
+<file path=ppt/slides/slide48.xml><?xml version="1.0" encoding="utf-8"?>
+<p:sld xmlns:a="http://schemas.openxmlformats.org/drawingml/2006/main" xmlns:r="http://schemas.openxmlformats.org/officeDocument/2006/relationships" xmlns:p="http://schemas.openxmlformats.org/presentationml/2006/main">
+  <p:cSld name="Slide 48">
+    <p:spTree>
+      <p:nvGrpSpPr>
+        <p:cNvPr id="1" name=""/>
+        <p:cNvGrpSpPr/>
+        <p:nvPr/>
+      </p:nvGrpSpPr>
+      <p:grpSpPr>
+        <a:xfrm>
+          <a:off x="0" y="0"/>
+          <a:ext cx="0" cy="0"/>
+          <a:chOff x="0" y="0"/>
+          <a:chExt cx="0" cy="0"/>
+        </a:xfrm>
+      </p:grpSpPr>
+      <p:sp>
+        <p:nvSpPr>
+          <p:cNvPr id="2" name="Text 0"/>
+          <p:cNvSpPr/>
+          <p:nvPr/>
+        </p:nvSpPr>
+        <p:spPr>
+          <a:xfrm>
+            <a:off x="457200" y="713232"/>
+            <a:ext cx="11368735" cy="274320"/>
+          </a:xfrm>
+          <a:prstGeom prst="rect">
+            <a:avLst/>
+          </a:prstGeom>
+          <a:noFill/>
+          <a:ln/>
+        </p:spPr>
+        <p:txBody>
+          <a:bodyPr wrap="square" lIns="0" tIns="0" rIns="0" bIns="0" rtlCol="0" anchor="ctr"/>
+          <a:lstStyle/>
+          <a:p>
+            <a:pPr algn="r" indent="0" marL="0">
+              <a:buNone/>
+            </a:pPr>
+            <a:r>
+              <a:rPr lang="en-US" sz="1400" b="1" dirty="0">
+                <a:solidFill>
+                  <a:srgbClr val="1C3F6E"/>
+                </a:solidFill>
+                <a:latin typeface="Calibri" pitchFamily="34" charset="0"/>
+                <a:ea typeface="Calibri" pitchFamily="34" charset="-122"/>
+                <a:cs typeface="Calibri" pitchFamily="34" charset="-120"/>
+              </a:rPr>
+              <a:t>FORMATIVE EVALUATION</a:t>
+            </a:r>
+            <a:endParaRPr lang="en-US" sz="1400" dirty="0"/>
+          </a:p>
+        </p:txBody>
+      </p:sp>
+      <p:pic>
+        <p:nvPicPr>
+          <p:cNvPr id="3" name="Image 0" descr="/home/claude/f4/img/minesec_sheet.png">    </p:cNvPr>
+          <p:cNvPicPr>
+            <a:picLocks noChangeAspect="1"/>
+          </p:cNvPicPr>
+          <p:nvPr/>
+        </p:nvPicPr>
+        <p:blipFill>
+          <a:blip r:embed="rId1"/>
+          <a:stretch>
+            <a:fillRect/>
+          </a:stretch>
+        </p:blipFill>
+        <p:spPr>
+          <a:xfrm>
+            <a:off x="0" y="658368"/>
+            <a:ext cx="5120640" cy="5833872"/>
+          </a:xfrm>
+          <a:prstGeom prst="rect">
+            <a:avLst/>
+          </a:prstGeom>
+        </p:spPr>
+      </p:pic>
+      <p:sp>
+        <p:nvSpPr>
+          <p:cNvPr id="4" name="Text 1"/>
+          <p:cNvSpPr/>
+          <p:nvPr/>
+        </p:nvSpPr>
+        <p:spPr>
+          <a:xfrm>
+            <a:off x="5349240" y="1005840"/>
+            <a:ext cx="6522415" cy="731520"/>
+          </a:xfrm>
+          <a:prstGeom prst="rect">
+            <a:avLst/>
+          </a:prstGeom>
+          <a:noFill/>
+          <a:ln/>
+        </p:spPr>
+        <p:txBody>
+          <a:bodyPr wrap="square" lIns="0" tIns="0" rIns="0" bIns="0" rtlCol="0" anchor="ctr">
+            <a:normAutofit/>
+          </a:bodyPr>
+          <a:lstStyle/>
+          <a:p>
+            <a:pPr algn="ctr" indent="0" marL="0">
+              <a:buNone/>
+            </a:pPr>
+            <a:r>
+              <a:rPr lang="en-US" sz="3600" b="1" dirty="0">
+                <a:solidFill>
+                  <a:srgbClr val="990011"/>
+                </a:solidFill>
+                <a:latin typeface="Times New Roman" pitchFamily="34" charset="0"/>
+                <a:ea typeface="Times New Roman" pitchFamily="34" charset="-122"/>
+                <a:cs typeface="Times New Roman" pitchFamily="34" charset="-120"/>
+              </a:rPr>
+              <a:t>Expected Answer</a:t>
+            </a:r>
+            <a:endParaRPr lang="en-US" sz="3600" dirty="0"/>
+          </a:p>
+        </p:txBody>
+      </p:sp>
+      <p:sp>
+        <p:nvSpPr>
+          <p:cNvPr id="5" name="Text 2"/>
+          <p:cNvSpPr/>
+          <p:nvPr/>
+        </p:nvSpPr>
+        <p:spPr>
+          <a:xfrm>
+            <a:off x="5349240" y="1783080"/>
+            <a:ext cx="6522415" cy="4663440"/>
+          </a:xfrm>
+          <a:prstGeom prst="rect">
+            <a:avLst/>
+          </a:prstGeom>
+          <a:noFill/>
+          <a:ln/>
+        </p:spPr>
+        <p:txBody>
+          <a:bodyPr wrap="square" lIns="0" tIns="0" rIns="0" bIns="0" rtlCol="0" anchor="t"/>
+          <a:lstStyle/>
+          <a:p>
+            <a:pPr algn="l" indent="0" marL="0">
+              <a:spcAft>
+                <a:spcPts val="800"/>
+              </a:spcAft>
+              <a:buNone/>
+            </a:pPr>
+            <a:r>
+              <a:rPr lang="en-US" sz="4000" dirty="0">
+                <a:solidFill>
+                  <a:srgbClr val="111111"/>
+                </a:solidFill>
+                <a:latin typeface="Times New Roman" pitchFamily="34" charset="0"/>
+                <a:ea typeface="Times New Roman" pitchFamily="34" charset="-122"/>
+                <a:cs typeface="Times New Roman" pitchFamily="34" charset="-120"/>
+              </a:rPr>
+              <a:t>A huge group of stars. Ours is the Milky Way.</a:t>
+            </a:r>
+            <a:endParaRPr lang="en-US" sz="4000" dirty="0"/>
+          </a:p>
+        </p:txBody>
+      </p:sp>
+      <p:sp>
+        <p:nvSpPr>
+          <p:cNvPr id="25" name="Slide Number Placeholder 0"/>
+          <p:cNvSpPr>
+            <a:spLocks noGrp="1"/>
+          </p:cNvSpPr>
+          <p:nvPr>
+            <p:ph type="sldNum" sz="quarter" idx="4294967295"/>
+          </p:nvPr>
+        </p:nvSpPr>
+        <p:spPr>
+          <a:xfrm>
+            <a:off x="27432" y="91440"/>
+            <a:ext cx="585216" cy="475488"/>
+          </a:xfrm>
+          <a:prstGeom prst="rect">
+            <a:avLst/>
+          </a:prstGeom>
+          <a:extLst>
+            <a:ext uri="{C572A759-6A51-4108-AA02-DFA0A04FC94B}">
+              <ma14:wrappingTextBoxFlag xmlns:ma14="http://schemas.microsoft.com/office/mac/drawingml/2011/main" val="0"/>
+            </a:ext>
+          </a:extLst>
+        </p:spPr>
+        <p:txBody>
+          <a:bodyPr/>
+          <a:lstStyle>
+            <a:lvl1pPr>
+              <a:defRPr sz="2000">
+                <a:solidFill>
+                  <a:srgbClr val="FFFFFF"/>
+                </a:solidFill>
+                <a:latin typeface="Calibri"/>
+                <a:ea typeface="Calibri"/>
+                <a:cs typeface="Calibri"/>
+              </a:defRPr>
+            </a:lvl1pPr>
+          </a:lstStyle>
+          <a:p>
+            <a:pPr algn="ctr"/>
+            <a:fld id="{F7021451-1387-4CA6-816F-3879F97B5CBC}" type="slidenum">
+              <a:rPr b="1" lang="en-US"/>
+              <a:t>48</a:t>
+            </a:fld>
+            <a:endParaRPr lang="en-US"/>
+          </a:p>
+        </p:txBody>
+      </p:sp>
+    </p:spTree>
+  </p:cSld>
+  <p:clrMapOvr>
+    <a:masterClrMapping/>
+  </p:clrMapOvr>
+</p:sld>
+</file>
+
+<file path=ppt/slides/slide49.xml><?xml version="1.0" encoding="utf-8"?>
+<p:sld xmlns:a="http://schemas.openxmlformats.org/drawingml/2006/main" xmlns:r="http://schemas.openxmlformats.org/officeDocument/2006/relationships" xmlns:p="http://schemas.openxmlformats.org/presentationml/2006/main">
+  <p:cSld name="Slide 49">
+    <p:spTree>
+      <p:nvGrpSpPr>
+        <p:cNvPr id="1" name=""/>
+        <p:cNvGrpSpPr/>
+        <p:nvPr/>
+      </p:nvGrpSpPr>
+      <p:grpSpPr>
+        <a:xfrm>
+          <a:off x="0" y="0"/>
+          <a:ext cx="0" cy="0"/>
+          <a:chOff x="0" y="0"/>
+          <a:chExt cx="0" cy="0"/>
+        </a:xfrm>
+      </p:grpSpPr>
+      <p:sp>
+        <p:nvSpPr>
+          <p:cNvPr id="2" name="Text 0"/>
+          <p:cNvSpPr/>
+          <p:nvPr/>
+        </p:nvSpPr>
+        <p:spPr>
+          <a:xfrm>
+            <a:off x="457200" y="713232"/>
+            <a:ext cx="11368735" cy="274320"/>
+          </a:xfrm>
+          <a:prstGeom prst="rect">
+            <a:avLst/>
+          </a:prstGeom>
+          <a:noFill/>
+          <a:ln/>
+        </p:spPr>
+        <p:txBody>
+          <a:bodyPr wrap="square" lIns="0" tIns="0" rIns="0" bIns="0" rtlCol="0" anchor="ctr"/>
+          <a:lstStyle/>
+          <a:p>
+            <a:pPr algn="r" indent="0" marL="0">
+              <a:buNone/>
+            </a:pPr>
+            <a:r>
+              <a:rPr lang="en-US" sz="1400" b="1" dirty="0">
+                <a:solidFill>
+                  <a:srgbClr val="1C3F6E"/>
+                </a:solidFill>
+                <a:latin typeface="Calibri" pitchFamily="34" charset="0"/>
+                <a:ea typeface="Calibri" pitchFamily="34" charset="-122"/>
+                <a:cs typeface="Calibri" pitchFamily="34" charset="-120"/>
+              </a:rPr>
+              <a:t>FORMATIVE EVALUATION</a:t>
+            </a:r>
+            <a:endParaRPr lang="en-US" sz="1400" dirty="0"/>
+          </a:p>
+        </p:txBody>
+      </p:sp>
+      <p:pic>
+        <p:nvPicPr>
+          <p:cNvPr id="3" name="Image 0" descr="/home/claude/f4/img/minesec_sheet.png">    </p:cNvPr>
+          <p:cNvPicPr>
+            <a:picLocks noChangeAspect="1"/>
+          </p:cNvPicPr>
+          <p:nvPr/>
+        </p:nvPicPr>
+        <p:blipFill>
+          <a:blip r:embed="rId1"/>
+          <a:stretch>
+            <a:fillRect/>
+          </a:stretch>
+        </p:blipFill>
+        <p:spPr>
+          <a:xfrm>
+            <a:off x="0" y="658368"/>
+            <a:ext cx="5120640" cy="5833872"/>
+          </a:xfrm>
+          <a:prstGeom prst="rect">
+            <a:avLst/>
+          </a:prstGeom>
+        </p:spPr>
+      </p:pic>
+      <p:sp>
+        <p:nvSpPr>
+          <p:cNvPr id="4" name="Text 1"/>
+          <p:cNvSpPr/>
+          <p:nvPr/>
+        </p:nvSpPr>
+        <p:spPr>
+          <a:xfrm>
+            <a:off x="5349240" y="1005840"/>
+            <a:ext cx="6522415" cy="731520"/>
+          </a:xfrm>
+          <a:prstGeom prst="rect">
+            <a:avLst/>
+          </a:prstGeom>
+          <a:noFill/>
+          <a:ln/>
+        </p:spPr>
+        <p:txBody>
+          <a:bodyPr wrap="square" lIns="0" tIns="0" rIns="0" bIns="0" rtlCol="0" anchor="ctr">
+            <a:normAutofit/>
+          </a:bodyPr>
+          <a:lstStyle/>
+          <a:p>
+            <a:pPr algn="ctr" indent="0" marL="0">
+              <a:buNone/>
+            </a:pPr>
+            <a:r>
+              <a:rPr lang="en-US" sz="3600" b="1" dirty="0">
+                <a:solidFill>
+                  <a:srgbClr val="990011"/>
+                </a:solidFill>
+                <a:latin typeface="Times New Roman" pitchFamily="34" charset="0"/>
+                <a:ea typeface="Times New Roman" pitchFamily="34" charset="-122"/>
+                <a:cs typeface="Times New Roman" pitchFamily="34" charset="-120"/>
+              </a:rPr>
+              <a:t>Evaluation 2</a:t>
+            </a:r>
+            <a:endParaRPr lang="en-US" sz="3600" dirty="0"/>
+          </a:p>
+        </p:txBody>
+      </p:sp>
+      <p:sp>
+        <p:nvSpPr>
+          <p:cNvPr id="5" name="Text 2"/>
+          <p:cNvSpPr/>
+          <p:nvPr/>
+        </p:nvSpPr>
+        <p:spPr>
+          <a:xfrm>
+            <a:off x="5349240" y="1783080"/>
+            <a:ext cx="6522415" cy="4663440"/>
+          </a:xfrm>
+          <a:prstGeom prst="rect">
+            <a:avLst/>
+          </a:prstGeom>
+          <a:noFill/>
+          <a:ln/>
+        </p:spPr>
+        <p:txBody>
+          <a:bodyPr wrap="square" lIns="0" tIns="0" rIns="0" bIns="0" rtlCol="0" anchor="t"/>
+          <a:lstStyle/>
+          <a:p>
+            <a:pPr algn="l" indent="0" marL="0">
+              <a:spcAft>
+                <a:spcPts val="800"/>
+              </a:spcAft>
+              <a:buNone/>
+            </a:pPr>
+            <a:r>
+              <a:rPr lang="en-US" sz="4000" dirty="0">
+                <a:solidFill>
+                  <a:srgbClr val="111111"/>
+                </a:solidFill>
+                <a:latin typeface="Times New Roman" pitchFamily="34" charset="0"/>
+                <a:ea typeface="Times New Roman" pitchFamily="34" charset="-122"/>
+                <a:cs typeface="Times New Roman" pitchFamily="34" charset="-120"/>
+              </a:rPr>
+              <a:t>What causes the tides?</a:t>
+            </a:r>
+            <a:endParaRPr lang="en-US" sz="4000" dirty="0"/>
+          </a:p>
+        </p:txBody>
+      </p:sp>
+      <p:sp>
+        <p:nvSpPr>
+          <p:cNvPr id="25" name="Slide Number Placeholder 0"/>
+          <p:cNvSpPr>
+            <a:spLocks noGrp="1"/>
+          </p:cNvSpPr>
+          <p:nvPr>
+            <p:ph type="sldNum" sz="quarter" idx="4294967295"/>
+          </p:nvPr>
+        </p:nvSpPr>
+        <p:spPr>
+          <a:xfrm>
+            <a:off x="27432" y="91440"/>
+            <a:ext cx="585216" cy="475488"/>
+          </a:xfrm>
+          <a:prstGeom prst="rect">
+            <a:avLst/>
+          </a:prstGeom>
+          <a:extLst>
+            <a:ext uri="{C572A759-6A51-4108-AA02-DFA0A04FC94B}">
+              <ma14:wrappingTextBoxFlag xmlns:ma14="http://schemas.microsoft.com/office/mac/drawingml/2011/main" val="0"/>
+            </a:ext>
+          </a:extLst>
+        </p:spPr>
+        <p:txBody>
+          <a:bodyPr/>
+          <a:lstStyle>
+            <a:lvl1pPr>
+              <a:defRPr sz="2000">
+                <a:solidFill>
+                  <a:srgbClr val="FFFFFF"/>
+                </a:solidFill>
+                <a:latin typeface="Calibri"/>
+                <a:ea typeface="Calibri"/>
+                <a:cs typeface="Calibri"/>
+              </a:defRPr>
+            </a:lvl1pPr>
+          </a:lstStyle>
+          <a:p>
+            <a:pPr algn="ctr"/>
+            <a:fld id="{F7021451-1387-4CA6-816F-3879F97B5CBC}" type="slidenum">
+              <a:rPr b="1" lang="en-US"/>
+              <a:t>49</a:t>
+            </a:fld>
+            <a:endParaRPr lang="en-US"/>
+          </a:p>
+        </p:txBody>
+      </p:sp>
+    </p:spTree>
+  </p:cSld>
+  <p:clrMapOvr>
+    <a:masterClrMapping/>
+  </p:clrMapOvr>
+</p:sld>
+</file>
+
+<file path=ppt/slides/slide5.xml><?xml version="1.0" encoding="utf-8"?>
+<p:sld xmlns:a="http://schemas.openxmlformats.org/drawingml/2006/main" xmlns:r="http://schemas.openxmlformats.org/officeDocument/2006/relationships" xmlns:p="http://schemas.openxmlformats.org/presentationml/2006/main">
+  <p:cSld name="Slide 5">
+    <p:spTree>
+      <p:nvGrpSpPr>
+        <p:cNvPr id="1" name=""/>
+        <p:cNvGrpSpPr/>
+        <p:nvPr/>
+      </p:nvGrpSpPr>
+      <p:grpSpPr>
+        <a:xfrm>
+          <a:off x="0" y="0"/>
+          <a:ext cx="0" cy="0"/>
+          <a:chOff x="0" y="0"/>
+          <a:chExt cx="0" cy="0"/>
+        </a:xfrm>
+      </p:grpSpPr>
+      <p:sp>
+        <p:nvSpPr>
+          <p:cNvPr id="2" name="Text 0"/>
+          <p:cNvSpPr/>
+          <p:nvPr/>
+        </p:nvSpPr>
+        <p:spPr>
+          <a:xfrm>
+            <a:off x="457200" y="713232"/>
+            <a:ext cx="11368735" cy="274320"/>
+          </a:xfrm>
+          <a:prstGeom prst="rect">
+            <a:avLst/>
+          </a:prstGeom>
+          <a:noFill/>
+          <a:ln/>
+        </p:spPr>
+        <p:txBody>
+          <a:bodyPr wrap="square" lIns="0" tIns="0" rIns="0" bIns="0" rtlCol="0" anchor="ctr"/>
+          <a:lstStyle/>
+          <a:p>
+            <a:pPr algn="r" indent="0" marL="0">
+              <a:buNone/>
+            </a:pPr>
+            <a:r>
+              <a:rPr lang="en-US" sz="1400" b="1" dirty="0">
+                <a:solidFill>
+                  <a:srgbClr val="1C3F6E"/>
+                </a:solidFill>
+                <a:latin typeface="Calibri" pitchFamily="34" charset="0"/>
+                <a:ea typeface="Calibri" pitchFamily="34" charset="-122"/>
+                <a:cs typeface="Calibri" pitchFamily="34" charset="-120"/>
+              </a:rPr>
+              <a:t>HOMEWORK CORRECTION</a:t>
+            </a:r>
+            <a:endParaRPr lang="en-US" sz="1400" dirty="0"/>
+          </a:p>
+        </p:txBody>
+      </p:sp>
+      <p:pic>
+        <p:nvPicPr>
+          <p:cNvPr id="3" name="Image 0" descr="/home/claude/f4/img/minesec_sheet.png">    </p:cNvPr>
+          <p:cNvPicPr>
+            <a:picLocks noChangeAspect="1"/>
+          </p:cNvPicPr>
+          <p:nvPr/>
+        </p:nvPicPr>
+        <p:blipFill>
+          <a:blip r:embed="rId1"/>
+          <a:stretch>
+            <a:fillRect/>
+          </a:stretch>
+        </p:blipFill>
+        <p:spPr>
+          <a:xfrm>
+            <a:off x="0" y="658368"/>
+            <a:ext cx="5120640" cy="5833872"/>
+          </a:xfrm>
+          <a:prstGeom prst="rect">
+            <a:avLst/>
+          </a:prstGeom>
+        </p:spPr>
+      </p:pic>
+      <p:sp>
+        <p:nvSpPr>
+          <p:cNvPr id="4" name="Text 1"/>
+          <p:cNvSpPr/>
+          <p:nvPr/>
+        </p:nvSpPr>
+        <p:spPr>
+          <a:xfrm>
+            <a:off x="5349240" y="1005840"/>
+            <a:ext cx="6522415" cy="731520"/>
+          </a:xfrm>
+          <a:prstGeom prst="rect">
+            <a:avLst/>
+          </a:prstGeom>
+          <a:noFill/>
+          <a:ln/>
+        </p:spPr>
+        <p:txBody>
+          <a:bodyPr wrap="square" lIns="0" tIns="0" rIns="0" bIns="0" rtlCol="0" anchor="ctr">
+            <a:normAutofit/>
+          </a:bodyPr>
+          <a:lstStyle/>
+          <a:p>
+            <a:pPr algn="ctr" indent="0" marL="0">
+              <a:buNone/>
+            </a:pPr>
+            <a:r>
+              <a:rPr lang="en-US" sz="3600" b="1" dirty="0">
+                <a:solidFill>
+                  <a:srgbClr val="990011"/>
+                </a:solidFill>
+                <a:latin typeface="Times New Roman" pitchFamily="34" charset="0"/>
+                <a:ea typeface="Times New Roman" pitchFamily="34" charset="-122"/>
+                <a:cs typeface="Times New Roman" pitchFamily="34" charset="-120"/>
+              </a:rPr>
+              <a:t>Correction: Possible Answer</a:t>
+            </a:r>
+            <a:endParaRPr lang="en-US" sz="3600" dirty="0"/>
+          </a:p>
+        </p:txBody>
+      </p:sp>
+      <p:sp>
+        <p:nvSpPr>
+          <p:cNvPr id="5" name="Text 2"/>
+          <p:cNvSpPr/>
+          <p:nvPr/>
+        </p:nvSpPr>
+        <p:spPr>
+          <a:xfrm>
+            <a:off x="5349240" y="1783080"/>
+            <a:ext cx="6522415" cy="4663440"/>
+          </a:xfrm>
+          <a:prstGeom prst="rect">
+            <a:avLst/>
+          </a:prstGeom>
+          <a:noFill/>
+          <a:ln/>
+        </p:spPr>
+        <p:txBody>
+          <a:bodyPr wrap="square" lIns="0" tIns="0" rIns="0" bIns="0" rtlCol="0" anchor="t"/>
+          <a:lstStyle/>
+          <a:p>
+            <a:pPr algn="l" indent="0" marL="0">
+              <a:spcAft>
+                <a:spcPts val="800"/>
+              </a:spcAft>
+              <a:buNone/>
+            </a:pPr>
+            <a:r>
+              <a:rPr lang="en-US" sz="4000" dirty="0">
+                <a:solidFill>
+                  <a:srgbClr val="111111"/>
+                </a:solidFill>
+                <a:latin typeface="Times New Roman" pitchFamily="34" charset="0"/>
+                <a:ea typeface="Times New Roman" pitchFamily="34" charset="-122"/>
+                <a:cs typeface="Times New Roman" pitchFamily="34" charset="-120"/>
+              </a:rPr>
+              <a:t>The drawings should show the Moon changing shape: for example a thin crescent, then a half Moon, then a nearly full Moon, each with its date.</a:t>
+            </a:r>
+            <a:endParaRPr lang="en-US" sz="4000" dirty="0"/>
+          </a:p>
+        </p:txBody>
+      </p:sp>
+      <p:sp>
+        <p:nvSpPr>
+          <p:cNvPr id="25" name="Slide Number Placeholder 0"/>
+          <p:cNvSpPr>
+            <a:spLocks noGrp="1"/>
+          </p:cNvSpPr>
+          <p:nvPr>
+            <p:ph type="sldNum" sz="quarter" idx="4294967295"/>
+          </p:nvPr>
+        </p:nvSpPr>
+        <p:spPr>
+          <a:xfrm>
+            <a:off x="27432" y="91440"/>
+            <a:ext cx="585216" cy="475488"/>
+          </a:xfrm>
+          <a:prstGeom prst="rect">
+            <a:avLst/>
+          </a:prstGeom>
+          <a:extLst>
+            <a:ext uri="{C572A759-6A51-4108-AA02-DFA0A04FC94B}">
+              <ma14:wrappingTextBoxFlag xmlns:ma14="http://schemas.microsoft.com/office/mac/drawingml/2011/main" val="0"/>
+            </a:ext>
+          </a:extLst>
+        </p:spPr>
+        <p:txBody>
+          <a:bodyPr/>
+          <a:lstStyle>
+            <a:lvl1pPr>
+              <a:defRPr sz="2000">
+                <a:solidFill>
+                  <a:srgbClr val="FFFFFF"/>
+                </a:solidFill>
+                <a:latin typeface="Calibri"/>
+                <a:ea typeface="Calibri"/>
+                <a:cs typeface="Calibri"/>
+              </a:defRPr>
+            </a:lvl1pPr>
+          </a:lstStyle>
+          <a:p>
+            <a:pPr algn="ctr"/>
+            <a:fld id="{F7021451-1387-4CA6-816F-3879F97B5CBC}" type="slidenum">
+              <a:rPr b="1" lang="en-US"/>
+              <a:t>5</a:t>
+            </a:fld>
+            <a:endParaRPr lang="en-US"/>
+          </a:p>
+        </p:txBody>
+      </p:sp>
+    </p:spTree>
+  </p:cSld>
+  <p:clrMapOvr>
+    <a:masterClrMapping/>
+  </p:clrMapOvr>
+</p:sld>
+</file>
+
+<file path=ppt/slides/slide50.xml><?xml version="1.0" encoding="utf-8"?>
+<p:sld xmlns:a="http://schemas.openxmlformats.org/drawingml/2006/main" xmlns:r="http://schemas.openxmlformats.org/officeDocument/2006/relationships" xmlns:p="http://schemas.openxmlformats.org/presentationml/2006/main">
+  <p:cSld name="Slide 50">
+    <p:spTree>
+      <p:nvGrpSpPr>
+        <p:cNvPr id="1" name=""/>
+        <p:cNvGrpSpPr/>
+        <p:nvPr/>
+      </p:nvGrpSpPr>
+      <p:grpSpPr>
+        <a:xfrm>
+          <a:off x="0" y="0"/>
+          <a:ext cx="0" cy="0"/>
+          <a:chOff x="0" y="0"/>
+          <a:chExt cx="0" cy="0"/>
+        </a:xfrm>
+      </p:grpSpPr>
+      <p:sp>
+        <p:nvSpPr>
+          <p:cNvPr id="2" name="Text 0"/>
+          <p:cNvSpPr/>
+          <p:nvPr/>
+        </p:nvSpPr>
+        <p:spPr>
+          <a:xfrm>
+            <a:off x="457200" y="713232"/>
+            <a:ext cx="11368735" cy="274320"/>
+          </a:xfrm>
+          <a:prstGeom prst="rect">
+            <a:avLst/>
+          </a:prstGeom>
+          <a:noFill/>
+          <a:ln/>
+        </p:spPr>
+        <p:txBody>
+          <a:bodyPr wrap="square" lIns="0" tIns="0" rIns="0" bIns="0" rtlCol="0" anchor="ctr"/>
+          <a:lstStyle/>
+          <a:p>
+            <a:pPr algn="r" indent="0" marL="0">
+              <a:buNone/>
+            </a:pPr>
+            <a:r>
+              <a:rPr lang="en-US" sz="1400" b="1" dirty="0">
+                <a:solidFill>
+                  <a:srgbClr val="1C3F6E"/>
+                </a:solidFill>
+                <a:latin typeface="Calibri" pitchFamily="34" charset="0"/>
+                <a:ea typeface="Calibri" pitchFamily="34" charset="-122"/>
+                <a:cs typeface="Calibri" pitchFamily="34" charset="-120"/>
+              </a:rPr>
+              <a:t>FORMATIVE EVALUATION</a:t>
+            </a:r>
+            <a:endParaRPr lang="en-US" sz="1400" dirty="0"/>
+          </a:p>
+        </p:txBody>
+      </p:sp>
+      <p:pic>
+        <p:nvPicPr>
+          <p:cNvPr id="3" name="Image 0" descr="/home/claude/f4/img/minesec_sheet.png">    </p:cNvPr>
+          <p:cNvPicPr>
+            <a:picLocks noChangeAspect="1"/>
+          </p:cNvPicPr>
+          <p:nvPr/>
+        </p:nvPicPr>
+        <p:blipFill>
+          <a:blip r:embed="rId1"/>
+          <a:stretch>
+            <a:fillRect/>
+          </a:stretch>
+        </p:blipFill>
+        <p:spPr>
+          <a:xfrm>
+            <a:off x="0" y="658368"/>
+            <a:ext cx="5120640" cy="5833872"/>
+          </a:xfrm>
+          <a:prstGeom prst="rect">
+            <a:avLst/>
+          </a:prstGeom>
+        </p:spPr>
+      </p:pic>
+      <p:sp>
+        <p:nvSpPr>
+          <p:cNvPr id="4" name="Text 1"/>
+          <p:cNvSpPr/>
+          <p:nvPr/>
+        </p:nvSpPr>
+        <p:spPr>
+          <a:xfrm>
+            <a:off x="5349240" y="1005840"/>
+            <a:ext cx="6522415" cy="731520"/>
+          </a:xfrm>
+          <a:prstGeom prst="rect">
+            <a:avLst/>
+          </a:prstGeom>
+          <a:noFill/>
+          <a:ln/>
+        </p:spPr>
+        <p:txBody>
+          <a:bodyPr wrap="square" lIns="0" tIns="0" rIns="0" bIns="0" rtlCol="0" anchor="ctr">
+            <a:normAutofit/>
+          </a:bodyPr>
+          <a:lstStyle/>
+          <a:p>
+            <a:pPr algn="ctr" indent="0" marL="0">
+              <a:buNone/>
+            </a:pPr>
+            <a:r>
+              <a:rPr lang="en-US" sz="3600" b="1" dirty="0">
+                <a:solidFill>
+                  <a:srgbClr val="990011"/>
+                </a:solidFill>
+                <a:latin typeface="Times New Roman" pitchFamily="34" charset="0"/>
+                <a:ea typeface="Times New Roman" pitchFamily="34" charset="-122"/>
+                <a:cs typeface="Times New Roman" pitchFamily="34" charset="-120"/>
+              </a:rPr>
+              <a:t>Expected Answer</a:t>
+            </a:r>
+            <a:endParaRPr lang="en-US" sz="3600" dirty="0"/>
+          </a:p>
+        </p:txBody>
+      </p:sp>
+      <p:sp>
+        <p:nvSpPr>
+          <p:cNvPr id="5" name="Text 2"/>
+          <p:cNvSpPr/>
+          <p:nvPr/>
+        </p:nvSpPr>
+        <p:spPr>
+          <a:xfrm>
+            <a:off x="5349240" y="1783080"/>
+            <a:ext cx="6522415" cy="4663440"/>
+          </a:xfrm>
+          <a:prstGeom prst="rect">
+            <a:avLst/>
+          </a:prstGeom>
+          <a:noFill/>
+          <a:ln/>
+        </p:spPr>
+        <p:txBody>
+          <a:bodyPr wrap="square" lIns="0" tIns="0" rIns="0" bIns="0" rtlCol="0" anchor="t"/>
+          <a:lstStyle/>
+          <a:p>
+            <a:pPr algn="l" indent="0" marL="0">
+              <a:spcAft>
+                <a:spcPts val="800"/>
+              </a:spcAft>
+              <a:buNone/>
+            </a:pPr>
+            <a:r>
+              <a:rPr lang="en-US" sz="4000" dirty="0">
+                <a:solidFill>
+                  <a:srgbClr val="111111"/>
+                </a:solidFill>
+                <a:latin typeface="Times New Roman" pitchFamily="34" charset="0"/>
+                <a:ea typeface="Times New Roman" pitchFamily="34" charset="-122"/>
+                <a:cs typeface="Times New Roman" pitchFamily="34" charset="-120"/>
+              </a:rPr>
+              <a:t>The pull (gravity) of the Moon.</a:t>
+            </a:r>
+            <a:endParaRPr lang="en-US" sz="4000" dirty="0"/>
+          </a:p>
+        </p:txBody>
+      </p:sp>
+      <p:sp>
+        <p:nvSpPr>
+          <p:cNvPr id="25" name="Slide Number Placeholder 0"/>
+          <p:cNvSpPr>
+            <a:spLocks noGrp="1"/>
+          </p:cNvSpPr>
+          <p:nvPr>
+            <p:ph type="sldNum" sz="quarter" idx="4294967295"/>
+          </p:nvPr>
+        </p:nvSpPr>
+        <p:spPr>
+          <a:xfrm>
+            <a:off x="27432" y="91440"/>
+            <a:ext cx="585216" cy="475488"/>
+          </a:xfrm>
+          <a:prstGeom prst="rect">
+            <a:avLst/>
+          </a:prstGeom>
+          <a:extLst>
+            <a:ext uri="{C572A759-6A51-4108-AA02-DFA0A04FC94B}">
+              <ma14:wrappingTextBoxFlag xmlns:ma14="http://schemas.microsoft.com/office/mac/drawingml/2011/main" val="0"/>
+            </a:ext>
+          </a:extLst>
+        </p:spPr>
+        <p:txBody>
+          <a:bodyPr/>
+          <a:lstStyle>
+            <a:lvl1pPr>
+              <a:defRPr sz="2000">
+                <a:solidFill>
+                  <a:srgbClr val="FFFFFF"/>
+                </a:solidFill>
+                <a:latin typeface="Calibri"/>
+                <a:ea typeface="Calibri"/>
+                <a:cs typeface="Calibri"/>
+              </a:defRPr>
+            </a:lvl1pPr>
+          </a:lstStyle>
+          <a:p>
+            <a:pPr algn="ctr"/>
+            <a:fld id="{F7021451-1387-4CA6-816F-3879F97B5CBC}" type="slidenum">
+              <a:rPr b="1" lang="en-US"/>
+              <a:t>50</a:t>
+            </a:fld>
+            <a:endParaRPr lang="en-US"/>
+          </a:p>
+        </p:txBody>
+      </p:sp>
+    </p:spTree>
+  </p:cSld>
+  <p:clrMapOvr>
+    <a:masterClrMapping/>
+  </p:clrMapOvr>
+</p:sld>
+</file>
+
+<file path=ppt/slides/slide51.xml><?xml version="1.0" encoding="utf-8"?>
+<p:sld xmlns:a="http://schemas.openxmlformats.org/drawingml/2006/main" xmlns:r="http://schemas.openxmlformats.org/officeDocument/2006/relationships" xmlns:p="http://schemas.openxmlformats.org/presentationml/2006/main">
+  <p:cSld name="Slide 51">
+    <p:spTree>
+      <p:nvGrpSpPr>
+        <p:cNvPr id="1" name=""/>
+        <p:cNvGrpSpPr/>
+        <p:nvPr/>
+      </p:nvGrpSpPr>
+      <p:grpSpPr>
+        <a:xfrm>
+          <a:off x="0" y="0"/>
+          <a:ext cx="0" cy="0"/>
+          <a:chOff x="0" y="0"/>
+          <a:chExt cx="0" cy="0"/>
+        </a:xfrm>
+      </p:grpSpPr>
+      <p:sp>
+        <p:nvSpPr>
+          <p:cNvPr id="2" name="Text 0"/>
+          <p:cNvSpPr/>
+          <p:nvPr/>
+        </p:nvSpPr>
+        <p:spPr>
+          <a:xfrm>
+            <a:off x="457200" y="713232"/>
+            <a:ext cx="11368735" cy="274320"/>
+          </a:xfrm>
+          <a:prstGeom prst="rect">
+            <a:avLst/>
+          </a:prstGeom>
+          <a:noFill/>
+          <a:ln/>
+        </p:spPr>
+        <p:txBody>
+          <a:bodyPr wrap="square" lIns="0" tIns="0" rIns="0" bIns="0" rtlCol="0" anchor="ctr"/>
+          <a:lstStyle/>
+          <a:p>
+            <a:pPr algn="r" indent="0" marL="0">
+              <a:buNone/>
+            </a:pPr>
+            <a:r>
+              <a:rPr lang="en-US" sz="1400" b="1" dirty="0">
+                <a:solidFill>
+                  <a:srgbClr val="1C3F6E"/>
+                </a:solidFill>
+                <a:latin typeface="Calibri" pitchFamily="34" charset="0"/>
+                <a:ea typeface="Calibri" pitchFamily="34" charset="-122"/>
+                <a:cs typeface="Calibri" pitchFamily="34" charset="-120"/>
+              </a:rPr>
+              <a:t>REMEDIATION</a:t>
+            </a:r>
+            <a:endParaRPr lang="en-US" sz="1400" dirty="0"/>
+          </a:p>
+        </p:txBody>
+      </p:sp>
+      <p:pic>
+        <p:nvPicPr>
+          <p:cNvPr id="3" name="Image 0" descr="/home/claude/f4/img/minesec_sheet.png">    </p:cNvPr>
+          <p:cNvPicPr>
+            <a:picLocks noChangeAspect="1"/>
+          </p:cNvPicPr>
+          <p:nvPr/>
+        </p:nvPicPr>
+        <p:blipFill>
+          <a:blip r:embed="rId1"/>
+          <a:stretch>
+            <a:fillRect/>
+          </a:stretch>
+        </p:blipFill>
+        <p:spPr>
+          <a:xfrm>
+            <a:off x="0" y="658368"/>
+            <a:ext cx="2468880" cy="5833872"/>
+          </a:xfrm>
+          <a:prstGeom prst="rect">
+            <a:avLst/>
+          </a:prstGeom>
+        </p:spPr>
+      </p:pic>
+      <p:sp>
+        <p:nvSpPr>
+          <p:cNvPr id="4" name="Text 1"/>
+          <p:cNvSpPr/>
+          <p:nvPr/>
+        </p:nvSpPr>
+        <p:spPr>
+          <a:xfrm>
+            <a:off x="2697480" y="1005840"/>
+            <a:ext cx="9174175" cy="731520"/>
+          </a:xfrm>
+          <a:prstGeom prst="rect">
+            <a:avLst/>
+          </a:prstGeom>
+          <a:noFill/>
+          <a:ln/>
+        </p:spPr>
+        <p:txBody>
+          <a:bodyPr wrap="square" lIns="0" tIns="0" rIns="0" bIns="0" rtlCol="0" anchor="ctr">
+            <a:normAutofit/>
+          </a:bodyPr>
+          <a:lstStyle/>
+          <a:p>
+            <a:pPr algn="ctr" indent="0" marL="0">
+              <a:buNone/>
+            </a:pPr>
+            <a:r>
+              <a:rPr lang="en-US" sz="3600" b="1" dirty="0">
+                <a:solidFill>
+                  <a:srgbClr val="990011"/>
+                </a:solidFill>
+                <a:latin typeface="Times New Roman" pitchFamily="34" charset="0"/>
+                <a:ea typeface="Times New Roman" pitchFamily="34" charset="-122"/>
+                <a:cs typeface="Times New Roman" pitchFamily="34" charset="-120"/>
+              </a:rPr>
+              <a:t>Remediation</a:t>
+            </a:r>
+            <a:endParaRPr lang="en-US" sz="3600" dirty="0"/>
+          </a:p>
+        </p:txBody>
+      </p:sp>
+      <p:sp>
+        <p:nvSpPr>
+          <p:cNvPr id="5" name="Text 2"/>
+          <p:cNvSpPr/>
+          <p:nvPr/>
+        </p:nvSpPr>
+        <p:spPr>
+          <a:xfrm>
+            <a:off x="2697480" y="1783080"/>
+            <a:ext cx="9174175" cy="4663440"/>
+          </a:xfrm>
+          <a:prstGeom prst="rect">
+            <a:avLst/>
+          </a:prstGeom>
+          <a:noFill/>
+          <a:ln/>
+        </p:spPr>
+        <p:txBody>
+          <a:bodyPr wrap="square" lIns="0" tIns="0" rIns="0" bIns="0" rtlCol="0" anchor="t"/>
+          <a:lstStyle/>
+          <a:p>
+            <a:pPr algn="l" indent="0" marL="0">
+              <a:spcAft>
+                <a:spcPts val="800"/>
+              </a:spcAft>
+              <a:buNone/>
+            </a:pPr>
+            <a:r>
+              <a:rPr lang="en-US" sz="4000" b="1" dirty="0">
+                <a:solidFill>
+                  <a:srgbClr val="111111"/>
+                </a:solidFill>
+                <a:latin typeface="Times New Roman" pitchFamily="34" charset="0"/>
+                <a:ea typeface="Times New Roman" pitchFamily="34" charset="-122"/>
+                <a:cs typeface="Times New Roman" pitchFamily="34" charset="-120"/>
+              </a:rPr>
+              <a:t>Fill in the blanks:</a:t>
+            </a:r>
+            <a:endParaRPr lang="en-US" sz="4000" dirty="0"/>
+          </a:p>
+          <a:p>
+            <a:pPr algn="l" marL="342900" indent="-342900">
+              <a:spcAft>
+                <a:spcPts val="800"/>
+              </a:spcAft>
+              <a:buSzPct val="100000"/>
+              <a:buFont typeface="+mj-lt"/>
+              <a:buAutoNum type="arabicPeriod" startAt="1"/>
+            </a:pPr>
+            <a:r>
+              <a:rPr lang="en-US" sz="4000" dirty="0">
+                <a:solidFill>
+                  <a:srgbClr val="111111"/>
+                </a:solidFill>
+                <a:latin typeface="Times New Roman" pitchFamily="34" charset="0"/>
+                <a:ea typeface="Times New Roman" pitchFamily="34" charset="-122"/>
+                <a:cs typeface="Times New Roman" pitchFamily="34" charset="-120"/>
+              </a:rPr>
+              <a:t>Our galaxy is called the ______ Way.</a:t>
+            </a:r>
+            <a:endParaRPr lang="en-US" sz="4000" dirty="0"/>
+          </a:p>
+          <a:p>
+            <a:pPr algn="l" marL="342900" indent="-342900">
+              <a:spcAft>
+                <a:spcPts val="800"/>
+              </a:spcAft>
+              <a:buSzPct val="100000"/>
+              <a:buFont typeface="+mj-lt"/>
+              <a:buAutoNum type="arabicPeriod" startAt="1"/>
+            </a:pPr>
+            <a:r>
+              <a:rPr lang="en-US" sz="4000" dirty="0">
+                <a:solidFill>
+                  <a:srgbClr val="111111"/>
+                </a:solidFill>
+                <a:latin typeface="Times New Roman" pitchFamily="34" charset="0"/>
+                <a:ea typeface="Times New Roman" pitchFamily="34" charset="-122"/>
+                <a:cs typeface="Times New Roman" pitchFamily="34" charset="-120"/>
+              </a:rPr>
+              <a:t>When we see the whole Moon, it is the ______ Moon.</a:t>
+            </a:r>
+            <a:endParaRPr lang="en-US" sz="4000" dirty="0"/>
+          </a:p>
+          <a:p>
+            <a:pPr algn="l" marL="342900" indent="-342900">
+              <a:spcAft>
+                <a:spcPts val="800"/>
+              </a:spcAft>
+              <a:buSzPct val="100000"/>
+              <a:buFont typeface="+mj-lt"/>
+              <a:buAutoNum type="arabicPeriod" startAt="1"/>
+            </a:pPr>
+            <a:r>
+              <a:rPr lang="en-US" sz="4000" dirty="0">
+                <a:solidFill>
+                  <a:srgbClr val="111111"/>
+                </a:solidFill>
+                <a:latin typeface="Times New Roman" pitchFamily="34" charset="0"/>
+                <a:ea typeface="Times New Roman" pitchFamily="34" charset="-122"/>
+                <a:cs typeface="Times New Roman" pitchFamily="34" charset="-120"/>
+              </a:rPr>
+              <a:t>The rise and fall of the sea are called ______.</a:t>
+            </a:r>
+            <a:endParaRPr lang="en-US" sz="4000" dirty="0"/>
+          </a:p>
+        </p:txBody>
+      </p:sp>
+      <p:sp>
+        <p:nvSpPr>
+          <p:cNvPr id="25" name="Slide Number Placeholder 0"/>
+          <p:cNvSpPr>
+            <a:spLocks noGrp="1"/>
+          </p:cNvSpPr>
+          <p:nvPr>
+            <p:ph type="sldNum" sz="quarter" idx="4294967295"/>
+          </p:nvPr>
+        </p:nvSpPr>
+        <p:spPr>
+          <a:xfrm>
+            <a:off x="27432" y="91440"/>
+            <a:ext cx="585216" cy="475488"/>
+          </a:xfrm>
+          <a:prstGeom prst="rect">
+            <a:avLst/>
+          </a:prstGeom>
+          <a:extLst>
+            <a:ext uri="{C572A759-6A51-4108-AA02-DFA0A04FC94B}">
+              <ma14:wrappingTextBoxFlag xmlns:ma14="http://schemas.microsoft.com/office/mac/drawingml/2011/main" val="0"/>
+            </a:ext>
+          </a:extLst>
+        </p:spPr>
+        <p:txBody>
+          <a:bodyPr/>
+          <a:lstStyle>
+            <a:lvl1pPr>
+              <a:defRPr sz="2000">
+                <a:solidFill>
+                  <a:srgbClr val="FFFFFF"/>
+                </a:solidFill>
+                <a:latin typeface="Calibri"/>
+                <a:ea typeface="Calibri"/>
+                <a:cs typeface="Calibri"/>
+              </a:defRPr>
+            </a:lvl1pPr>
+          </a:lstStyle>
+          <a:p>
+            <a:pPr algn="ctr"/>
+            <a:fld id="{F7021451-1387-4CA6-816F-3879F97B5CBC}" type="slidenum">
+              <a:rPr b="1" lang="en-US"/>
+              <a:t>51</a:t>
+            </a:fld>
+            <a:endParaRPr lang="en-US"/>
+          </a:p>
+        </p:txBody>
+      </p:sp>
+    </p:spTree>
+  </p:cSld>
+  <p:clrMapOvr>
+    <a:masterClrMapping/>
+  </p:clrMapOvr>
+</p:sld>
+</file>
+
+<file path=ppt/slides/slide52.xml><?xml version="1.0" encoding="utf-8"?>
+<p:sld xmlns:a="http://schemas.openxmlformats.org/drawingml/2006/main" xmlns:r="http://schemas.openxmlformats.org/officeDocument/2006/relationships" xmlns:p="http://schemas.openxmlformats.org/presentationml/2006/main">
+  <p:cSld name="Slide 52">
+    <p:spTree>
+      <p:nvGrpSpPr>
+        <p:cNvPr id="1" name=""/>
+        <p:cNvGrpSpPr/>
+        <p:nvPr/>
+      </p:nvGrpSpPr>
+      <p:grpSpPr>
+        <a:xfrm>
+          <a:off x="0" y="0"/>
+          <a:ext cx="0" cy="0"/>
+          <a:chOff x="0" y="0"/>
+          <a:chExt cx="0" cy="0"/>
+        </a:xfrm>
+      </p:grpSpPr>
+      <p:sp>
+        <p:nvSpPr>
+          <p:cNvPr id="2" name="Text 0"/>
+          <p:cNvSpPr/>
+          <p:nvPr/>
+        </p:nvSpPr>
+        <p:spPr>
+          <a:xfrm>
+            <a:off x="457200" y="713232"/>
+            <a:ext cx="11368735" cy="274320"/>
+          </a:xfrm>
+          <a:prstGeom prst="rect">
+            <a:avLst/>
+          </a:prstGeom>
+          <a:noFill/>
+          <a:ln/>
+        </p:spPr>
+        <p:txBody>
+          <a:bodyPr wrap="square" lIns="0" tIns="0" rIns="0" bIns="0" rtlCol="0" anchor="ctr"/>
+          <a:lstStyle/>
+          <a:p>
+            <a:pPr algn="r" indent="0" marL="0">
+              <a:buNone/>
+            </a:pPr>
+            <a:r>
+              <a:rPr lang="en-US" sz="1400" b="1" dirty="0">
+                <a:solidFill>
+                  <a:srgbClr val="1C3F6E"/>
+                </a:solidFill>
+                <a:latin typeface="Calibri" pitchFamily="34" charset="0"/>
+                <a:ea typeface="Calibri" pitchFamily="34" charset="-122"/>
+                <a:cs typeface="Calibri" pitchFamily="34" charset="-120"/>
+              </a:rPr>
+              <a:t>HOMEWORK</a:t>
+            </a:r>
+            <a:endParaRPr lang="en-US" sz="1400" dirty="0"/>
+          </a:p>
+        </p:txBody>
+      </p:sp>
+      <p:pic>
+        <p:nvPicPr>
+          <p:cNvPr id="3" name="Image 0" descr="/home/claude/f4/img/minesec_sheet.png">    </p:cNvPr>
+          <p:cNvPicPr>
+            <a:picLocks noChangeAspect="1"/>
+          </p:cNvPicPr>
+          <p:nvPr/>
+        </p:nvPicPr>
+        <p:blipFill>
+          <a:blip r:embed="rId1"/>
+          <a:stretch>
+            <a:fillRect/>
+          </a:stretch>
+        </p:blipFill>
+        <p:spPr>
+          <a:xfrm>
+            <a:off x="0" y="658368"/>
+            <a:ext cx="5120640" cy="5833872"/>
+          </a:xfrm>
+          <a:prstGeom prst="rect">
+            <a:avLst/>
+          </a:prstGeom>
+        </p:spPr>
+      </p:pic>
+      <p:sp>
+        <p:nvSpPr>
+          <p:cNvPr id="4" name="Text 1"/>
+          <p:cNvSpPr/>
+          <p:nvPr/>
+        </p:nvSpPr>
+        <p:spPr>
+          <a:xfrm>
+            <a:off x="5349240" y="1005840"/>
+            <a:ext cx="6522415" cy="731520"/>
+          </a:xfrm>
+          <a:prstGeom prst="rect">
+            <a:avLst/>
+          </a:prstGeom>
+          <a:noFill/>
+          <a:ln/>
+        </p:spPr>
+        <p:txBody>
+          <a:bodyPr wrap="square" lIns="0" tIns="0" rIns="0" bIns="0" rtlCol="0" anchor="ctr">
+            <a:normAutofit/>
+          </a:bodyPr>
+          <a:lstStyle/>
+          <a:p>
+            <a:pPr algn="ctr" indent="0" marL="0">
+              <a:buNone/>
+            </a:pPr>
+            <a:r>
+              <a:rPr lang="en-US" sz="3600" b="1" dirty="0">
+                <a:solidFill>
+                  <a:srgbClr val="990011"/>
+                </a:solidFill>
+                <a:latin typeface="Times New Roman" pitchFamily="34" charset="0"/>
+                <a:ea typeface="Times New Roman" pitchFamily="34" charset="-122"/>
+                <a:cs typeface="Times New Roman" pitchFamily="34" charset="-120"/>
+              </a:rPr>
+              <a:t>Homework</a:t>
+            </a:r>
+            <a:endParaRPr lang="en-US" sz="3600" dirty="0"/>
+          </a:p>
+        </p:txBody>
+      </p:sp>
+      <p:sp>
+        <p:nvSpPr>
+          <p:cNvPr id="5" name="Text 2"/>
+          <p:cNvSpPr/>
+          <p:nvPr/>
+        </p:nvSpPr>
+        <p:spPr>
+          <a:xfrm>
+            <a:off x="5349240" y="1783080"/>
+            <a:ext cx="6522415" cy="4663440"/>
+          </a:xfrm>
+          <a:prstGeom prst="rect">
+            <a:avLst/>
+          </a:prstGeom>
+          <a:noFill/>
+          <a:ln/>
+        </p:spPr>
+        <p:txBody>
+          <a:bodyPr wrap="square" lIns="0" tIns="0" rIns="0" bIns="0" rtlCol="0" anchor="t"/>
+          <a:lstStyle/>
+          <a:p>
+            <a:pPr algn="l" indent="0" marL="0">
+              <a:spcAft>
+                <a:spcPts val="800"/>
+              </a:spcAft>
+              <a:buNone/>
+            </a:pPr>
+            <a:r>
+              <a:rPr lang="en-US" sz="4000" dirty="0">
+                <a:solidFill>
+                  <a:srgbClr val="111111"/>
+                </a:solidFill>
+                <a:latin typeface="Times New Roman" pitchFamily="34" charset="0"/>
+                <a:ea typeface="Times New Roman" pitchFamily="34" charset="-122"/>
+                <a:cs typeface="Times New Roman" pitchFamily="34" charset="-120"/>
+              </a:rPr>
+              <a:t>Look at a map of Cameroon in your atlas. Find the numbers written on the edges of the map and copy the numbers written near Garoua.</a:t>
+            </a:r>
+            <a:endParaRPr lang="en-US" sz="4000" dirty="0"/>
+          </a:p>
+        </p:txBody>
+      </p:sp>
+      <p:sp>
+        <p:nvSpPr>
+          <p:cNvPr id="25" name="Slide Number Placeholder 0"/>
+          <p:cNvSpPr>
+            <a:spLocks noGrp="1"/>
+          </p:cNvSpPr>
+          <p:nvPr>
+            <p:ph type="sldNum" sz="quarter" idx="4294967295"/>
+          </p:nvPr>
+        </p:nvSpPr>
+        <p:spPr>
+          <a:xfrm>
+            <a:off x="27432" y="91440"/>
+            <a:ext cx="585216" cy="475488"/>
+          </a:xfrm>
+          <a:prstGeom prst="rect">
+            <a:avLst/>
+          </a:prstGeom>
+          <a:extLst>
+            <a:ext uri="{C572A759-6A51-4108-AA02-DFA0A04FC94B}">
+              <ma14:wrappingTextBoxFlag xmlns:ma14="http://schemas.microsoft.com/office/mac/drawingml/2011/main" val="0"/>
+            </a:ext>
+          </a:extLst>
+        </p:spPr>
+        <p:txBody>
+          <a:bodyPr/>
+          <a:lstStyle>
+            <a:lvl1pPr>
+              <a:defRPr sz="2000">
+                <a:solidFill>
+                  <a:srgbClr val="FFFFFF"/>
+                </a:solidFill>
+                <a:latin typeface="Calibri"/>
+                <a:ea typeface="Calibri"/>
+                <a:cs typeface="Calibri"/>
+              </a:defRPr>
+            </a:lvl1pPr>
+          </a:lstStyle>
+          <a:p>
+            <a:pPr algn="ctr"/>
+            <a:fld id="{F7021451-1387-4CA6-816F-3879F97B5CBC}" type="slidenum">
+              <a:rPr b="1" lang="en-US"/>
+              <a:t>52</a:t>
+            </a:fld>
+            <a:endParaRPr lang="en-US"/>
+          </a:p>
+        </p:txBody>
+      </p:sp>
+    </p:spTree>
+  </p:cSld>
+  <p:clrMapOvr>
+    <a:masterClrMapping/>
+  </p:clrMapOvr>
+</p:sld>
+</file>
+
+<file path=ppt/slides/slide53.xml><?xml version="1.0" encoding="utf-8"?>
+<p:sld xmlns:a="http://schemas.openxmlformats.org/drawingml/2006/main" xmlns:r="http://schemas.openxmlformats.org/officeDocument/2006/relationships" xmlns:p="http://schemas.openxmlformats.org/presentationml/2006/main">
+  <p:cSld name="Slide 53">
+    <p:spTree>
+      <p:nvGrpSpPr>
+        <p:cNvPr id="1" name=""/>
+        <p:cNvGrpSpPr/>
+        <p:nvPr/>
+      </p:nvGrpSpPr>
+      <p:grpSpPr>
+        <a:xfrm>
+          <a:off x="0" y="0"/>
+          <a:ext cx="0" cy="0"/>
+          <a:chOff x="0" y="0"/>
+          <a:chExt cx="0" cy="0"/>
+        </a:xfrm>
+      </p:grpSpPr>
+      <p:sp>
+        <p:nvSpPr>
+          <p:cNvPr id="2" name="Text 0"/>
+          <p:cNvSpPr/>
+          <p:nvPr/>
+        </p:nvSpPr>
+        <p:spPr>
+          <a:xfrm>
+            <a:off x="457200" y="713232"/>
+            <a:ext cx="11368735" cy="274320"/>
+          </a:xfrm>
+          <a:prstGeom prst="rect">
+            <a:avLst/>
+          </a:prstGeom>
+          <a:noFill/>
+          <a:ln/>
+        </p:spPr>
+        <p:txBody>
+          <a:bodyPr wrap="square" lIns="0" tIns="0" rIns="0" bIns="0" rtlCol="0" anchor="ctr"/>
+          <a:lstStyle/>
+          <a:p>
+            <a:pPr algn="r" indent="0" marL="0">
+              <a:buNone/>
+            </a:pPr>
+            <a:r>
+              <a:rPr lang="en-US" sz="1400" b="1" dirty="0">
+                <a:solidFill>
+                  <a:srgbClr val="1C3F6E"/>
+                </a:solidFill>
+                <a:latin typeface="Calibri" pitchFamily="34" charset="0"/>
+                <a:ea typeface="Calibri" pitchFamily="34" charset="-122"/>
+                <a:cs typeface="Calibri" pitchFamily="34" charset="-120"/>
+              </a:rPr>
+              <a:t>NEXT LESSON</a:t>
+            </a:r>
+            <a:endParaRPr lang="en-US" sz="1400" dirty="0"/>
+          </a:p>
+        </p:txBody>
+      </p:sp>
+      <p:pic>
+        <p:nvPicPr>
+          <p:cNvPr id="3" name="Image 0" descr="/home/claude/f4/img/minesec_sheet.png">    </p:cNvPr>
+          <p:cNvPicPr>
+            <a:picLocks noChangeAspect="1"/>
+          </p:cNvPicPr>
+          <p:nvPr/>
+        </p:nvPicPr>
+        <p:blipFill>
+          <a:blip r:embed="rId1"/>
+          <a:stretch>
+            <a:fillRect/>
+          </a:stretch>
+        </p:blipFill>
+        <p:spPr>
+          <a:xfrm>
+            <a:off x="0" y="658368"/>
+            <a:ext cx="5120640" cy="5833872"/>
+          </a:xfrm>
+          <a:prstGeom prst="rect">
+            <a:avLst/>
+          </a:prstGeom>
+        </p:spPr>
+      </p:pic>
+      <p:sp>
+        <p:nvSpPr>
+          <p:cNvPr id="4" name="Text 1"/>
+          <p:cNvSpPr/>
+          <p:nvPr/>
+        </p:nvSpPr>
+        <p:spPr>
+          <a:xfrm>
+            <a:off x="5349240" y="1005840"/>
+            <a:ext cx="6522415" cy="731520"/>
+          </a:xfrm>
+          <a:prstGeom prst="rect">
+            <a:avLst/>
+          </a:prstGeom>
+          <a:noFill/>
+          <a:ln/>
+        </p:spPr>
+        <p:txBody>
+          <a:bodyPr wrap="square" lIns="0" tIns="0" rIns="0" bIns="0" rtlCol="0" anchor="ctr">
+            <a:normAutofit/>
+          </a:bodyPr>
+          <a:lstStyle/>
+          <a:p>
+            <a:pPr algn="ctr" indent="0" marL="0">
+              <a:buNone/>
+            </a:pPr>
+            <a:r>
+              <a:rPr lang="en-US" sz="3600" b="1" dirty="0">
+                <a:solidFill>
+                  <a:srgbClr val="990011"/>
+                </a:solidFill>
+                <a:latin typeface="Times New Roman" pitchFamily="34" charset="0"/>
+                <a:ea typeface="Times New Roman" pitchFamily="34" charset="-122"/>
+                <a:cs typeface="Times New Roman" pitchFamily="34" charset="-120"/>
+              </a:rPr>
+              <a:t>Next Lesson</a:t>
+            </a:r>
+            <a:endParaRPr lang="en-US" sz="3600" dirty="0"/>
+          </a:p>
+        </p:txBody>
+      </p:sp>
+      <p:sp>
+        <p:nvSpPr>
+          <p:cNvPr id="5" name="Text 2"/>
+          <p:cNvSpPr/>
+          <p:nvPr/>
+        </p:nvSpPr>
+        <p:spPr>
+          <a:xfrm>
+            <a:off x="5349240" y="1783080"/>
+            <a:ext cx="6522415" cy="4663440"/>
+          </a:xfrm>
+          <a:prstGeom prst="rect">
+            <a:avLst/>
+          </a:prstGeom>
+          <a:noFill/>
+          <a:ln/>
+        </p:spPr>
+        <p:txBody>
+          <a:bodyPr wrap="square" lIns="0" tIns="0" rIns="0" bIns="0" rtlCol="0" anchor="ctr"/>
+          <a:lstStyle/>
+          <a:p>
+            <a:pPr algn="ctr" indent="0" marL="0">
+              <a:spcAft>
+                <a:spcPts val="800"/>
+              </a:spcAft>
+              <a:buNone/>
+            </a:pPr>
+            <a:r>
+              <a:rPr lang="en-US" sz="4000" b="1" dirty="0">
+                <a:solidFill>
+                  <a:srgbClr val="111111"/>
+                </a:solidFill>
+                <a:latin typeface="Times New Roman" pitchFamily="34" charset="0"/>
+                <a:ea typeface="Times New Roman" pitchFamily="34" charset="-122"/>
+                <a:cs typeface="Times New Roman" pitchFamily="34" charset="-120"/>
+              </a:rPr>
+              <a:t>Our next lesson will be on:</a:t>
+            </a:r>
+            <a:endParaRPr lang="en-US" sz="4000" dirty="0"/>
+          </a:p>
+          <a:p>
+            <a:pPr algn="ctr" indent="0" marL="0">
+              <a:spcAft>
+                <a:spcPts val="800"/>
+              </a:spcAft>
+              <a:buNone/>
+            </a:pPr>
+            <a:r>
+              <a:rPr lang="en-US" sz="4000" b="1" dirty="0">
+                <a:solidFill>
+                  <a:srgbClr val="990011"/>
+                </a:solidFill>
+                <a:latin typeface="Times New Roman" pitchFamily="34" charset="0"/>
+                <a:ea typeface="Times New Roman" pitchFamily="34" charset="-122"/>
+                <a:cs typeface="Times New Roman" pitchFamily="34" charset="-120"/>
+              </a:rPr>
+              <a:t>Lesson 2: Earth Divisions: Latitudes and Longitudes</a:t>
+            </a:r>
+            <a:endParaRPr lang="en-US" sz="4000" dirty="0"/>
+          </a:p>
+        </p:txBody>
+      </p:sp>
+      <p:sp>
+        <p:nvSpPr>
+          <p:cNvPr id="25" name="Slide Number Placeholder 0"/>
+          <p:cNvSpPr>
+            <a:spLocks noGrp="1"/>
+          </p:cNvSpPr>
+          <p:nvPr>
+            <p:ph type="sldNum" sz="quarter" idx="4294967295"/>
+          </p:nvPr>
+        </p:nvSpPr>
+        <p:spPr>
+          <a:xfrm>
+            <a:off x="27432" y="91440"/>
+            <a:ext cx="585216" cy="475488"/>
+          </a:xfrm>
+          <a:prstGeom prst="rect">
+            <a:avLst/>
+          </a:prstGeom>
+          <a:extLst>
+            <a:ext uri="{C572A759-6A51-4108-AA02-DFA0A04FC94B}">
+              <ma14:wrappingTextBoxFlag xmlns:ma14="http://schemas.microsoft.com/office/mac/drawingml/2011/main" val="0"/>
+            </a:ext>
+          </a:extLst>
+        </p:spPr>
+        <p:txBody>
+          <a:bodyPr/>
+          <a:lstStyle>
+            <a:lvl1pPr>
+              <a:defRPr sz="2000">
+                <a:solidFill>
+                  <a:srgbClr val="FFFFFF"/>
+                </a:solidFill>
+                <a:latin typeface="Calibri"/>
+                <a:ea typeface="Calibri"/>
+                <a:cs typeface="Calibri"/>
+              </a:defRPr>
+            </a:lvl1pPr>
+          </a:lstStyle>
+          <a:p>
+            <a:pPr algn="ctr"/>
+            <a:fld id="{F7021451-1387-4CA6-816F-3879F97B5CBC}" type="slidenum">
+              <a:rPr b="1" lang="en-US"/>
+              <a:t>53</a:t>
+            </a:fld>
+            <a:endParaRPr lang="en-US"/>
+          </a:p>
+        </p:txBody>
+      </p:sp>
+    </p:spTree>
+  </p:cSld>
+  <p:clrMapOvr>
+    <a:masterClrMapping/>
+  </p:clrMapOvr>
+</p:sld>
+</file>
+
+<file path=ppt/slides/slide54.xml><?xml version="1.0" encoding="utf-8"?>
+<p:sld xmlns:a="http://schemas.openxmlformats.org/drawingml/2006/main" xmlns:r="http://schemas.openxmlformats.org/officeDocument/2006/relationships" xmlns:p="http://schemas.openxmlformats.org/presentationml/2006/main">
+  <p:cSld name="Slide 54">
+    <p:spTree>
+      <p:nvGrpSpPr>
+        <p:cNvPr id="1" name=""/>
+        <p:cNvGrpSpPr/>
+        <p:nvPr/>
+      </p:nvGrpSpPr>
+      <p:grpSpPr>
+        <a:xfrm>
+          <a:off x="0" y="0"/>
+          <a:ext cx="0" cy="0"/>
+          <a:chOff x="0" y="0"/>
+          <a:chExt cx="0" cy="0"/>
+        </a:xfrm>
+      </p:grpSpPr>
+      <p:sp>
+        <p:nvSpPr>
+          <p:cNvPr id="2" name="Text 0"/>
+          <p:cNvSpPr/>
+          <p:nvPr/>
+        </p:nvSpPr>
+        <p:spPr>
+          <a:xfrm>
+            <a:off x="457200" y="713232"/>
+            <a:ext cx="11368735" cy="274320"/>
+          </a:xfrm>
+          <a:prstGeom prst="rect">
+            <a:avLst/>
+          </a:prstGeom>
+          <a:noFill/>
+          <a:ln/>
+        </p:spPr>
+        <p:txBody>
+          <a:bodyPr wrap="square" lIns="0" tIns="0" rIns="0" bIns="0" rtlCol="0" anchor="ctr"/>
+          <a:lstStyle/>
+          <a:p>
+            <a:pPr algn="r" indent="0" marL="0">
+              <a:buNone/>
+            </a:pPr>
+            <a:r>
+              <a:rPr lang="en-US" sz="1400" b="1" dirty="0">
+                <a:solidFill>
+                  <a:srgbClr val="1C3F6E"/>
+                </a:solidFill>
+                <a:latin typeface="Calibri" pitchFamily="34" charset="0"/>
+                <a:ea typeface="Calibri" pitchFamily="34" charset="-122"/>
+                <a:cs typeface="Calibri" pitchFamily="34" charset="-120"/>
+              </a:rPr>
+              <a:t>BILINGUAL GAME</a:t>
+            </a:r>
+            <a:endParaRPr lang="en-US" sz="1400" dirty="0"/>
+          </a:p>
+        </p:txBody>
+      </p:sp>
+      <p:sp>
+        <p:nvSpPr>
+          <p:cNvPr id="3" name="Text 1"/>
+          <p:cNvSpPr/>
+          <p:nvPr/>
+        </p:nvSpPr>
+        <p:spPr>
+          <a:xfrm>
+            <a:off x="457200" y="1005840"/>
+            <a:ext cx="11277295" cy="731520"/>
+          </a:xfrm>
+          <a:prstGeom prst="rect">
+            <a:avLst/>
+          </a:prstGeom>
+          <a:noFill/>
+          <a:ln/>
+        </p:spPr>
+        <p:txBody>
+          <a:bodyPr wrap="square" lIns="0" tIns="0" rIns="0" bIns="0" rtlCol="0" anchor="ctr"/>
+          <a:lstStyle/>
+          <a:p>
+            <a:pPr algn="ctr" indent="0" marL="0">
+              <a:buNone/>
+            </a:pPr>
+            <a:r>
+              <a:rPr lang="en-US" sz="3600" b="1" dirty="0">
+                <a:solidFill>
+                  <a:srgbClr val="990011"/>
+                </a:solidFill>
+                <a:latin typeface="Times New Roman" pitchFamily="34" charset="0"/>
+                <a:ea typeface="Times New Roman" pitchFamily="34" charset="-122"/>
+                <a:cs typeface="Times New Roman" pitchFamily="34" charset="-120"/>
+              </a:rPr>
               <a:t>Bilingual Game (Jeu Bilingue)</a:t>
             </a:r>
             <a:endParaRPr lang="en-US" sz="3600" dirty="0"/>
@@ -15948,7 +20227,7 @@
       </p:sp>
       <p:graphicFrame>
         <p:nvGraphicFramePr>
-          <p:cNvPr id="45" name="Table 0"/>
+          <p:cNvPr id="55" name="Table 0"/>
           <p:cNvGraphicFramePr>
             <a:graphicFrameLocks noGrp="1"/>
           </p:cNvGraphicFramePr>
@@ -17260,7 +21539,7 @@
             <a:pPr algn="ctr"/>
             <a:fld id="{F7021451-1387-4CA6-816F-3879F97B5CBC}" type="slidenum">
               <a:rPr b="1" lang="en-US"/>
-              <a:t>44</a:t>
+              <a:t>54</a:t>
             </a:fld>
             <a:endParaRPr lang="en-US"/>
           </a:p>
@@ -17274,9 +21553,9 @@
 </p:sld>
 </file>
 
-<file path=ppt/slides/slide45.xml><?xml version="1.0" encoding="utf-8"?>
+<file path=ppt/slides/slide55.xml><?xml version="1.0" encoding="utf-8"?>
 <p:sld xmlns:a="http://schemas.openxmlformats.org/drawingml/2006/main" xmlns:r="http://schemas.openxmlformats.org/officeDocument/2006/relationships" xmlns:p="http://schemas.openxmlformats.org/presentationml/2006/main">
-  <p:cSld name="Slide 45">
+  <p:cSld name="Slide 55">
     <p:spTree>
       <p:nvGrpSpPr>
         <p:cNvPr id="1" name=""/>
@@ -17371,7 +21650,7 @@
       </p:sp>
       <p:graphicFrame>
         <p:nvGraphicFramePr>
-          <p:cNvPr id="46" name="Table 0"/>
+          <p:cNvPr id="56" name="Table 0"/>
           <p:cNvGraphicFramePr>
             <a:graphicFrameLocks noGrp="1"/>
           </p:cNvGraphicFramePr>
@@ -17993,7 +22272,7 @@
             <a:pPr algn="ctr"/>
             <a:fld id="{F7021451-1387-4CA6-816F-3879F97B5CBC}" type="slidenum">
               <a:rPr b="1" lang="en-US"/>
-              <a:t>45</a:t>
+              <a:t>55</a:t>
             </a:fld>
             <a:endParaRPr lang="en-US"/>
           </a:p>
@@ -18007,9 +22286,9 @@
 </p:sld>
 </file>
 
-<file path=ppt/slides/slide46.xml><?xml version="1.0" encoding="utf-8"?>
+<file path=ppt/slides/slide56.xml><?xml version="1.0" encoding="utf-8"?>
 <p:sld xmlns:a="http://schemas.openxmlformats.org/drawingml/2006/main" xmlns:r="http://schemas.openxmlformats.org/officeDocument/2006/relationships" xmlns:p="http://schemas.openxmlformats.org/presentationml/2006/main">
-  <p:cSld name="Slide 46">
+  <p:cSld name="Slide 56">
     <p:spTree>
       <p:nvGrpSpPr>
         <p:cNvPr id="1" name=""/>
@@ -18104,7 +22383,7 @@
       </p:sp>
       <p:graphicFrame>
         <p:nvGraphicFramePr>
-          <p:cNvPr id="47" name="Table 0"/>
+          <p:cNvPr id="57" name="Table 0"/>
           <p:cNvGraphicFramePr>
             <a:graphicFrameLocks noGrp="1"/>
           </p:cNvGraphicFramePr>
@@ -18214,7 +22493,7 @@
                           <a:ea typeface="Calibri" pitchFamily="34" charset="-122"/>
                           <a:cs typeface="Calibri" pitchFamily="34" charset="-120"/>
                         </a:rPr>
-                        <a:t>Meaning; Composition; The Phases of the Moon; Impacts of the Moon.</a:t>
+                        <a:t>DEFINITIONS; Composition of the Universe; Links with the Planet Earth; The Phases of the Moon; Impacts on the Natural Environment; Impacts on Human Activities.</a:t>
                       </a:r>
                       <a:endParaRPr lang="en-US" sz="1600" dirty="0">
                         <a:latin typeface="Calibri" charset="0"/>
@@ -18864,7 +23143,7 @@
             <a:pPr algn="ctr"/>
             <a:fld id="{F7021451-1387-4CA6-816F-3879F97B5CBC}" type="slidenum">
               <a:rPr b="1" lang="en-US"/>
-              <a:t>46</a:t>
+              <a:t>56</a:t>
             </a:fld>
             <a:endParaRPr lang="en-US"/>
           </a:p>
@@ -18878,9 +23157,9 @@
 </p:sld>
 </file>
 
-<file path=ppt/slides/slide47.xml><?xml version="1.0" encoding="utf-8"?>
+<file path=ppt/slides/slide57.xml><?xml version="1.0" encoding="utf-8"?>
 <p:sld xmlns:a="http://schemas.openxmlformats.org/drawingml/2006/main" xmlns:r="http://schemas.openxmlformats.org/officeDocument/2006/relationships" xmlns:p="http://schemas.openxmlformats.org/presentationml/2006/main">
-  <p:cSld name="Slide 47">
+  <p:cSld name="Slide 57">
     <p:spTree>
       <p:nvGrpSpPr>
         <p:cNvPr id="1" name=""/>
@@ -19099,7 +23378,7 @@
                 <a:ea typeface="Calibri" pitchFamily="34" charset="-122"/>
                 <a:cs typeface="Calibri" pitchFamily="34" charset="-120"/>
               </a:rPr>
-              <a:t>Without the projector (Activity 2): use a ball and a torch: move the ball around a learner's head.</a:t>
+              <a:t>Without the projector (Activity 2): move a ball around a learner's head in front of a torch.</a:t>
             </a:r>
             <a:endParaRPr lang="en-US" sz="2000" dirty="0"/>
           </a:p>
@@ -19168,7 +23447,7 @@
             <a:pPr algn="ctr"/>
             <a:fld id="{F7021451-1387-4CA6-816F-3879F97B5CBC}" type="slidenum">
               <a:rPr b="1" lang="en-US"/>
-              <a:t>47</a:t>
+              <a:t>57</a:t>
             </a:fld>
             <a:endParaRPr lang="en-US"/>
           </a:p>
@@ -19182,9 +23461,9 @@
 </p:sld>
 </file>
 
-<file path=ppt/slides/slide48.xml><?xml version="1.0" encoding="utf-8"?>
+<file path=ppt/slides/slide58.xml><?xml version="1.0" encoding="utf-8"?>
 <p:sld xmlns:a="http://schemas.openxmlformats.org/drawingml/2006/main" xmlns:r="http://schemas.openxmlformats.org/officeDocument/2006/relationships" xmlns:p="http://schemas.openxmlformats.org/presentationml/2006/main">
-  <p:cSld name="Slide 48">
+  <p:cSld name="Slide 58">
     <p:spTree>
       <p:nvGrpSpPr>
         <p:cNvPr id="1" name=""/>
@@ -19472,226 +23751,7 @@
             <a:pPr algn="ctr"/>
             <a:fld id="{F7021451-1387-4CA6-816F-3879F97B5CBC}" type="slidenum">
               <a:rPr b="1" lang="en-US"/>
-              <a:t>48</a:t>
-            </a:fld>
-            <a:endParaRPr lang="en-US"/>
-          </a:p>
-        </p:txBody>
-      </p:sp>
-    </p:spTree>
-  </p:cSld>
-  <p:clrMapOvr>
-    <a:masterClrMapping/>
-  </p:clrMapOvr>
-</p:sld>
-</file>
-
-<file path=ppt/slides/slide5.xml><?xml version="1.0" encoding="utf-8"?>
-<p:sld xmlns:a="http://schemas.openxmlformats.org/drawingml/2006/main" xmlns:r="http://schemas.openxmlformats.org/officeDocument/2006/relationships" xmlns:p="http://schemas.openxmlformats.org/presentationml/2006/main">
-  <p:cSld name="Slide 5">
-    <p:spTree>
-      <p:nvGrpSpPr>
-        <p:cNvPr id="1" name=""/>
-        <p:cNvGrpSpPr/>
-        <p:nvPr/>
-      </p:nvGrpSpPr>
-      <p:grpSpPr>
-        <a:xfrm>
-          <a:off x="0" y="0"/>
-          <a:ext cx="0" cy="0"/>
-          <a:chOff x="0" y="0"/>
-          <a:chExt cx="0" cy="0"/>
-        </a:xfrm>
-      </p:grpSpPr>
-      <p:sp>
-        <p:nvSpPr>
-          <p:cNvPr id="2" name="Text 0"/>
-          <p:cNvSpPr/>
-          <p:nvPr/>
-        </p:nvSpPr>
-        <p:spPr>
-          <a:xfrm>
-            <a:off x="457200" y="713232"/>
-            <a:ext cx="11368735" cy="274320"/>
-          </a:xfrm>
-          <a:prstGeom prst="rect">
-            <a:avLst/>
-          </a:prstGeom>
-          <a:noFill/>
-          <a:ln/>
-        </p:spPr>
-        <p:txBody>
-          <a:bodyPr wrap="square" lIns="0" tIns="0" rIns="0" bIns="0" rtlCol="0" anchor="ctr"/>
-          <a:lstStyle/>
-          <a:p>
-            <a:pPr algn="r" indent="0" marL="0">
-              <a:buNone/>
-            </a:pPr>
-            <a:r>
-              <a:rPr lang="en-US" sz="1400" b="1" dirty="0">
-                <a:solidFill>
-                  <a:srgbClr val="1C3F6E"/>
-                </a:solidFill>
-                <a:latin typeface="Calibri" pitchFamily="34" charset="0"/>
-                <a:ea typeface="Calibri" pitchFamily="34" charset="-122"/>
-                <a:cs typeface="Calibri" pitchFamily="34" charset="-120"/>
-              </a:rPr>
-              <a:t>HOMEWORK CORRECTION</a:t>
-            </a:r>
-            <a:endParaRPr lang="en-US" sz="1400" dirty="0"/>
-          </a:p>
-        </p:txBody>
-      </p:sp>
-      <p:pic>
-        <p:nvPicPr>
-          <p:cNvPr id="3" name="Image 0" descr="/home/claude/f4/img/minesec_sheet.png">    </p:cNvPr>
-          <p:cNvPicPr>
-            <a:picLocks noChangeAspect="1"/>
-          </p:cNvPicPr>
-          <p:nvPr/>
-        </p:nvPicPr>
-        <p:blipFill>
-          <a:blip r:embed="rId1"/>
-          <a:stretch>
-            <a:fillRect/>
-          </a:stretch>
-        </p:blipFill>
-        <p:spPr>
-          <a:xfrm>
-            <a:off x="0" y="658368"/>
-            <a:ext cx="5120640" cy="5833872"/>
-          </a:xfrm>
-          <a:prstGeom prst="rect">
-            <a:avLst/>
-          </a:prstGeom>
-        </p:spPr>
-      </p:pic>
-      <p:sp>
-        <p:nvSpPr>
-          <p:cNvPr id="4" name="Text 1"/>
-          <p:cNvSpPr/>
-          <p:nvPr/>
-        </p:nvSpPr>
-        <p:spPr>
-          <a:xfrm>
-            <a:off x="5349240" y="1005840"/>
-            <a:ext cx="6522415" cy="731520"/>
-          </a:xfrm>
-          <a:prstGeom prst="rect">
-            <a:avLst/>
-          </a:prstGeom>
-          <a:noFill/>
-          <a:ln/>
-        </p:spPr>
-        <p:txBody>
-          <a:bodyPr wrap="square" lIns="0" tIns="0" rIns="0" bIns="0" rtlCol="0" anchor="ctr">
-            <a:normAutofit/>
-          </a:bodyPr>
-          <a:lstStyle/>
-          <a:p>
-            <a:pPr algn="ctr" indent="0" marL="0">
-              <a:buNone/>
-            </a:pPr>
-            <a:r>
-              <a:rPr lang="en-US" sz="3600" b="1" dirty="0">
-                <a:solidFill>
-                  <a:srgbClr val="990011"/>
-                </a:solidFill>
-                <a:latin typeface="Times New Roman" pitchFamily="34" charset="0"/>
-                <a:ea typeface="Times New Roman" pitchFamily="34" charset="-122"/>
-                <a:cs typeface="Times New Roman" pitchFamily="34" charset="-120"/>
-              </a:rPr>
-              <a:t>Correction: Possible Answer</a:t>
-            </a:r>
-            <a:endParaRPr lang="en-US" sz="3600" dirty="0"/>
-          </a:p>
-        </p:txBody>
-      </p:sp>
-      <p:sp>
-        <p:nvSpPr>
-          <p:cNvPr id="5" name="Text 2"/>
-          <p:cNvSpPr/>
-          <p:nvPr/>
-        </p:nvSpPr>
-        <p:spPr>
-          <a:xfrm>
-            <a:off x="5349240" y="1783080"/>
-            <a:ext cx="6522415" cy="4663440"/>
-          </a:xfrm>
-          <a:prstGeom prst="rect">
-            <a:avLst/>
-          </a:prstGeom>
-          <a:noFill/>
-          <a:ln/>
-        </p:spPr>
-        <p:txBody>
-          <a:bodyPr wrap="square" lIns="0" tIns="0" rIns="0" bIns="0" rtlCol="0" anchor="t"/>
-          <a:lstStyle/>
-          <a:p>
-            <a:pPr algn="l" indent="0" marL="0">
-              <a:spcAft>
-                <a:spcPts val="800"/>
-              </a:spcAft>
-              <a:buNone/>
-            </a:pPr>
-            <a:r>
-              <a:rPr lang="en-US" sz="4000" dirty="0">
-                <a:solidFill>
-                  <a:srgbClr val="111111"/>
-                </a:solidFill>
-                <a:latin typeface="Times New Roman" pitchFamily="34" charset="0"/>
-                <a:ea typeface="Times New Roman" pitchFamily="34" charset="-122"/>
-                <a:cs typeface="Times New Roman" pitchFamily="34" charset="-120"/>
-              </a:rPr>
-              <a:t>The drawings should show the Moon changing shape: for example a thin crescent, then a half Moon, then a nearly full Moon, each with its date.</a:t>
-            </a:r>
-            <a:endParaRPr lang="en-US" sz="4000" dirty="0"/>
-          </a:p>
-        </p:txBody>
-      </p:sp>
-      <p:sp>
-        <p:nvSpPr>
-          <p:cNvPr id="25" name="Slide Number Placeholder 0"/>
-          <p:cNvSpPr>
-            <a:spLocks noGrp="1"/>
-          </p:cNvSpPr>
-          <p:nvPr>
-            <p:ph type="sldNum" sz="quarter" idx="4294967295"/>
-          </p:nvPr>
-        </p:nvSpPr>
-        <p:spPr>
-          <a:xfrm>
-            <a:off x="27432" y="91440"/>
-            <a:ext cx="585216" cy="475488"/>
-          </a:xfrm>
-          <a:prstGeom prst="rect">
-            <a:avLst/>
-          </a:prstGeom>
-          <a:extLst>
-            <a:ext uri="{C572A759-6A51-4108-AA02-DFA0A04FC94B}">
-              <ma14:wrappingTextBoxFlag xmlns:ma14="http://schemas.microsoft.com/office/mac/drawingml/2011/main" val="0"/>
-            </a:ext>
-          </a:extLst>
-        </p:spPr>
-        <p:txBody>
-          <a:bodyPr/>
-          <a:lstStyle>
-            <a:lvl1pPr>
-              <a:defRPr sz="2000">
-                <a:solidFill>
-                  <a:srgbClr val="FFFFFF"/>
-                </a:solidFill>
-                <a:latin typeface="Calibri"/>
-                <a:ea typeface="Calibri"/>
-                <a:cs typeface="Calibri"/>
-              </a:defRPr>
-            </a:lvl1pPr>
-          </a:lstStyle>
-          <a:p>
-            <a:pPr algn="ctr"/>
-            <a:fld id="{F7021451-1387-4CA6-816F-3879F97B5CBC}" type="slidenum">
-              <a:rPr b="1" lang="en-US"/>
-              <a:t>5</a:t>
+              <a:t>58</a:t>
             </a:fld>
             <a:endParaRPr lang="en-US"/>
           </a:p>

--- a/lecons/F3/02_FORM4_FURTHER_STUDY1_Universe_and_Moon.pptx
+++ b/lecons/F3/02_FORM4_FURTHER_STUDY1_Universe_and_Moon.pptx
@@ -13000,7 +13000,7 @@
               <a:buNone/>
             </a:pPr>
             <a:r>
-              <a:rPr lang="en-US" sz="4000" b="1" dirty="0">
+              <a:rPr lang="en-US" sz="3200" b="1" dirty="0">
                 <a:solidFill>
                   <a:srgbClr val="111111"/>
                 </a:solidFill>
@@ -13010,7 +13010,7 @@
               </a:rPr>
               <a:t>Topic: The Earth as a Planet in the Solar System</a:t>
             </a:r>
-            <a:endParaRPr lang="en-US" sz="4000" dirty="0"/>
+            <a:endParaRPr lang="en-US" sz="3200" dirty="0"/>
           </a:p>
           <a:p>
             <a:pPr algn="l" indent="0" marL="0">
@@ -13020,7 +13020,7 @@
               <a:buNone/>
             </a:pPr>
             <a:r>
-              <a:rPr lang="en-US" sz="4000" b="1" dirty="0">
+              <a:rPr lang="en-US" sz="3200" b="1" dirty="0">
                 <a:solidFill>
                   <a:srgbClr val="111111"/>
                 </a:solidFill>
@@ -13030,7 +13030,7 @@
               </a:rPr>
               <a:t>Sub-topic: The Earth as a Planet of the Solar System</a:t>
             </a:r>
-            <a:endParaRPr lang="en-US" sz="4000" dirty="0"/>
+            <a:endParaRPr lang="en-US" sz="3200" dirty="0"/>
           </a:p>
           <a:p>
             <a:pPr algn="l" indent="0" marL="0">
@@ -13040,7 +13040,7 @@
               <a:buNone/>
             </a:pPr>
             <a:r>
-              <a:rPr lang="en-US" sz="4000" b="1" dirty="0">
+              <a:rPr lang="en-US" sz="3200" b="1" dirty="0">
                 <a:solidFill>
                   <a:srgbClr val="990011"/>
                 </a:solidFill>
@@ -13050,7 +13050,7 @@
               </a:rPr>
               <a:t>Further Study 1: The Universe and the Moon</a:t>
             </a:r>
-            <a:endParaRPr lang="en-US" sz="4000" dirty="0"/>
+            <a:endParaRPr lang="en-US" sz="3200" dirty="0"/>
           </a:p>
         </p:txBody>
       </p:sp>

--- a/lecons/F3/02_FORM4_FURTHER_STUDY1_Universe_and_Moon.pptx
+++ b/lecons/F3/02_FORM4_FURTHER_STUDY1_Universe_and_Moon.pptx
@@ -3463,7 +3463,7 @@
           <a:p>
             <a:r>
               <a:rPr lang="en-US" dirty="0"/>
-              <a:t>Before we start the new lesson, let us correct the homework I gave you at the end of Lesson 1: Our Planet, the Earth: Size, Shape and Proofs. The question was: Look at the Moon on three different evenings this week. Draw its shape each time and write the date under each drawing. Take out your exercise books.</a:t>
+              <a:t>Before we start the new lesson, let us correct the homework I gave you at the end of Lesson 1: Our Planet, the Earth: Size, Shape and Proofs. The question was: Name the four main phases of the Moon. Take out your exercise books.</a:t>
             </a:r>
             <a:endParaRPr lang="en-US" dirty="0"/>
           </a:p>
@@ -4431,7 +4431,7 @@
           <a:p>
             <a:r>
               <a:rPr lang="en-US" dirty="0"/>
-              <a:t>Here is a good answer. The drawings should show the Moon changing shape: for example a thin crescent, then a half Moon, then a nearly full Moon, each with its date. Compare it with your own answer and correct your work in red.</a:t>
+              <a:t>Here is a good answer. New Moon, first quarter, full Moon and last quarter. Compare it with your own answer and correct your work in red.</a:t>
             </a:r>
             <a:endParaRPr lang="en-US" dirty="0"/>
           </a:p>
@@ -4695,7 +4695,7 @@
           <a:p>
             <a:r>
               <a:rPr lang="en-US" dirty="0"/>
-              <a:t>For your homework: Look at a map of Cameroon in your atlas. Find the numbers written on the edges of the map and copy the numbers written near Garoua. We shall correct it at the beginning of our next lesson.</a:t>
+              <a:t>For your homework: Give the value of the Equator and of the Greenwich Meridian. We shall correct it at the beginning of our next lesson.</a:t>
             </a:r>
             <a:endParaRPr lang="en-US" dirty="0"/>
           </a:p>
@@ -15931,7 +15931,7 @@
         <p:spPr>
           <a:xfrm>
             <a:off x="0" y="658368"/>
-            <a:ext cx="3840480" cy="5833872"/>
+            <a:ext cx="5120640" cy="5833872"/>
           </a:xfrm>
           <a:prstGeom prst="rect">
             <a:avLst/>
@@ -15946,8 +15946,8 @@
         </p:nvSpPr>
         <p:spPr>
           <a:xfrm>
-            <a:off x="4069080" y="1005840"/>
-            <a:ext cx="7802575" cy="731520"/>
+            <a:off x="5349240" y="1005840"/>
+            <a:ext cx="6522415" cy="731520"/>
           </a:xfrm>
           <a:prstGeom prst="rect">
             <a:avLst/>
@@ -15987,8 +15987,8 @@
         </p:nvSpPr>
         <p:spPr>
           <a:xfrm>
-            <a:off x="4069080" y="1783080"/>
-            <a:ext cx="7802575" cy="4663440"/>
+            <a:off x="5349240" y="1783080"/>
+            <a:ext cx="6522415" cy="4663440"/>
           </a:xfrm>
           <a:prstGeom prst="rect">
             <a:avLst/>
@@ -16035,7 +16035,7 @@
                 <a:ea typeface="Times New Roman" pitchFamily="34" charset="-122"/>
                 <a:cs typeface="Times New Roman" pitchFamily="34" charset="-120"/>
               </a:rPr>
-              <a:t>Look at the Moon on three different evenings this week. Draw its shape each time and write the date under each drawing.</a:t>
+              <a:t>Name the four main phases of the Moon.</a:t>
             </a:r>
             <a:endParaRPr lang="en-US" sz="4000" dirty="0"/>
           </a:p>
@@ -19106,7 +19106,7 @@
                 <a:ea typeface="Times New Roman" pitchFamily="34" charset="-122"/>
                 <a:cs typeface="Times New Roman" pitchFamily="34" charset="-120"/>
               </a:rPr>
-              <a:t>The drawings should show the Moon changing shape: for example a thin crescent, then a half Moon, then a nearly full Moon, each with its date.</a:t>
+              <a:t>New Moon, first quarter, full Moon and last quarter.</a:t>
             </a:r>
             <a:endParaRPr lang="en-US" sz="4000" dirty="0"/>
           </a:p>
@@ -19829,7 +19829,7 @@
                 <a:ea typeface="Times New Roman" pitchFamily="34" charset="-122"/>
                 <a:cs typeface="Times New Roman" pitchFamily="34" charset="-120"/>
               </a:rPr>
-              <a:t>Look at a map of Cameroon in your atlas. Find the numbers written on the edges of the map and copy the numbers written near Garoua.</a:t>
+              <a:t>Give the value of the Equator and of the Greenwich Meridian.</a:t>
             </a:r>
             <a:endParaRPr lang="en-US" sz="4000" dirty="0"/>
           </a:p>
@@ -22769,7 +22769,7 @@
                           <a:ea typeface="Calibri" pitchFamily="34" charset="-122"/>
                           <a:cs typeface="Calibri" pitchFamily="34" charset="-120"/>
                         </a:rPr>
-                        <a:t>Look at a map of Cameroon in your atlas. Find the numbers written on the edges of the map and copy the numbers written near Garoua.</a:t>
+                        <a:t>Give the value of the Equator and of the Greenwich Meridian.</a:t>
                       </a:r>
                       <a:endParaRPr lang="en-US" sz="1600" dirty="0">
                         <a:latin typeface="Calibri" charset="0"/>
